--- a/ppt_form.pptx
+++ b/ppt_form.pptx
@@ -7682,6 +7682,49 @@
                 <a:ea typeface="HY엽서M" panose="02030600000101010101" pitchFamily="18" charset="-127"/>
               </a:rPr>
               <a:t>:    </a:t>
+            </a:r>
+          </a:p>
+        </p:txBody>
+      </p:sp>
+      <p:sp>
+        <p:nvSpPr>
+          <p:cNvPr id="93" name="TextBox 심장4종"/>
+          <p:cNvSpPr txBox="1"/>
+          <p:nvPr/>
+        </p:nvSpPr>
+        <p:spPr>
+          <a:xfrm>
+            <a:off x="3977639" y="1435608"/>
+            <a:ext cx="2523744" cy="521207"/>
+          </a:xfrm>
+          <a:prstGeom prst="rect">
+            <a:avLst/>
+          </a:prstGeom>
+          <a:noFill/>
+        </p:spPr>
+        <p:txBody>
+          <a:bodyPr wrap="none">
+            <a:spAutoFit/>
+          </a:bodyPr>
+          <a:lstStyle/>
+          <a:p>
+            <a:r>
+              <a:rPr sz="1400"/>
+              <a:t>협심증/심부전/염증 </a:t>
+            </a:r>
+            <a:r>
+              <a:rPr sz="1400"/>
+              <a:t/>
+            </a:r>
+          </a:p>
+          <a:p>
+            <a:r>
+              <a:rPr sz="1400"/>
+              <a:t>부정맥 </a:t>
+            </a:r>
+            <a:r>
+              <a:rPr sz="1400"/>
+              <a:t/>
             </a:r>
           </a:p>
         </p:txBody>

--- a/ppt_form.pptx
+++ b/ppt_form.pptx
@@ -6962,14 +6962,14 @@
           </a:p>
           <a:p>
             <a:r>
-              <a:rPr lang="en-US" altLang="ko-KR" sz="1200" dirty="0">
+              <a:rPr lang="en-US" altLang="ko-KR" sz="890" dirty="0">
                 <a:latin typeface="HY엽서M" panose="02030600000101010101" pitchFamily="18" charset="-127"/>
                 <a:ea typeface="HY엽서M" panose="02030600000101010101" pitchFamily="18" charset="-127"/>
               </a:rPr>
               <a:t>1~5</a:t>
             </a:r>
             <a:r>
-              <a:rPr lang="ko-KR" altLang="en-US" sz="1200" dirty="0">
+              <a:rPr lang="ko-KR" altLang="en-US" sz="890" dirty="0">
                 <a:latin typeface="HY엽서M" panose="02030600000101010101" pitchFamily="18" charset="-127"/>
                 <a:ea typeface="HY엽서M" panose="02030600000101010101" pitchFamily="18" charset="-127"/>
               </a:rPr>
@@ -6982,21 +6982,21 @@
           </a:p>
           <a:p>
             <a:r>
-              <a:rPr lang="en-US" altLang="ko-KR" sz="900" dirty="0">
+              <a:rPr lang="en-US" altLang="ko-KR" sz="890" dirty="0">
                 <a:latin typeface="HY엽서M" panose="02030600000101010101" pitchFamily="18" charset="-127"/>
                 <a:ea typeface="HY엽서M" panose="02030600000101010101" pitchFamily="18" charset="-127"/>
               </a:rPr>
               <a:t>(      /      /      /      / </a:t>
             </a:r>
             <a:r>
-              <a:rPr lang="en-US" altLang="ko-KR" sz="800" dirty="0">
+              <a:rPr lang="en-US" altLang="ko-KR" sz="890" dirty="0">
                 <a:latin typeface="HY엽서M" panose="02030600000101010101" pitchFamily="18" charset="-127"/>
                 <a:ea typeface="HY엽서M" panose="02030600000101010101" pitchFamily="18" charset="-127"/>
               </a:rPr>
               <a:t>     </a:t>
             </a:r>
             <a:r>
-              <a:rPr lang="en-US" altLang="ko-KR" sz="1000" dirty="0">
+              <a:rPr lang="en-US" altLang="ko-KR" sz="890" dirty="0">
                 <a:latin typeface="HY엽서M" panose="02030600000101010101" pitchFamily="18" charset="-127"/>
                 <a:ea typeface="HY엽서M" panose="02030600000101010101" pitchFamily="18" charset="-127"/>
               </a:rPr>
@@ -7005,21 +7005,21 @@
           </a:p>
           <a:p>
             <a:r>
-              <a:rPr lang="en-US" altLang="ko-KR" sz="1000" dirty="0">
+              <a:rPr lang="en-US" altLang="ko-KR" sz="1200" dirty="0">
                 <a:latin typeface="HY엽서M" panose="02030600000101010101" pitchFamily="18" charset="-127"/>
                 <a:ea typeface="HY엽서M" panose="02030600000101010101" pitchFamily="18" charset="-127"/>
               </a:rPr>
               <a:t>_____</a:t>
             </a:r>
             <a:r>
-              <a:rPr lang="ko-KR" altLang="en-US" sz="1000" dirty="0">
+              <a:rPr lang="ko-KR" altLang="en-US" sz="1200" dirty="0">
                 <a:latin typeface="HY엽서M" panose="02030600000101010101" pitchFamily="18" charset="-127"/>
                 <a:ea typeface="HY엽서M" panose="02030600000101010101" pitchFamily="18" charset="-127"/>
               </a:rPr>
               <a:t>대 수술 </a:t>
             </a:r>
             <a:r>
-              <a:rPr lang="en-US" altLang="ko-KR" sz="1000" dirty="0">
+              <a:rPr lang="en-US" altLang="ko-KR" sz="1200" dirty="0">
                 <a:latin typeface="HY엽서M" panose="02030600000101010101" pitchFamily="18" charset="-127"/>
                 <a:ea typeface="HY엽서M" panose="02030600000101010101" pitchFamily="18" charset="-127"/>
               </a:rPr>
@@ -7028,14 +7028,14 @@
           </a:p>
           <a:p>
             <a:r>
-              <a:rPr lang="ko-KR" altLang="en-US" sz="1000" dirty="0">
+              <a:rPr lang="ko-KR" altLang="en-US" sz="1200" dirty="0">
                 <a:latin typeface="HY엽서M" panose="02030600000101010101" pitchFamily="18" charset="-127"/>
                 <a:ea typeface="HY엽서M" panose="02030600000101010101" pitchFamily="18" charset="-127"/>
               </a:rPr>
               <a:t>뇌혈관수술 </a:t>
             </a:r>
             <a:r>
-              <a:rPr lang="en-US" altLang="ko-KR" sz="1000" dirty="0">
+              <a:rPr lang="en-US" altLang="ko-KR" sz="1200" dirty="0">
                 <a:latin typeface="HY엽서M" panose="02030600000101010101" pitchFamily="18" charset="-127"/>
                 <a:ea typeface="HY엽서M" panose="02030600000101010101" pitchFamily="18" charset="-127"/>
               </a:rPr>
@@ -7044,21 +7044,21 @@
           </a:p>
           <a:p>
             <a:r>
-              <a:rPr lang="ko-KR" altLang="en-US" sz="1000" dirty="0" err="1">
+              <a:rPr lang="ko-KR" altLang="en-US" sz="1200" dirty="0" err="1">
                 <a:latin typeface="HY엽서M" panose="02030600000101010101" pitchFamily="18" charset="-127"/>
                 <a:ea typeface="HY엽서M" panose="02030600000101010101" pitchFamily="18" charset="-127"/>
               </a:rPr>
               <a:t>허혈성수술</a:t>
             </a:r>
             <a:r>
-              <a:rPr lang="ko-KR" altLang="en-US" sz="1000" dirty="0">
+              <a:rPr lang="ko-KR" altLang="en-US" sz="1200" dirty="0">
                 <a:latin typeface="HY엽서M" panose="02030600000101010101" pitchFamily="18" charset="-127"/>
                 <a:ea typeface="HY엽서M" panose="02030600000101010101" pitchFamily="18" charset="-127"/>
               </a:rPr>
               <a:t> </a:t>
             </a:r>
             <a:r>
-              <a:rPr lang="en-US" altLang="ko-KR" sz="1000" dirty="0">
+              <a:rPr lang="en-US" altLang="ko-KR" sz="1200" dirty="0">
                 <a:latin typeface="HY엽서M" panose="02030600000101010101" pitchFamily="18" charset="-127"/>
                 <a:ea typeface="HY엽서M" panose="02030600000101010101" pitchFamily="18" charset="-127"/>
               </a:rPr>
@@ -7067,14 +7067,14 @@
           </a:p>
           <a:p>
             <a:r>
-              <a:rPr lang="ko-KR" altLang="en-US" sz="1000" dirty="0">
+              <a:rPr lang="ko-KR" altLang="en-US" sz="1200" dirty="0">
                 <a:latin typeface="HY엽서M" panose="02030600000101010101" pitchFamily="18" charset="-127"/>
                 <a:ea typeface="HY엽서M" panose="02030600000101010101" pitchFamily="18" charset="-127"/>
               </a:rPr>
               <a:t>심장 수술 </a:t>
             </a:r>
             <a:r>
-              <a:rPr lang="en-US" altLang="ko-KR" sz="1000" dirty="0">
+              <a:rPr lang="en-US" altLang="ko-KR" sz="1200" dirty="0">
                 <a:latin typeface="HY엽서M" panose="02030600000101010101" pitchFamily="18" charset="-127"/>
                 <a:ea typeface="HY엽서M" panose="02030600000101010101" pitchFamily="18" charset="-127"/>
               </a:rPr>
@@ -7083,21 +7083,21 @@
           </a:p>
           <a:p>
             <a:r>
-              <a:rPr lang="en-US" altLang="ko-KR" sz="1000" dirty="0">
+              <a:rPr lang="en-US" altLang="ko-KR" sz="1200" dirty="0">
                 <a:latin typeface="HY엽서M" panose="02030600000101010101" pitchFamily="18" charset="-127"/>
                 <a:ea typeface="HY엽서M" panose="02030600000101010101" pitchFamily="18" charset="-127"/>
               </a:rPr>
               <a:t>5</a:t>
             </a:r>
             <a:r>
-              <a:rPr lang="ko-KR" altLang="en-US" sz="1000" dirty="0">
+              <a:rPr lang="ko-KR" altLang="en-US" sz="1200" dirty="0">
                 <a:latin typeface="HY엽서M" panose="02030600000101010101" pitchFamily="18" charset="-127"/>
                 <a:ea typeface="HY엽서M" panose="02030600000101010101" pitchFamily="18" charset="-127"/>
               </a:rPr>
               <a:t>대기관수술 </a:t>
             </a:r>
             <a:r>
-              <a:rPr lang="en-US" altLang="ko-KR" sz="1000" dirty="0">
+              <a:rPr lang="en-US" altLang="ko-KR" sz="1200" dirty="0">
                 <a:latin typeface="HY엽서M" panose="02030600000101010101" pitchFamily="18" charset="-127"/>
                 <a:ea typeface="HY엽서M" panose="02030600000101010101" pitchFamily="18" charset="-127"/>
               </a:rPr>
@@ -7106,21 +7106,21 @@
           </a:p>
           <a:p>
             <a:r>
-              <a:rPr lang="en-US" altLang="ko-KR" sz="1000" dirty="0">
+              <a:rPr lang="en-US" altLang="ko-KR" sz="1200" dirty="0">
                 <a:latin typeface="HY엽서M" panose="02030600000101010101" pitchFamily="18" charset="-127"/>
                 <a:ea typeface="HY엽서M" panose="02030600000101010101" pitchFamily="18" charset="-127"/>
               </a:rPr>
               <a:t>_____</a:t>
             </a:r>
             <a:r>
-              <a:rPr lang="ko-KR" altLang="en-US" sz="1000" dirty="0">
+              <a:rPr lang="ko-KR" altLang="en-US" sz="1200" dirty="0">
                 <a:latin typeface="HY엽서M" panose="02030600000101010101" pitchFamily="18" charset="-127"/>
                 <a:ea typeface="HY엽서M" panose="02030600000101010101" pitchFamily="18" charset="-127"/>
               </a:rPr>
               <a:t>대 수술 </a:t>
             </a:r>
             <a:r>
-              <a:rPr lang="en-US" altLang="ko-KR" sz="1000" dirty="0">
+              <a:rPr lang="en-US" altLang="ko-KR" sz="1200" dirty="0">
                 <a:latin typeface="HY엽서M" panose="02030600000101010101" pitchFamily="18" charset="-127"/>
                 <a:ea typeface="HY엽서M" panose="02030600000101010101" pitchFamily="18" charset="-127"/>
               </a:rPr>
@@ -7129,21 +7129,21 @@
           </a:p>
           <a:p>
             <a:r>
-              <a:rPr lang="en-US" altLang="ko-KR" sz="1000" dirty="0">
+              <a:rPr lang="en-US" altLang="ko-KR" sz="1200" dirty="0">
                 <a:latin typeface="HY엽서M" panose="02030600000101010101" pitchFamily="18" charset="-127"/>
                 <a:ea typeface="HY엽서M" panose="02030600000101010101" pitchFamily="18" charset="-127"/>
               </a:rPr>
               <a:t>______</a:t>
             </a:r>
             <a:r>
-              <a:rPr lang="ko-KR" altLang="en-US" sz="1000" dirty="0">
+              <a:rPr lang="ko-KR" altLang="en-US" sz="1200" dirty="0">
                 <a:latin typeface="HY엽서M" panose="02030600000101010101" pitchFamily="18" charset="-127"/>
                 <a:ea typeface="HY엽서M" panose="02030600000101010101" pitchFamily="18" charset="-127"/>
               </a:rPr>
               <a:t>수술 </a:t>
             </a:r>
             <a:r>
-              <a:rPr lang="en-US" altLang="ko-KR" sz="1000" dirty="0">
+              <a:rPr lang="en-US" altLang="ko-KR" sz="1200" dirty="0">
                 <a:latin typeface="HY엽서M" panose="02030600000101010101" pitchFamily="18" charset="-127"/>
                 <a:ea typeface="HY엽서M" panose="02030600000101010101" pitchFamily="18" charset="-127"/>
               </a:rPr>
@@ -7220,14 +7220,14 @@
           </a:p>
           <a:p>
             <a:r>
-              <a:rPr lang="en-US" altLang="ko-KR" sz="1200" dirty="0">
+              <a:rPr lang="en-US" altLang="ko-KR" sz="890" dirty="0">
                 <a:latin typeface="HY엽서M" panose="02030600000101010101" pitchFamily="18" charset="-127"/>
                 <a:ea typeface="HY엽서M" panose="02030600000101010101" pitchFamily="18" charset="-127"/>
               </a:rPr>
               <a:t>1~5</a:t>
             </a:r>
             <a:r>
-              <a:rPr lang="ko-KR" altLang="en-US" sz="1200" dirty="0">
+              <a:rPr lang="ko-KR" altLang="en-US" sz="890" dirty="0">
                 <a:latin typeface="HY엽서M" panose="02030600000101010101" pitchFamily="18" charset="-127"/>
                 <a:ea typeface="HY엽서M" panose="02030600000101010101" pitchFamily="18" charset="-127"/>
               </a:rPr>
@@ -7240,21 +7240,21 @@
           </a:p>
           <a:p>
             <a:r>
-              <a:rPr lang="en-US" altLang="ko-KR" sz="900" dirty="0">
+              <a:rPr lang="en-US" altLang="ko-KR" sz="890" dirty="0">
                 <a:latin typeface="HY엽서M" panose="02030600000101010101" pitchFamily="18" charset="-127"/>
                 <a:ea typeface="HY엽서M" panose="02030600000101010101" pitchFamily="18" charset="-127"/>
               </a:rPr>
               <a:t>(      /      /      /      / </a:t>
             </a:r>
             <a:r>
-              <a:rPr lang="en-US" altLang="ko-KR" sz="800" dirty="0">
+              <a:rPr lang="en-US" altLang="ko-KR" sz="890" dirty="0">
                 <a:latin typeface="HY엽서M" panose="02030600000101010101" pitchFamily="18" charset="-127"/>
                 <a:ea typeface="HY엽서M" panose="02030600000101010101" pitchFamily="18" charset="-127"/>
               </a:rPr>
               <a:t>     </a:t>
             </a:r>
             <a:r>
-              <a:rPr lang="en-US" altLang="ko-KR" sz="1000" dirty="0">
+              <a:rPr lang="en-US" altLang="ko-KR" sz="890" dirty="0">
                 <a:latin typeface="HY엽서M" panose="02030600000101010101" pitchFamily="18" charset="-127"/>
                 <a:ea typeface="HY엽서M" panose="02030600000101010101" pitchFamily="18" charset="-127"/>
               </a:rPr>
@@ -7263,14 +7263,14 @@
           </a:p>
           <a:p>
             <a:r>
-              <a:rPr lang="ko-KR" altLang="en-US" sz="1000" dirty="0">
+              <a:rPr lang="ko-KR" altLang="en-US" sz="1200" dirty="0">
                 <a:latin typeface="HY엽서M" panose="02030600000101010101" pitchFamily="18" charset="-127"/>
                 <a:ea typeface="HY엽서M" panose="02030600000101010101" pitchFamily="18" charset="-127"/>
               </a:rPr>
               <a:t>골절수술 </a:t>
             </a:r>
             <a:r>
-              <a:rPr lang="en-US" altLang="ko-KR" sz="1000" dirty="0">
+              <a:rPr lang="en-US" altLang="ko-KR" sz="1200" dirty="0">
                 <a:latin typeface="HY엽서M" panose="02030600000101010101" pitchFamily="18" charset="-127"/>
                 <a:ea typeface="HY엽서M" panose="02030600000101010101" pitchFamily="18" charset="-127"/>
               </a:rPr>
@@ -7279,28 +7279,28 @@
           </a:p>
           <a:p>
             <a:r>
-              <a:rPr lang="en-US" altLang="ko-KR" sz="1000" dirty="0">
+              <a:rPr lang="en-US" altLang="ko-KR" sz="1200" dirty="0">
                 <a:latin typeface="HY엽서M" panose="02030600000101010101" pitchFamily="18" charset="-127"/>
                 <a:ea typeface="HY엽서M" panose="02030600000101010101" pitchFamily="18" charset="-127"/>
               </a:rPr>
               <a:t>5</a:t>
             </a:r>
             <a:r>
-              <a:rPr lang="ko-KR" altLang="en-US" sz="1000" dirty="0" err="1">
+              <a:rPr lang="ko-KR" altLang="en-US" sz="1200" dirty="0" err="1">
                 <a:latin typeface="HY엽서M" panose="02030600000101010101" pitchFamily="18" charset="-127"/>
                 <a:ea typeface="HY엽서M" panose="02030600000101010101" pitchFamily="18" charset="-127"/>
               </a:rPr>
               <a:t>대골절수술</a:t>
             </a:r>
             <a:r>
-              <a:rPr lang="ko-KR" altLang="en-US" sz="1000" dirty="0">
+              <a:rPr lang="ko-KR" altLang="en-US" sz="1200" dirty="0">
                 <a:latin typeface="HY엽서M" panose="02030600000101010101" pitchFamily="18" charset="-127"/>
                 <a:ea typeface="HY엽서M" panose="02030600000101010101" pitchFamily="18" charset="-127"/>
               </a:rPr>
               <a:t> </a:t>
             </a:r>
             <a:r>
-              <a:rPr lang="en-US" altLang="ko-KR" sz="1000" dirty="0">
+              <a:rPr lang="en-US" altLang="ko-KR" sz="1200" dirty="0">
                 <a:latin typeface="HY엽서M" panose="02030600000101010101" pitchFamily="18" charset="-127"/>
                 <a:ea typeface="HY엽서M" panose="02030600000101010101" pitchFamily="18" charset="-127"/>
               </a:rPr>
@@ -7309,14 +7309,14 @@
           </a:p>
           <a:p>
             <a:r>
-              <a:rPr lang="ko-KR" altLang="en-US" sz="1000" dirty="0">
+              <a:rPr lang="ko-KR" altLang="en-US" sz="1200" dirty="0">
                 <a:latin typeface="HY엽서M" panose="02030600000101010101" pitchFamily="18" charset="-127"/>
                 <a:ea typeface="HY엽서M" panose="02030600000101010101" pitchFamily="18" charset="-127"/>
               </a:rPr>
               <a:t>화상수술 </a:t>
             </a:r>
             <a:r>
-              <a:rPr lang="en-US" altLang="ko-KR" sz="1000" dirty="0">
+              <a:rPr lang="en-US" altLang="ko-KR" sz="1200" dirty="0">
                 <a:latin typeface="HY엽서M" panose="02030600000101010101" pitchFamily="18" charset="-127"/>
                 <a:ea typeface="HY엽서M" panose="02030600000101010101" pitchFamily="18" charset="-127"/>
               </a:rPr>
@@ -7325,14 +7325,14 @@
           </a:p>
           <a:p>
             <a:r>
-              <a:rPr lang="ko-KR" altLang="en-US" sz="1050" dirty="0">
+              <a:rPr lang="ko-KR" altLang="en-US" sz="1200" dirty="0">
                 <a:latin typeface="HY엽서M" panose="02030600000101010101" pitchFamily="18" charset="-127"/>
                 <a:ea typeface="HY엽서M" panose="02030600000101010101" pitchFamily="18" charset="-127"/>
               </a:rPr>
               <a:t>중대상해수술 </a:t>
             </a:r>
             <a:r>
-              <a:rPr lang="en-US" altLang="ko-KR" sz="1050" dirty="0">
+              <a:rPr lang="en-US" altLang="ko-KR" sz="1200" dirty="0">
                 <a:latin typeface="HY엽서M" panose="02030600000101010101" pitchFamily="18" charset="-127"/>
                 <a:ea typeface="HY엽서M" panose="02030600000101010101" pitchFamily="18" charset="-127"/>
               </a:rPr>
@@ -7341,21 +7341,21 @@
           </a:p>
           <a:p>
             <a:r>
-              <a:rPr lang="ko-KR" altLang="en-US" sz="1050" dirty="0" err="1">
+              <a:rPr lang="ko-KR" altLang="en-US" sz="1200" dirty="0" err="1">
                 <a:latin typeface="HY엽서M" panose="02030600000101010101" pitchFamily="18" charset="-127"/>
                 <a:ea typeface="HY엽서M" panose="02030600000101010101" pitchFamily="18" charset="-127"/>
               </a:rPr>
               <a:t>창상봉합수술</a:t>
             </a:r>
             <a:r>
-              <a:rPr lang="ko-KR" altLang="en-US" sz="1050" dirty="0">
+              <a:rPr lang="ko-KR" altLang="en-US" sz="1200" dirty="0">
                 <a:latin typeface="HY엽서M" panose="02030600000101010101" pitchFamily="18" charset="-127"/>
                 <a:ea typeface="HY엽서M" panose="02030600000101010101" pitchFamily="18" charset="-127"/>
               </a:rPr>
               <a:t> </a:t>
             </a:r>
             <a:r>
-              <a:rPr lang="en-US" altLang="ko-KR" sz="1050" dirty="0">
+              <a:rPr lang="en-US" altLang="ko-KR" sz="1200" dirty="0">
                 <a:latin typeface="HY엽서M" panose="02030600000101010101" pitchFamily="18" charset="-127"/>
                 <a:ea typeface="HY엽서M" panose="02030600000101010101" pitchFamily="18" charset="-127"/>
               </a:rPr>
@@ -7364,21 +7364,21 @@
           </a:p>
           <a:p>
             <a:r>
-              <a:rPr lang="en-US" altLang="ko-KR" sz="1000" dirty="0">
+              <a:rPr lang="en-US" altLang="ko-KR" sz="1200" dirty="0">
                 <a:latin typeface="HY엽서M" panose="02030600000101010101" pitchFamily="18" charset="-127"/>
                 <a:ea typeface="HY엽서M" panose="02030600000101010101" pitchFamily="18" charset="-127"/>
               </a:rPr>
               <a:t>________</a:t>
             </a:r>
             <a:r>
-              <a:rPr lang="ko-KR" altLang="en-US" sz="1000" dirty="0">
+              <a:rPr lang="ko-KR" altLang="en-US" sz="1200" dirty="0">
                 <a:latin typeface="HY엽서M" panose="02030600000101010101" pitchFamily="18" charset="-127"/>
                 <a:ea typeface="HY엽서M" panose="02030600000101010101" pitchFamily="18" charset="-127"/>
               </a:rPr>
               <a:t>수술 </a:t>
             </a:r>
             <a:r>
-              <a:rPr lang="en-US" altLang="ko-KR" sz="1000" dirty="0">
+              <a:rPr lang="en-US" altLang="ko-KR" sz="1200" dirty="0">
                 <a:latin typeface="HY엽서M" panose="02030600000101010101" pitchFamily="18" charset="-127"/>
                 <a:ea typeface="HY엽서M" panose="02030600000101010101" pitchFamily="18" charset="-127"/>
               </a:rPr>

--- a/ppt_form.pptx
+++ b/ppt_form.pptx
@@ -7709,21 +7709,21 @@
           <a:lstStyle/>
           <a:p>
             <a:r>
-              <a:rPr sz="1400"/>
+              <a:rPr sz="1100"/>
               <a:t>협심증/심부전/염증 </a:t>
             </a:r>
             <a:r>
-              <a:rPr sz="1400"/>
+              <a:rPr sz="1100"/>
               <a:t/>
             </a:r>
           </a:p>
           <a:p>
             <a:r>
-              <a:rPr sz="1400"/>
+              <a:rPr sz="1100"/>
               <a:t>부정맥 </a:t>
             </a:r>
             <a:r>
-              <a:rPr sz="1400"/>
+              <a:rPr sz="1100"/>
               <a:t/>
             </a:r>
           </a:p>

--- a/ppt_form.pptx
+++ b/ppt_form.pptx
@@ -8,7 +8,7 @@
     <p:sldId id="258" r:id="rId2"/>
   </p:sldIdLst>
   <p:sldSz cx="6858000" cy="9906000" type="A4"/>
-  <p:notesSz cx="10018713" cy="14447838"/>
+  <p:notesSz cx="9875838" cy="14303375"/>
   <p:defaultTextStyle>
     <a:defPPr>
       <a:defRPr lang="en-US"/>
@@ -243,7 +243,7 @@
           <a:p>
             <a:fld id="{9D5F825C-5304-4128-8698-8A30172550A0}" type="datetimeFigureOut">
               <a:rPr lang="ko-KR" altLang="en-US" smtClean="0"/>
-              <a:t>2026-01-24</a:t>
+              <a:t>2026-08-02</a:t>
             </a:fld>
             <a:endParaRPr lang="ko-KR" altLang="en-US"/>
           </a:p>
@@ -413,7 +413,7 @@
           <a:p>
             <a:fld id="{9D5F825C-5304-4128-8698-8A30172550A0}" type="datetimeFigureOut">
               <a:rPr lang="ko-KR" altLang="en-US" smtClean="0"/>
-              <a:t>2026-01-24</a:t>
+              <a:t>2026-08-02</a:t>
             </a:fld>
             <a:endParaRPr lang="ko-KR" altLang="en-US"/>
           </a:p>
@@ -593,7 +593,7 @@
           <a:p>
             <a:fld id="{9D5F825C-5304-4128-8698-8A30172550A0}" type="datetimeFigureOut">
               <a:rPr lang="ko-KR" altLang="en-US" smtClean="0"/>
-              <a:t>2026-01-24</a:t>
+              <a:t>2026-08-02</a:t>
             </a:fld>
             <a:endParaRPr lang="ko-KR" altLang="en-US"/>
           </a:p>
@@ -763,7 +763,7 @@
           <a:p>
             <a:fld id="{9D5F825C-5304-4128-8698-8A30172550A0}" type="datetimeFigureOut">
               <a:rPr lang="ko-KR" altLang="en-US" smtClean="0"/>
-              <a:t>2026-01-24</a:t>
+              <a:t>2026-08-02</a:t>
             </a:fld>
             <a:endParaRPr lang="ko-KR" altLang="en-US"/>
           </a:p>
@@ -1009,7 +1009,7 @@
           <a:p>
             <a:fld id="{9D5F825C-5304-4128-8698-8A30172550A0}" type="datetimeFigureOut">
               <a:rPr lang="ko-KR" altLang="en-US" smtClean="0"/>
-              <a:t>2026-01-24</a:t>
+              <a:t>2026-08-02</a:t>
             </a:fld>
             <a:endParaRPr lang="ko-KR" altLang="en-US"/>
           </a:p>
@@ -1241,7 +1241,7 @@
           <a:p>
             <a:fld id="{9D5F825C-5304-4128-8698-8A30172550A0}" type="datetimeFigureOut">
               <a:rPr lang="ko-KR" altLang="en-US" smtClean="0"/>
-              <a:t>2026-01-24</a:t>
+              <a:t>2026-08-02</a:t>
             </a:fld>
             <a:endParaRPr lang="ko-KR" altLang="en-US"/>
           </a:p>
@@ -1608,7 +1608,7 @@
           <a:p>
             <a:fld id="{9D5F825C-5304-4128-8698-8A30172550A0}" type="datetimeFigureOut">
               <a:rPr lang="ko-KR" altLang="en-US" smtClean="0"/>
-              <a:t>2026-01-24</a:t>
+              <a:t>2026-08-02</a:t>
             </a:fld>
             <a:endParaRPr lang="ko-KR" altLang="en-US"/>
           </a:p>
@@ -1726,7 +1726,7 @@
           <a:p>
             <a:fld id="{9D5F825C-5304-4128-8698-8A30172550A0}" type="datetimeFigureOut">
               <a:rPr lang="ko-KR" altLang="en-US" smtClean="0"/>
-              <a:t>2026-01-24</a:t>
+              <a:t>2026-08-02</a:t>
             </a:fld>
             <a:endParaRPr lang="ko-KR" altLang="en-US"/>
           </a:p>
@@ -1821,7 +1821,7 @@
           <a:p>
             <a:fld id="{9D5F825C-5304-4128-8698-8A30172550A0}" type="datetimeFigureOut">
               <a:rPr lang="ko-KR" altLang="en-US" smtClean="0"/>
-              <a:t>2026-01-24</a:t>
+              <a:t>2026-08-02</a:t>
             </a:fld>
             <a:endParaRPr lang="ko-KR" altLang="en-US"/>
           </a:p>
@@ -2098,7 +2098,7 @@
           <a:p>
             <a:fld id="{9D5F825C-5304-4128-8698-8A30172550A0}" type="datetimeFigureOut">
               <a:rPr lang="ko-KR" altLang="en-US" smtClean="0"/>
-              <a:t>2026-01-24</a:t>
+              <a:t>2026-08-02</a:t>
             </a:fld>
             <a:endParaRPr lang="ko-KR" altLang="en-US"/>
           </a:p>
@@ -2355,7 +2355,7 @@
           <a:p>
             <a:fld id="{9D5F825C-5304-4128-8698-8A30172550A0}" type="datetimeFigureOut">
               <a:rPr lang="ko-KR" altLang="en-US" smtClean="0"/>
-              <a:t>2026-01-24</a:t>
+              <a:t>2026-08-02</a:t>
             </a:fld>
             <a:endParaRPr lang="ko-KR" altLang="en-US"/>
           </a:p>
@@ -2568,7 +2568,7 @@
           <a:p>
             <a:fld id="{9D5F825C-5304-4128-8698-8A30172550A0}" type="datetimeFigureOut">
               <a:rPr lang="ko-KR" altLang="en-US" smtClean="0"/>
-              <a:t>2026-01-24</a:t>
+              <a:t>2026-08-02</a:t>
             </a:fld>
             <a:endParaRPr lang="ko-KR" altLang="en-US"/>
           </a:p>
@@ -3022,7 +3022,7 @@
           </a:fontRef>
         </p:style>
         <p:txBody>
-          <a:bodyPr rtlCol="0" anchor="ctr"/>
+          <a:bodyPr wrap="none" rtlCol="0" anchor="ctr"/>
           <a:lstStyle/>
           <a:p>
             <a:pPr algn="ctr"/>
@@ -3083,7 +3083,7 @@
           </a:fontRef>
         </p:style>
         <p:txBody>
-          <a:bodyPr rtlCol="0" anchor="ctr"/>
+          <a:bodyPr wrap="none" rtlCol="0" anchor="ctr"/>
           <a:lstStyle/>
           <a:p>
             <a:pPr algn="ctr"/>
@@ -3144,7 +3144,7 @@
           </a:fontRef>
         </p:style>
         <p:txBody>
-          <a:bodyPr rtlCol="0" anchor="ctr"/>
+          <a:bodyPr wrap="none" rtlCol="0" anchor="ctr"/>
           <a:lstStyle/>
           <a:p>
             <a:pPr algn="ctr"/>
@@ -3195,7 +3195,7 @@
           </a:fontRef>
         </p:style>
         <p:txBody>
-          <a:bodyPr rtlCol="0" anchor="ctr"/>
+          <a:bodyPr wrap="none" rtlCol="0" anchor="ctr"/>
           <a:lstStyle/>
           <a:p>
             <a:pPr algn="ctr"/>
@@ -3246,7 +3246,7 @@
           </a:fontRef>
         </p:style>
         <p:txBody>
-          <a:bodyPr rtlCol="0" anchor="ctr"/>
+          <a:bodyPr wrap="none" rtlCol="0" anchor="ctr"/>
           <a:lstStyle/>
           <a:p>
             <a:pPr algn="ctr"/>
@@ -3297,7 +3297,7 @@
           </a:fontRef>
         </p:style>
         <p:txBody>
-          <a:bodyPr rtlCol="0" anchor="ctr"/>
+          <a:bodyPr wrap="none" rtlCol="0" anchor="ctr"/>
           <a:lstStyle/>
           <a:p>
             <a:pPr algn="ctr"/>
@@ -3348,7 +3348,7 @@
           </a:fontRef>
         </p:style>
         <p:txBody>
-          <a:bodyPr rtlCol="0" anchor="ctr"/>
+          <a:bodyPr wrap="none" rtlCol="0" anchor="ctr"/>
           <a:lstStyle/>
           <a:p>
             <a:pPr algn="ctr"/>
@@ -3374,7 +3374,7 @@
         </p:nvSpPr>
         <p:spPr>
           <a:xfrm>
-            <a:off x="1739961" y="272790"/>
+            <a:off x="1645237" y="252160"/>
             <a:ext cx="1942469" cy="400110"/>
           </a:xfrm>
           <a:prstGeom prst="rect">
@@ -3383,24 +3383,25 @@
           <a:noFill/>
         </p:spPr>
         <p:txBody>
-          <a:bodyPr wrap="square" rtlCol="0">
-            <a:spAutoFit/>
+          <a:bodyPr wrap="none" rtlCol="0">
+            <a:noAutofit/>
           </a:bodyPr>
           <a:lstStyle/>
           <a:p>
-            <a:r>
-              <a:rPr lang="ko-KR" altLang="en-US" sz="2000" dirty="0">
-                <a:latin typeface="HY엽서M" panose="02030600000101010101" pitchFamily="18" charset="-127"/>
-                <a:ea typeface="HY엽서M" panose="02030600000101010101" pitchFamily="18" charset="-127"/>
-              </a:rPr>
-              <a:t>님의 보장</a:t>
-            </a:r>
-            <a:r>
-              <a:rPr lang="en-US" altLang="ko-KR" sz="2000" dirty="0">
-                <a:latin typeface="HY엽서M" panose="02030600000101010101" pitchFamily="18" charset="-127"/>
-                <a:ea typeface="HY엽서M" panose="02030600000101010101" pitchFamily="18" charset="-127"/>
-              </a:rPr>
-              <a:t>(    )</a:t>
+            <a:pPr algn="ctr"/>
+            <a:r>
+              <a:rPr lang="ko-KR" altLang="en-US" sz="1800" dirty="0">
+                <a:latin typeface="HY엽서M" panose="02030600000101010101" pitchFamily="18" charset="-127"/>
+                <a:ea typeface="HY엽서M" panose="02030600000101010101" pitchFamily="18" charset="-127"/>
+              </a:rPr>
+              <a:t> 님의 보장</a:t>
+            </a:r>
+            <a:r>
+              <a:rPr lang="en-US" altLang="ko-KR" sz="1800" dirty="0">
+                <a:latin typeface="HY엽서M" panose="02030600000101010101" pitchFamily="18" charset="-127"/>
+                <a:ea typeface="HY엽서M" panose="02030600000101010101" pitchFamily="18" charset="-127"/>
+              </a:rPr>
+              <a:t>(전)</a:t>
             </a:r>
             <a:endParaRPr lang="ko-KR" altLang="en-US" sz="2000" dirty="0">
               <a:latin typeface="HY엽서M" panose="02030600000101010101" pitchFamily="18" charset="-127"/>
@@ -3424,9 +3425,9 @@
           <p:nvPr/>
         </p:nvCxnSpPr>
         <p:spPr>
-          <a:xfrm>
-            <a:off x="234901" y="677039"/>
-            <a:ext cx="3194098" cy="0"/>
+          <a:xfrm flipV="1">
+            <a:off x="234901" y="630456"/>
+            <a:ext cx="6226845" cy="46583"/>
           </a:xfrm>
           <a:prstGeom prst="line">
             <a:avLst/>
@@ -3452,92 +3453,6 @@
           </a:fontRef>
         </p:style>
       </p:cxnSp>
-      <p:cxnSp>
-        <p:nvCxnSpPr>
-          <p:cNvPr id="28" name="직선 연결선 27">
-            <a:extLst>
-              <a:ext uri="{FF2B5EF4-FFF2-40B4-BE49-F238E27FC236}">
-                <a16:creationId xmlns:a16="http://schemas.microsoft.com/office/drawing/2014/main" id="{82D532ED-E95F-94E8-8C85-6D4111CEDF8A}"/>
-              </a:ext>
-            </a:extLst>
-          </p:cNvPr>
-          <p:cNvCxnSpPr>
-            <a:cxnSpLocks/>
-          </p:cNvCxnSpPr>
-          <p:nvPr/>
-        </p:nvCxnSpPr>
-        <p:spPr>
-          <a:xfrm>
-            <a:off x="4524956" y="635963"/>
-            <a:ext cx="390466" cy="0"/>
-          </a:xfrm>
-          <a:prstGeom prst="line">
-            <a:avLst/>
-          </a:prstGeom>
-          <a:ln w="38100">
-            <a:solidFill>
-              <a:srgbClr val="002060"/>
-            </a:solidFill>
-          </a:ln>
-        </p:spPr>
-        <p:style>
-          <a:lnRef idx="2">
-            <a:schemeClr val="accent1"/>
-          </a:lnRef>
-          <a:fillRef idx="0">
-            <a:schemeClr val="accent1"/>
-          </a:fillRef>
-          <a:effectRef idx="1">
-            <a:schemeClr val="accent1"/>
-          </a:effectRef>
-          <a:fontRef idx="minor">
-            <a:schemeClr val="tx1"/>
-          </a:fontRef>
-        </p:style>
-      </p:cxnSp>
-      <p:cxnSp>
-        <p:nvCxnSpPr>
-          <p:cNvPr id="29" name="직선 연결선 28">
-            <a:extLst>
-              <a:ext uri="{FF2B5EF4-FFF2-40B4-BE49-F238E27FC236}">
-                <a16:creationId xmlns:a16="http://schemas.microsoft.com/office/drawing/2014/main" id="{F9A57C97-149A-972A-B505-B2CE118081A4}"/>
-              </a:ext>
-            </a:extLst>
-          </p:cNvPr>
-          <p:cNvCxnSpPr>
-            <a:cxnSpLocks/>
-          </p:cNvCxnSpPr>
-          <p:nvPr/>
-        </p:nvCxnSpPr>
-        <p:spPr>
-          <a:xfrm>
-            <a:off x="5231847" y="630456"/>
-            <a:ext cx="376995" cy="0"/>
-          </a:xfrm>
-          <a:prstGeom prst="line">
-            <a:avLst/>
-          </a:prstGeom>
-          <a:ln w="38100">
-            <a:solidFill>
-              <a:srgbClr val="002060"/>
-            </a:solidFill>
-          </a:ln>
-        </p:spPr>
-        <p:style>
-          <a:lnRef idx="2">
-            <a:schemeClr val="accent1"/>
-          </a:lnRef>
-          <a:fillRef idx="0">
-            <a:schemeClr val="accent1"/>
-          </a:fillRef>
-          <a:effectRef idx="1">
-            <a:schemeClr val="accent1"/>
-          </a:effectRef>
-          <a:fontRef idx="minor">
-            <a:schemeClr val="tx1"/>
-          </a:fontRef>
-        </p:style>
-      </p:cxnSp>
       <p:sp>
         <p:nvSpPr>
           <p:cNvPr id="30" name="TextBox 29">
@@ -3561,64 +3476,16 @@
           <a:noFill/>
         </p:spPr>
         <p:txBody>
-          <a:bodyPr wrap="square" rtlCol="0">
-            <a:spAutoFit/>
+          <a:bodyPr wrap="none" rtlCol="0">
+            <a:noAutofit/>
           </a:bodyPr>
           <a:lstStyle/>
           <a:p>
-            <a:r>
-              <a:rPr lang="ko-KR" altLang="en-US" sz="2400" dirty="0">
-                <a:latin typeface="HY엽서M" panose="02030600000101010101" pitchFamily="18" charset="-127"/>
-                <a:ea typeface="HY엽서M" panose="02030600000101010101" pitchFamily="18" charset="-127"/>
-              </a:rPr>
-              <a:t>일 기준</a:t>
-            </a:r>
-          </a:p>
-        </p:txBody>
-      </p:sp>
-      <p:cxnSp>
-        <p:nvCxnSpPr>
-          <p:cNvPr id="31" name="직선 연결선 30">
-            <a:extLst>
-              <a:ext uri="{FF2B5EF4-FFF2-40B4-BE49-F238E27FC236}">
-                <a16:creationId xmlns:a16="http://schemas.microsoft.com/office/drawing/2014/main" id="{BC59FDC4-C311-2A38-3362-6B5F4C84FE23}"/>
-              </a:ext>
-            </a:extLst>
-          </p:cNvPr>
-          <p:cNvCxnSpPr>
-            <a:cxnSpLocks/>
-          </p:cNvCxnSpPr>
-          <p:nvPr/>
-        </p:nvCxnSpPr>
-        <p:spPr>
-          <a:xfrm>
-            <a:off x="3841883" y="630456"/>
-            <a:ext cx="410599" cy="0"/>
-          </a:xfrm>
-          <a:prstGeom prst="line">
-            <a:avLst/>
-          </a:prstGeom>
-          <a:ln w="38100">
-            <a:solidFill>
-              <a:srgbClr val="002060"/>
-            </a:solidFill>
-          </a:ln>
-        </p:spPr>
-        <p:style>
-          <a:lnRef idx="2">
-            <a:schemeClr val="accent1"/>
-          </a:lnRef>
-          <a:fillRef idx="0">
-            <a:schemeClr val="accent1"/>
-          </a:fillRef>
-          <a:effectRef idx="1">
-            <a:schemeClr val="accent1"/>
-          </a:effectRef>
-          <a:fontRef idx="minor">
-            <a:schemeClr val="tx1"/>
-          </a:fontRef>
-        </p:style>
-      </p:cxnSp>
+            <a:pPr algn="ctr"/>
+            <a:endParaRPr/>
+          </a:p>
+        </p:txBody>
+      </p:sp>
       <p:sp>
         <p:nvSpPr>
           <p:cNvPr id="36" name="TextBox 35">
@@ -3642,18 +3509,13 @@
           <a:noFill/>
         </p:spPr>
         <p:txBody>
-          <a:bodyPr wrap="square" rtlCol="0">
-            <a:spAutoFit/>
+          <a:bodyPr wrap="none" rtlCol="0">
+            <a:noAutofit/>
           </a:bodyPr>
           <a:lstStyle/>
           <a:p>
-            <a:r>
-              <a:rPr lang="ko-KR" altLang="en-US" sz="2400" dirty="0">
-                <a:latin typeface="HY엽서M" panose="02030600000101010101" pitchFamily="18" charset="-127"/>
-                <a:ea typeface="HY엽서M" panose="02030600000101010101" pitchFamily="18" charset="-127"/>
-              </a:rPr>
-              <a:t>월</a:t>
-            </a:r>
+            <a:pPr algn="ctr"/>
+            <a:endParaRPr/>
           </a:p>
         </p:txBody>
       </p:sp>
@@ -3671,8 +3533,8 @@
         </p:nvSpPr>
         <p:spPr>
           <a:xfrm>
-            <a:off x="4103592" y="251326"/>
-            <a:ext cx="656301" cy="400110"/>
+            <a:off x="3252707" y="240806"/>
+            <a:ext cx="3150883" cy="400110"/>
           </a:xfrm>
           <a:prstGeom prst="rect">
             <a:avLst/>
@@ -3680,17 +3542,18 @@
           <a:noFill/>
         </p:spPr>
         <p:txBody>
-          <a:bodyPr wrap="square" rtlCol="0">
-            <a:spAutoFit/>
+          <a:bodyPr wrap="none" rtlCol="0">
+            <a:noAutofit/>
           </a:bodyPr>
           <a:lstStyle/>
           <a:p>
-            <a:r>
-              <a:rPr lang="ko-KR" altLang="en-US" sz="2000" dirty="0">
-                <a:latin typeface="HY엽서M" panose="02030600000101010101" pitchFamily="18" charset="-127"/>
-                <a:ea typeface="HY엽서M" panose="02030600000101010101" pitchFamily="18" charset="-127"/>
-              </a:rPr>
-              <a:t>년</a:t>
+            <a:pPr algn="ctr"/>
+            <a:r>
+              <a:rPr lang="ko-KR" altLang="en-US" sz="1800" dirty="0">
+                <a:latin typeface="HY엽서M" panose="02030600000101010101" pitchFamily="18" charset="-127"/>
+                <a:ea typeface="HY엽서M" panose="02030600000101010101" pitchFamily="18" charset="-127"/>
+              </a:rPr>
+              <a:t>        년     월     일    기준</a:t>
             </a:r>
           </a:p>
         </p:txBody>
@@ -3720,53 +3583,39 @@
           </a:solidFill>
         </p:spPr>
         <p:txBody>
-          <a:bodyPr wrap="square">
+          <a:bodyPr wrap="none">
             <a:spAutoFit/>
           </a:bodyPr>
           <a:lstStyle/>
           <a:p>
             <a:pPr algn="ctr"/>
             <a:r>
-              <a:rPr lang="ko-KR" altLang="en-US" sz="1050" b="1" dirty="0">
+              <a:rPr lang="ko-KR" altLang="en-US" sz="1000" b="1" dirty="0">
                 <a:latin typeface="HY엽서L" panose="02030600000101010101" pitchFamily="18" charset="-127"/>
                 <a:ea typeface="HY엽서L" panose="02030600000101010101" pitchFamily="18" charset="-127"/>
               </a:rPr>
               <a:t>참고용 입니다</a:t>
             </a:r>
             <a:r>
-              <a:rPr lang="en-US" altLang="ko-KR" sz="1050" b="1" dirty="0">
+              <a:rPr lang="en-US" altLang="ko-KR" sz="1000" b="1" dirty="0">
                 <a:latin typeface="HY엽서L" panose="02030600000101010101" pitchFamily="18" charset="-127"/>
                 <a:ea typeface="HY엽서L" panose="02030600000101010101" pitchFamily="18" charset="-127"/>
               </a:rPr>
               <a:t> </a:t>
             </a:r>
             <a:r>
-              <a:rPr lang="ko-KR" altLang="en-US" sz="1050" b="1" dirty="0" err="1">
+              <a:rPr lang="ko-KR" altLang="en-US" sz="1000" b="1" dirty="0" err="1">
                 <a:latin typeface="HY엽서L" panose="02030600000101010101" pitchFamily="18" charset="-127"/>
                 <a:ea typeface="HY엽서L" panose="02030600000101010101" pitchFamily="18" charset="-127"/>
               </a:rPr>
               <a:t>자세한건</a:t>
             </a:r>
             <a:r>
-              <a:rPr lang="ko-KR" altLang="en-US" sz="1050" b="1" dirty="0">
+              <a:rPr lang="ko-KR" altLang="en-US" sz="1000" b="1" dirty="0">
                 <a:latin typeface="HY엽서L" panose="02030600000101010101" pitchFamily="18" charset="-127"/>
                 <a:ea typeface="HY엽서L" panose="02030600000101010101" pitchFamily="18" charset="-127"/>
               </a:rPr>
-              <a:t> 증권을 확</a:t>
-            </a:r>
-            <a:r>
-              <a:rPr lang="ko-KR" altLang="en-US" sz="1100" b="1" dirty="0">
-                <a:latin typeface="HY엽서L" panose="02030600000101010101" pitchFamily="18" charset="-127"/>
-                <a:ea typeface="HY엽서L" panose="02030600000101010101" pitchFamily="18" charset="-127"/>
-              </a:rPr>
-              <a:t>인해주세</a:t>
-            </a:r>
-            <a:r>
-              <a:rPr lang="ko-KR" altLang="en-US" sz="1050" b="1" dirty="0">
-                <a:latin typeface="HY엽서L" panose="02030600000101010101" pitchFamily="18" charset="-127"/>
-                <a:ea typeface="HY엽서L" panose="02030600000101010101" pitchFamily="18" charset="-127"/>
-              </a:rPr>
-              <a:t>요</a:t>
+              <a:t> 증권을 확인해주세요</a:t>
             </a:r>
           </a:p>
         </p:txBody>
@@ -3794,13 +3643,13 @@
           <a:noFill/>
         </p:spPr>
         <p:txBody>
-          <a:bodyPr wrap="square" rtlCol="0">
+          <a:bodyPr wrap="none" rtlCol="0">
             <a:spAutoFit/>
           </a:bodyPr>
           <a:lstStyle/>
           <a:p>
             <a:r>
-              <a:rPr lang="ko-KR" altLang="en-US" sz="1400" dirty="0">
+              <a:rPr lang="ko-KR" altLang="en-US" sz="1000" dirty="0">
                 <a:solidFill>
                   <a:srgbClr val="FF0000"/>
                 </a:solidFill>
@@ -3835,13 +3684,13 @@
           <a:noFill/>
         </p:spPr>
         <p:txBody>
-          <a:bodyPr wrap="square" rtlCol="0">
+          <a:bodyPr wrap="none" rtlCol="0">
             <a:spAutoFit/>
           </a:bodyPr>
           <a:lstStyle/>
           <a:p>
             <a:r>
-              <a:rPr lang="ko-KR" altLang="en-US" sz="1400" dirty="0">
+              <a:rPr lang="ko-KR" altLang="en-US" sz="1000" dirty="0">
                 <a:solidFill>
                   <a:srgbClr val="FF0000"/>
                 </a:solidFill>
@@ -3876,13 +3725,13 @@
           <a:noFill/>
         </p:spPr>
         <p:txBody>
-          <a:bodyPr wrap="square" rtlCol="0">
+          <a:bodyPr wrap="none" rtlCol="0">
             <a:spAutoFit/>
           </a:bodyPr>
           <a:lstStyle/>
           <a:p>
             <a:r>
-              <a:rPr lang="ko-KR" altLang="en-US" sz="1400" dirty="0">
+              <a:rPr lang="ko-KR" altLang="en-US" sz="1000" dirty="0">
                 <a:solidFill>
                   <a:srgbClr val="FF0000"/>
                 </a:solidFill>
@@ -3943,7 +3792,7 @@
           </a:fontRef>
         </p:style>
         <p:txBody>
-          <a:bodyPr rtlCol="0" anchor="ctr"/>
+          <a:bodyPr wrap="none" rtlCol="0" anchor="ctr"/>
           <a:lstStyle/>
           <a:p>
             <a:pPr algn="ctr"/>
@@ -3969,7 +3818,7 @@
         </p:nvSpPr>
         <p:spPr>
           <a:xfrm>
-            <a:off x="488046" y="1997428"/>
+            <a:off x="488044" y="2015941"/>
             <a:ext cx="2493161" cy="1013923"/>
           </a:xfrm>
           <a:prstGeom prst="ellipse">
@@ -4004,7 +3853,7 @@
           </a:fontRef>
         </p:style>
         <p:txBody>
-          <a:bodyPr rtlCol="0" anchor="ctr"/>
+          <a:bodyPr wrap="none" rtlCol="0" anchor="ctr"/>
           <a:lstStyle/>
           <a:p>
             <a:pPr algn="ctr"/>
@@ -4065,7 +3914,7 @@
           </a:fontRef>
         </p:style>
         <p:txBody>
-          <a:bodyPr rtlCol="0" anchor="ctr"/>
+          <a:bodyPr wrap="none" rtlCol="0" anchor="ctr"/>
           <a:lstStyle/>
           <a:p>
             <a:pPr algn="ctr"/>
@@ -4103,14 +3952,14 @@
           </a:ln>
         </p:spPr>
         <p:txBody>
-          <a:bodyPr wrap="square" rtlCol="0">
+          <a:bodyPr wrap="none" rtlCol="0">
             <a:spAutoFit/>
           </a:bodyPr>
           <a:lstStyle/>
           <a:p>
             <a:pPr algn="ctr"/>
             <a:r>
-              <a:rPr lang="ko-KR" altLang="en-US" sz="1100" dirty="0">
+              <a:rPr lang="ko-KR" altLang="en-US" sz="1000" dirty="0">
                 <a:latin typeface="HY엽서M" panose="02030600000101010101" pitchFamily="18" charset="-127"/>
                 <a:ea typeface="HY엽서M" panose="02030600000101010101" pitchFamily="18" charset="-127"/>
               </a:rPr>
@@ -4133,8 +3982,8 @@
         </p:nvSpPr>
         <p:spPr>
           <a:xfrm>
-            <a:off x="1437599" y="1986061"/>
-            <a:ext cx="615654" cy="261610"/>
+            <a:off x="1460732" y="1986061"/>
+            <a:ext cx="569387" cy="400110"/>
           </a:xfrm>
           <a:prstGeom prst="rect">
             <a:avLst/>
@@ -4145,18 +3994,26 @@
           </a:ln>
         </p:spPr>
         <p:txBody>
-          <a:bodyPr wrap="square" rtlCol="0">
+          <a:bodyPr wrap="none" rtlCol="0">
             <a:spAutoFit/>
           </a:bodyPr>
           <a:lstStyle/>
           <a:p>
             <a:pPr algn="ctr"/>
             <a:r>
-              <a:rPr lang="ko-KR" altLang="en-US" sz="1100" dirty="0" err="1">
+              <a:rPr lang="ko-KR" altLang="en-US" sz="1000" dirty="0" err="1">
                 <a:latin typeface="HY엽서M" panose="02030600000101010101" pitchFamily="18" charset="-127"/>
                 <a:ea typeface="HY엽서M" panose="02030600000101010101" pitchFamily="18" charset="-127"/>
               </a:rPr>
               <a:t>뇌졸증</a:t>
+            </a:r>
+            <a:r>
+              <a:rPr lang="ko-KR" altLang="en-US" sz="1000" dirty="0">
+                <a:latin typeface="HY엽서M" panose="02030600000101010101" pitchFamily="18" charset="-127"/>
+                <a:ea typeface="HY엽서M" panose="02030600000101010101" pitchFamily="18" charset="-127"/>
+              </a:rPr>
+              <a:t>
+</a:t>
             </a:r>
             <a:endParaRPr lang="ko-KR" altLang="en-US" sz="1100" dirty="0">
               <a:latin typeface="HY엽서M" panose="02030600000101010101" pitchFamily="18" charset="-127"/>
@@ -4191,14 +4048,14 @@
           </a:ln>
         </p:spPr>
         <p:txBody>
-          <a:bodyPr wrap="square" rtlCol="0">
+          <a:bodyPr wrap="none" rtlCol="0">
             <a:spAutoFit/>
           </a:bodyPr>
           <a:lstStyle/>
           <a:p>
             <a:pPr algn="ctr"/>
             <a:r>
-              <a:rPr lang="ko-KR" altLang="en-US" sz="1100" dirty="0">
+              <a:rPr lang="ko-KR" altLang="en-US" sz="1000" dirty="0">
                 <a:latin typeface="HY엽서M" panose="02030600000101010101" pitchFamily="18" charset="-127"/>
                 <a:ea typeface="HY엽서M" panose="02030600000101010101" pitchFamily="18" charset="-127"/>
               </a:rPr>
@@ -4233,7 +4090,7 @@
           </a:ln>
         </p:spPr>
         <p:txBody>
-          <a:bodyPr wrap="square" rtlCol="0">
+          <a:bodyPr wrap="none" rtlCol="0">
             <a:spAutoFit/>
           </a:bodyPr>
           <a:lstStyle/>
@@ -4338,14 +4195,14 @@
           </a:ln>
         </p:spPr>
         <p:txBody>
-          <a:bodyPr wrap="square" rtlCol="0">
+          <a:bodyPr wrap="none" rtlCol="0">
             <a:spAutoFit/>
           </a:bodyPr>
           <a:lstStyle/>
           <a:p>
             <a:pPr algn="ctr"/>
             <a:r>
-              <a:rPr lang="ko-KR" altLang="en-US" sz="1100" dirty="0">
+              <a:rPr lang="ko-KR" altLang="en-US" sz="1000" dirty="0">
                 <a:latin typeface="HY엽서M" panose="02030600000101010101" pitchFamily="18" charset="-127"/>
                 <a:ea typeface="HY엽서M" panose="02030600000101010101" pitchFamily="18" charset="-127"/>
               </a:rPr>
@@ -4380,14 +4237,14 @@
           </a:ln>
         </p:spPr>
         <p:txBody>
-          <a:bodyPr wrap="square" rtlCol="0">
+          <a:bodyPr wrap="none" rtlCol="0">
             <a:spAutoFit/>
           </a:bodyPr>
           <a:lstStyle/>
           <a:p>
             <a:pPr algn="ctr"/>
             <a:r>
-              <a:rPr lang="ko-KR" altLang="en-US" sz="1100" dirty="0">
+              <a:rPr lang="ko-KR" altLang="en-US" sz="1000" dirty="0">
                 <a:latin typeface="HY엽서M" panose="02030600000101010101" pitchFamily="18" charset="-127"/>
                 <a:ea typeface="HY엽서M" panose="02030600000101010101" pitchFamily="18" charset="-127"/>
               </a:rPr>
@@ -4410,8 +4267,8 @@
         </p:nvSpPr>
         <p:spPr>
           <a:xfrm>
-            <a:off x="4747952" y="2406052"/>
-            <a:ext cx="788636" cy="261610"/>
+            <a:off x="4793456" y="2406052"/>
+            <a:ext cx="697627" cy="400110"/>
           </a:xfrm>
           <a:prstGeom prst="rect">
             <a:avLst/>
@@ -4422,19 +4279,27 @@
           </a:ln>
         </p:spPr>
         <p:txBody>
-          <a:bodyPr wrap="square" rtlCol="0">
+          <a:bodyPr wrap="none" rtlCol="0">
             <a:spAutoFit/>
           </a:bodyPr>
           <a:lstStyle/>
           <a:p>
             <a:pPr algn="ctr"/>
             <a:r>
-              <a:rPr lang="ko-KR" altLang="en-US" sz="1100" dirty="0">
-                <a:latin typeface="HY엽서M" panose="02030600000101010101" pitchFamily="18" charset="-127"/>
-                <a:ea typeface="HY엽서M" panose="02030600000101010101" pitchFamily="18" charset="-127"/>
-              </a:rPr>
-              <a:t>급성심근</a:t>
-            </a:r>
+              <a:rPr lang="ko-KR" altLang="en-US" sz="1000" dirty="0">
+                <a:latin typeface="HY엽서M" panose="02030600000101010101" pitchFamily="18" charset="-127"/>
+                <a:ea typeface="HY엽서M" panose="02030600000101010101" pitchFamily="18" charset="-127"/>
+              </a:rPr>
+              <a:t>급성심근
+</a:t>
+            </a:r>
+            <a:endParaRPr lang="ko-KR" altLang="en-US" sz="1000" dirty="0">
+              <a:highlight>
+                <a:srgbClr val="FFFF00"/>
+              </a:highlight>
+              <a:latin typeface="HY엽서M" panose="02030600000101010101" pitchFamily="18" charset="-127"/>
+              <a:ea typeface="HY엽서M" panose="02030600000101010101" pitchFamily="18" charset="-127"/>
+            </a:endParaRPr>
           </a:p>
         </p:txBody>
       </p:sp>
@@ -4464,7 +4329,7 @@
           </a:ln>
         </p:spPr>
         <p:txBody>
-          <a:bodyPr wrap="square" rtlCol="0">
+          <a:bodyPr wrap="none" rtlCol="0">
             <a:spAutoFit/>
           </a:bodyPr>
           <a:lstStyle/>
@@ -4557,8 +4422,8 @@
         </p:nvSpPr>
         <p:spPr>
           <a:xfrm>
-            <a:off x="241345" y="4832054"/>
-            <a:ext cx="3448234" cy="461665"/>
+            <a:off x="203732" y="4648191"/>
+            <a:ext cx="2984117" cy="553998"/>
           </a:xfrm>
           <a:prstGeom prst="rect">
             <a:avLst/>
@@ -4575,21 +4440,21 @@
           <a:lstStyle/>
           <a:p>
             <a:r>
-              <a:rPr lang="ko-KR" altLang="en-US" sz="1200" dirty="0" err="1">
-                <a:latin typeface="HY엽서M" panose="02030600000101010101" pitchFamily="18" charset="-127"/>
-                <a:ea typeface="HY엽서M" panose="02030600000101010101" pitchFamily="18" charset="-127"/>
-              </a:rPr>
-              <a:t>상급병원암주요치료비</a:t>
-            </a:r>
-            <a:r>
-              <a:rPr lang="ko-KR" altLang="en-US" sz="1200" dirty="0">
+              <a:rPr lang="ko-KR" altLang="en-US" sz="1000" dirty="0" err="1">
+                <a:latin typeface="HY엽서M" panose="02030600000101010101" pitchFamily="18" charset="-127"/>
+                <a:ea typeface="HY엽서M" panose="02030600000101010101" pitchFamily="18" charset="-127"/>
+              </a:rPr>
+              <a:t>암주요치료비</a:t>
+            </a:r>
+            <a:r>
+              <a:rPr lang="ko-KR" altLang="en-US" sz="1000" dirty="0">
                 <a:latin typeface="HY엽서M" panose="02030600000101010101" pitchFamily="18" charset="-127"/>
                 <a:ea typeface="HY엽서M" panose="02030600000101010101" pitchFamily="18" charset="-127"/>
               </a:rPr>
               <a:t> </a:t>
             </a:r>
             <a:r>
-              <a:rPr lang="en-US" altLang="ko-KR" sz="1200" dirty="0">
+              <a:rPr lang="en-US" altLang="ko-KR" sz="1000" dirty="0">
                 <a:latin typeface="HY엽서M" panose="02030600000101010101" pitchFamily="18" charset="-127"/>
                 <a:ea typeface="HY엽서M" panose="02030600000101010101" pitchFamily="18" charset="-127"/>
               </a:rPr>
@@ -4598,25 +4463,26 @@
           </a:p>
           <a:p>
             <a:r>
-              <a:rPr lang="ko-KR" altLang="en-US" sz="1200" dirty="0" err="1">
-                <a:latin typeface="HY엽서M" panose="02030600000101010101" pitchFamily="18" charset="-127"/>
-                <a:ea typeface="HY엽서M" panose="02030600000101010101" pitchFamily="18" charset="-127"/>
-              </a:rPr>
-              <a:t>상급병원하이클래스</a:t>
-            </a:r>
-            <a:r>
-              <a:rPr lang="ko-KR" altLang="en-US" sz="1200" dirty="0">
+              <a:rPr lang="ko-KR" altLang="en-US" sz="1000" dirty="0" err="1">
+                <a:latin typeface="HY엽서M" panose="02030600000101010101" pitchFamily="18" charset="-127"/>
+                <a:ea typeface="HY엽서M" panose="02030600000101010101" pitchFamily="18" charset="-127"/>
+              </a:rPr>
+              <a:t>하이클래스(비급여)</a:t>
+            </a:r>
+            <a:r>
+              <a:rPr lang="ko-KR" altLang="en-US" sz="1000" dirty="0">
                 <a:latin typeface="HY엽서M" panose="02030600000101010101" pitchFamily="18" charset="-127"/>
                 <a:ea typeface="HY엽서M" panose="02030600000101010101" pitchFamily="18" charset="-127"/>
               </a:rPr>
               <a:t> </a:t>
             </a:r>
             <a:r>
-              <a:rPr lang="en-US" altLang="ko-KR" sz="1200" dirty="0">
-                <a:latin typeface="HY엽서M" panose="02030600000101010101" pitchFamily="18" charset="-127"/>
-                <a:ea typeface="HY엽서M" panose="02030600000101010101" pitchFamily="18" charset="-127"/>
-              </a:rPr>
-              <a:t>: </a:t>
+              <a:rPr lang="en-US" altLang="ko-KR" sz="1000" dirty="0">
+                <a:latin typeface="HY엽서M" panose="02030600000101010101" pitchFamily="18" charset="-127"/>
+                <a:ea typeface="HY엽서M" panose="02030600000101010101" pitchFamily="18" charset="-127"/>
+              </a:rPr>
+              <a:t>: 
+10억통장 : </a:t>
             </a:r>
             <a:endParaRPr lang="ko-KR" altLang="en-US" sz="1200" dirty="0">
               <a:latin typeface="HY엽서M" panose="02030600000101010101" pitchFamily="18" charset="-127"/>
@@ -4648,14 +4514,14 @@
           <a:noFill/>
         </p:spPr>
         <p:txBody>
-          <a:bodyPr wrap="square" rtlCol="0">
+          <a:bodyPr wrap="none" rtlCol="0">
             <a:spAutoFit/>
           </a:bodyPr>
           <a:lstStyle/>
           <a:p>
             <a:pPr algn="ctr"/>
             <a:r>
-              <a:rPr lang="ko-KR" altLang="en-US" sz="1400" dirty="0">
+              <a:rPr lang="ko-KR" altLang="en-US" sz="1000" dirty="0">
                 <a:solidFill>
                   <a:srgbClr val="FF0000"/>
                 </a:solidFill>
@@ -4690,13 +4556,13 @@
           <a:noFill/>
         </p:spPr>
         <p:txBody>
-          <a:bodyPr wrap="square" rtlCol="0">
+          <a:bodyPr wrap="none" rtlCol="0">
             <a:spAutoFit/>
           </a:bodyPr>
           <a:lstStyle/>
           <a:p>
             <a:r>
-              <a:rPr lang="ko-KR" altLang="en-US" sz="1400" dirty="0">
+              <a:rPr lang="ko-KR" altLang="en-US" sz="1000" dirty="0">
                 <a:solidFill>
                   <a:srgbClr val="FF0000"/>
                 </a:solidFill>
@@ -4715,7 +4581,7 @@
           </a:p>
           <a:p>
             <a:r>
-              <a:rPr lang="en-US" altLang="ko-KR" sz="1050" dirty="0">
+              <a:rPr lang="en-US" altLang="ko-KR" sz="1000" dirty="0">
                 <a:solidFill>
                   <a:srgbClr val="FF0000"/>
                 </a:solidFill>
@@ -4725,24 +4591,24 @@
               <a:t>(</a:t>
             </a:r>
             <a:r>
-              <a:rPr lang="ko-KR" altLang="en-US" sz="1050" dirty="0">
+              <a:rPr lang="ko-KR" altLang="en-US" sz="1000" dirty="0">
                 <a:solidFill>
                   <a:srgbClr val="FF0000"/>
                 </a:solidFill>
                 <a:latin typeface="HY엽서M" panose="02030600000101010101" pitchFamily="18" charset="-127"/>
                 <a:ea typeface="HY엽서M" panose="02030600000101010101" pitchFamily="18" charset="-127"/>
               </a:rPr>
-              <a:t>가입일 </a:t>
-            </a:r>
-            <a:r>
-              <a:rPr lang="en-US" altLang="ko-KR" sz="1050" dirty="0">
+              <a:t>가입일:</a:t>
+            </a:r>
+            <a:r>
+              <a:rPr lang="en-US" altLang="ko-KR" sz="1000" dirty="0">
                 <a:solidFill>
                   <a:srgbClr val="FF0000"/>
                 </a:solidFill>
                 <a:latin typeface="HY엽서M" panose="02030600000101010101" pitchFamily="18" charset="-127"/>
                 <a:ea typeface="HY엽서M" panose="02030600000101010101" pitchFamily="18" charset="-127"/>
               </a:rPr>
-              <a:t>: ___________)</a:t>
+              <a:t>___________)</a:t>
             </a:r>
             <a:endParaRPr lang="ko-KR" altLang="en-US" sz="1050" dirty="0">
               <a:solidFill>
@@ -4777,14 +4643,14 @@
           <a:noFill/>
         </p:spPr>
         <p:txBody>
-          <a:bodyPr wrap="square" rtlCol="0">
+          <a:bodyPr wrap="none" rtlCol="0">
             <a:spAutoFit/>
           </a:bodyPr>
           <a:lstStyle/>
           <a:p>
             <a:pPr algn="ctr"/>
             <a:r>
-              <a:rPr lang="ko-KR" altLang="en-US" sz="1400" dirty="0">
+              <a:rPr lang="ko-KR" altLang="en-US" sz="1000" dirty="0">
                 <a:solidFill>
                   <a:srgbClr val="FF0000"/>
                 </a:solidFill>
@@ -4794,7 +4660,7 @@
               <a:t>상해</a:t>
             </a:r>
             <a:r>
-              <a:rPr lang="en-US" altLang="ko-KR" sz="1400" dirty="0">
+              <a:rPr lang="en-US" altLang="ko-KR" sz="1000" dirty="0">
                 <a:solidFill>
                   <a:srgbClr val="FF0000"/>
                 </a:solidFill>
@@ -4804,7 +4670,7 @@
               <a:t>/</a:t>
             </a:r>
             <a:r>
-              <a:rPr lang="ko-KR" altLang="en-US" sz="1400" dirty="0">
+              <a:rPr lang="ko-KR" altLang="en-US" sz="1000" dirty="0">
                 <a:solidFill>
                   <a:srgbClr val="FF0000"/>
                 </a:solidFill>
@@ -4839,14 +4705,14 @@
           <a:noFill/>
         </p:spPr>
         <p:txBody>
-          <a:bodyPr wrap="square" rtlCol="0">
+          <a:bodyPr wrap="none" rtlCol="0">
             <a:spAutoFit/>
           </a:bodyPr>
           <a:lstStyle/>
           <a:p>
             <a:pPr algn="ctr"/>
             <a:r>
-              <a:rPr lang="ko-KR" altLang="en-US" sz="1400" dirty="0">
+              <a:rPr lang="ko-KR" altLang="en-US" sz="1000" dirty="0">
                 <a:solidFill>
                   <a:srgbClr val="FF0000"/>
                 </a:solidFill>
@@ -4856,7 +4722,7 @@
               <a:t>입원</a:t>
             </a:r>
             <a:r>
-              <a:rPr lang="en-US" altLang="ko-KR" sz="1400" dirty="0">
+              <a:rPr lang="en-US" altLang="ko-KR" sz="1000" dirty="0">
                 <a:solidFill>
                   <a:srgbClr val="FF0000"/>
                 </a:solidFill>
@@ -4866,7 +4732,7 @@
               <a:t>/</a:t>
             </a:r>
             <a:r>
-              <a:rPr lang="ko-KR" altLang="en-US" sz="1400" dirty="0">
+              <a:rPr lang="ko-KR" altLang="en-US" sz="1000" dirty="0">
                 <a:solidFill>
                   <a:srgbClr val="FF0000"/>
                 </a:solidFill>
@@ -4917,7 +4783,7 @@
           </a:fontRef>
         </p:style>
         <p:txBody>
-          <a:bodyPr rtlCol="0" anchor="ctr"/>
+          <a:bodyPr wrap="none" rtlCol="0" anchor="ctr"/>
           <a:lstStyle/>
           <a:p>
             <a:pPr algn="ctr"/>
@@ -4952,14 +4818,14 @@
           <a:noFill/>
         </p:spPr>
         <p:txBody>
-          <a:bodyPr wrap="square" rtlCol="0">
+          <a:bodyPr wrap="none" rtlCol="0">
             <a:spAutoFit/>
           </a:bodyPr>
           <a:lstStyle/>
           <a:p>
             <a:pPr algn="ctr"/>
             <a:r>
-              <a:rPr lang="ko-KR" altLang="en-US" sz="1400" dirty="0">
+              <a:rPr lang="ko-KR" altLang="en-US" sz="1000" dirty="0">
                 <a:solidFill>
                   <a:srgbClr val="FF0000"/>
                 </a:solidFill>
@@ -5010,7 +4876,7 @@
           </a:fontRef>
         </p:style>
         <p:txBody>
-          <a:bodyPr rtlCol="0" anchor="ctr"/>
+          <a:bodyPr wrap="none" rtlCol="0" anchor="ctr"/>
           <a:lstStyle/>
           <a:p>
             <a:pPr algn="ctr"/>
@@ -5057,7 +4923,7 @@
           </a:fontRef>
         </p:style>
         <p:txBody>
-          <a:bodyPr rtlCol="0" anchor="ctr"/>
+          <a:bodyPr wrap="none" rtlCol="0" anchor="ctr"/>
           <a:lstStyle/>
           <a:p>
             <a:pPr algn="ctr"/>
@@ -5108,7 +4974,7 @@
           </a:fontRef>
         </p:style>
         <p:txBody>
-          <a:bodyPr rtlCol="0" anchor="ctr"/>
+          <a:bodyPr wrap="none" rtlCol="0" anchor="ctr"/>
           <a:lstStyle/>
           <a:p>
             <a:pPr algn="ctr"/>
@@ -5159,7 +5025,7 @@
           </a:fontRef>
         </p:style>
         <p:txBody>
-          <a:bodyPr rtlCol="0" anchor="ctr"/>
+          <a:bodyPr wrap="none" rtlCol="0" anchor="ctr"/>
           <a:lstStyle/>
           <a:p>
             <a:pPr algn="ctr"/>
@@ -5194,14 +5060,14 @@
           <a:noFill/>
         </p:spPr>
         <p:txBody>
-          <a:bodyPr wrap="square" rtlCol="0">
+          <a:bodyPr wrap="none" rtlCol="0">
             <a:spAutoFit/>
           </a:bodyPr>
           <a:lstStyle/>
           <a:p>
             <a:pPr algn="ctr"/>
             <a:r>
-              <a:rPr lang="ko-KR" altLang="en-US" sz="1400" dirty="0">
+              <a:rPr lang="ko-KR" altLang="en-US" sz="1000" dirty="0">
                 <a:solidFill>
                   <a:srgbClr val="FF0000"/>
                 </a:solidFill>
@@ -5211,7 +5077,7 @@
               <a:t>재가</a:t>
             </a:r>
             <a:r>
-              <a:rPr lang="en-US" altLang="ko-KR" sz="1400" dirty="0">
+              <a:rPr lang="en-US" altLang="ko-KR" sz="1000" dirty="0">
                 <a:solidFill>
                   <a:srgbClr val="FF0000"/>
                 </a:solidFill>
@@ -5221,7 +5087,7 @@
               <a:t>/</a:t>
             </a:r>
             <a:r>
-              <a:rPr lang="ko-KR" altLang="en-US" sz="1400" dirty="0">
+              <a:rPr lang="ko-KR" altLang="en-US" sz="1000" dirty="0">
                 <a:solidFill>
                   <a:srgbClr val="FF0000"/>
                 </a:solidFill>
@@ -5272,7 +5138,7 @@
           </a:fontRef>
         </p:style>
         <p:txBody>
-          <a:bodyPr rtlCol="0" anchor="ctr"/>
+          <a:bodyPr wrap="none" rtlCol="0" anchor="ctr"/>
           <a:lstStyle/>
           <a:p>
             <a:pPr algn="ctr"/>
@@ -5307,14 +5173,14 @@
           <a:noFill/>
         </p:spPr>
         <p:txBody>
-          <a:bodyPr wrap="square" rtlCol="0">
+          <a:bodyPr wrap="none" rtlCol="0">
             <a:spAutoFit/>
           </a:bodyPr>
           <a:lstStyle/>
           <a:p>
             <a:pPr algn="ctr"/>
             <a:r>
-              <a:rPr lang="ko-KR" altLang="en-US" sz="1400" dirty="0">
+              <a:rPr lang="ko-KR" altLang="en-US" sz="1000" dirty="0">
                 <a:solidFill>
                   <a:srgbClr val="FF0000"/>
                 </a:solidFill>
@@ -5324,7 +5190,7 @@
               <a:t>화재</a:t>
             </a:r>
             <a:r>
-              <a:rPr lang="en-US" altLang="ko-KR" sz="1400" dirty="0">
+              <a:rPr lang="en-US" altLang="ko-KR" sz="1000" dirty="0">
                 <a:solidFill>
                   <a:srgbClr val="FF0000"/>
                 </a:solidFill>
@@ -5334,7 +5200,7 @@
               <a:t>/</a:t>
             </a:r>
             <a:r>
-              <a:rPr lang="ko-KR" altLang="en-US" sz="1400" dirty="0">
+              <a:rPr lang="ko-KR" altLang="en-US" sz="1000" dirty="0">
                 <a:solidFill>
                   <a:srgbClr val="FF0000"/>
                 </a:solidFill>
@@ -5385,7 +5251,7 @@
           </a:fontRef>
         </p:style>
         <p:txBody>
-          <a:bodyPr rtlCol="0" anchor="ctr"/>
+          <a:bodyPr wrap="none" rtlCol="0" anchor="ctr"/>
           <a:lstStyle/>
           <a:p>
             <a:pPr algn="ctr"/>
@@ -5416,14 +5282,14 @@
           <a:noFill/>
         </p:spPr>
         <p:txBody>
-          <a:bodyPr wrap="square" rtlCol="0">
+          <a:bodyPr wrap="none" rtlCol="0">
             <a:spAutoFit/>
           </a:bodyPr>
           <a:lstStyle/>
           <a:p>
             <a:pPr algn="ctr"/>
             <a:r>
-              <a:rPr lang="en-US" altLang="ko-KR" sz="1400">
+              <a:rPr lang="en-US" altLang="ko-KR" sz="1000">
                 <a:solidFill>
                   <a:srgbClr val="FF0000"/>
                 </a:solidFill>
@@ -5481,7 +5347,7 @@
           </a:fontRef>
         </p:style>
         <p:txBody>
-          <a:bodyPr rtlCol="0" anchor="ctr"/>
+          <a:bodyPr wrap="none" rtlCol="0" anchor="ctr"/>
           <a:lstStyle/>
           <a:p>
             <a:pPr algn="ctr"/>
@@ -5512,14 +5378,14 @@
           <a:noFill/>
         </p:spPr>
         <p:txBody>
-          <a:bodyPr wrap="square" rtlCol="0">
+          <a:bodyPr wrap="none" rtlCol="0">
             <a:spAutoFit/>
           </a:bodyPr>
           <a:lstStyle/>
           <a:p>
             <a:pPr algn="ctr"/>
             <a:r>
-              <a:rPr lang="ko-KR" altLang="en-US" sz="1400" dirty="0">
+              <a:rPr lang="ko-KR" altLang="en-US" sz="1000" dirty="0">
                 <a:solidFill>
                   <a:srgbClr val="FF0000"/>
                 </a:solidFill>
@@ -5570,7 +5436,7 @@
           </a:fontRef>
         </p:style>
         <p:txBody>
-          <a:bodyPr rtlCol="0" anchor="ctr"/>
+          <a:bodyPr wrap="none" rtlCol="0" anchor="ctr"/>
           <a:lstStyle/>
           <a:p>
             <a:pPr algn="ctr"/>
@@ -5605,14 +5471,14 @@
           <a:noFill/>
         </p:spPr>
         <p:txBody>
-          <a:bodyPr wrap="square" rtlCol="0">
+          <a:bodyPr wrap="none" rtlCol="0">
             <a:spAutoFit/>
           </a:bodyPr>
           <a:lstStyle/>
           <a:p>
             <a:pPr algn="ctr"/>
             <a:r>
-              <a:rPr lang="ko-KR" altLang="en-US" sz="1400" dirty="0" err="1">
+              <a:rPr lang="ko-KR" altLang="en-US" sz="1000" dirty="0" err="1">
                 <a:solidFill>
                   <a:srgbClr val="FF0000"/>
                 </a:solidFill>
@@ -5642,14 +5508,12 @@
           </p:cNvPr>
           <p:cNvCxnSpPr>
             <a:cxnSpLocks/>
-            <a:stCxn id="81" idx="0"/>
-            <a:endCxn id="81" idx="2"/>
           </p:cNvCxnSpPr>
           <p:nvPr/>
         </p:nvCxnSpPr>
         <p:spPr>
           <a:xfrm>
-            <a:off x="1719318" y="5368281"/>
+            <a:off x="1803558" y="5368281"/>
             <a:ext cx="0" cy="2227658"/>
           </a:xfrm>
           <a:prstGeom prst="line">
@@ -5691,7 +5555,7 @@
         <p:spPr>
           <a:xfrm>
             <a:off x="3535890" y="4748864"/>
-            <a:ext cx="2520000" cy="276999"/>
+            <a:ext cx="1088760" cy="246221"/>
           </a:xfrm>
           <a:prstGeom prst="rect">
             <a:avLst/>
@@ -5702,20 +5566,23 @@
           </a:ln>
         </p:spPr>
         <p:txBody>
-          <a:bodyPr wrap="square" rtlCol="0">
+          <a:bodyPr wrap="none" rtlCol="0">
             <a:spAutoFit/>
           </a:bodyPr>
           <a:lstStyle/>
           <a:p>
             <a:r>
-              <a:rPr lang="ko-KR" altLang="en-US" sz="1200" dirty="0">
+              <a:rPr lang="ko-KR" altLang="en-US" sz="1000" dirty="0">
                 <a:latin typeface="HY엽서M" panose="02030600000101010101" pitchFamily="18" charset="-127"/>
                 <a:ea typeface="HY엽서M" panose="02030600000101010101" pitchFamily="18" charset="-127"/>
               </a:rPr>
               <a:t>일상배상책임 </a:t>
             </a:r>
             <a:r>
-              <a:rPr lang="en-US" altLang="ko-KR" sz="1200" dirty="0">
+              <a:rPr lang="en-US" altLang="ko-KR" sz="1000" dirty="0">
+                <a:solidFill>
+                  <a:srgbClr val="0000FF"/>
+                </a:solidFill>
                 <a:latin typeface="HY엽서M" panose="02030600000101010101" pitchFamily="18" charset="-127"/>
                 <a:ea typeface="HY엽서M" panose="02030600000101010101" pitchFamily="18" charset="-127"/>
               </a:rPr>
@@ -5743,7 +5610,7 @@
         <p:spPr>
           <a:xfrm>
             <a:off x="3531857" y="5608253"/>
-            <a:ext cx="2520000" cy="1015663"/>
+            <a:ext cx="1162498" cy="1046440"/>
           </a:xfrm>
           <a:prstGeom prst="rect">
             <a:avLst/>
@@ -5754,20 +5621,20 @@
           </a:ln>
         </p:spPr>
         <p:txBody>
-          <a:bodyPr wrap="square" rtlCol="0">
+          <a:bodyPr wrap="none" rtlCol="0">
             <a:spAutoFit/>
           </a:bodyPr>
           <a:lstStyle/>
           <a:p>
             <a:r>
-              <a:rPr lang="ko-KR" altLang="en-US" sz="1200" dirty="0">
+              <a:rPr lang="ko-KR" altLang="en-US" sz="1000" dirty="0">
                 <a:latin typeface="HY엽서M" panose="02030600000101010101" pitchFamily="18" charset="-127"/>
                 <a:ea typeface="HY엽서M" panose="02030600000101010101" pitchFamily="18" charset="-127"/>
               </a:rPr>
               <a:t>입원 </a:t>
             </a:r>
             <a:r>
-              <a:rPr lang="en-US" altLang="ko-KR" sz="1200" dirty="0">
+              <a:rPr lang="en-US" altLang="ko-KR" sz="1000" dirty="0">
                 <a:latin typeface="HY엽서M" panose="02030600000101010101" pitchFamily="18" charset="-127"/>
                 <a:ea typeface="HY엽서M" panose="02030600000101010101" pitchFamily="18" charset="-127"/>
               </a:rPr>
@@ -5776,28 +5643,28 @@
           </a:p>
           <a:p>
             <a:r>
-              <a:rPr lang="ko-KR" altLang="en-US" sz="1200" dirty="0">
+              <a:rPr lang="ko-KR" altLang="en-US" sz="1000" dirty="0">
                 <a:latin typeface="HY엽서M" panose="02030600000101010101" pitchFamily="18" charset="-127"/>
                 <a:ea typeface="HY엽서M" panose="02030600000101010101" pitchFamily="18" charset="-127"/>
               </a:rPr>
               <a:t>통원 </a:t>
             </a:r>
             <a:r>
-              <a:rPr lang="en-US" altLang="ko-KR" sz="1200" dirty="0">
+              <a:rPr lang="en-US" altLang="ko-KR" sz="1000" dirty="0">
                 <a:latin typeface="HY엽서M" panose="02030600000101010101" pitchFamily="18" charset="-127"/>
                 <a:ea typeface="HY엽서M" panose="02030600000101010101" pitchFamily="18" charset="-127"/>
               </a:rPr>
               <a:t>:      / </a:t>
             </a:r>
             <a:r>
-              <a:rPr lang="ko-KR" altLang="en-US" sz="1200" dirty="0">
+              <a:rPr lang="ko-KR" altLang="en-US" sz="1000" dirty="0">
                 <a:latin typeface="HY엽서M" panose="02030600000101010101" pitchFamily="18" charset="-127"/>
                 <a:ea typeface="HY엽서M" panose="02030600000101010101" pitchFamily="18" charset="-127"/>
               </a:rPr>
               <a:t>약 </a:t>
             </a:r>
             <a:r>
-              <a:rPr lang="en-US" altLang="ko-KR" sz="1200" dirty="0">
+              <a:rPr lang="en-US" altLang="ko-KR" sz="1000" dirty="0">
                 <a:latin typeface="HY엽서M" panose="02030600000101010101" pitchFamily="18" charset="-127"/>
                 <a:ea typeface="HY엽서M" panose="02030600000101010101" pitchFamily="18" charset="-127"/>
               </a:rPr>
@@ -5806,7 +5673,7 @@
           </a:p>
           <a:p>
             <a:r>
-              <a:rPr lang="en-US" altLang="ko-KR" sz="1200" dirty="0">
+              <a:rPr lang="en-US" altLang="ko-KR" sz="1000" dirty="0">
                 <a:latin typeface="HY엽서M" panose="02030600000101010101" pitchFamily="18" charset="-127"/>
                 <a:ea typeface="HY엽서M" panose="02030600000101010101" pitchFamily="18" charset="-127"/>
               </a:rPr>
@@ -5815,14 +5682,14 @@
           </a:p>
           <a:p>
             <a:r>
-              <a:rPr lang="ko-KR" altLang="en-US" sz="1200" dirty="0">
+              <a:rPr lang="ko-KR" altLang="en-US" sz="1000" dirty="0">
                 <a:latin typeface="HY엽서M" panose="02030600000101010101" pitchFamily="18" charset="-127"/>
                 <a:ea typeface="HY엽서M" panose="02030600000101010101" pitchFamily="18" charset="-127"/>
               </a:rPr>
               <a:t>도수치료 </a:t>
             </a:r>
             <a:r>
-              <a:rPr lang="en-US" altLang="ko-KR" sz="1200" dirty="0">
+              <a:rPr lang="en-US" altLang="ko-KR" sz="1000" dirty="0">
                 <a:latin typeface="HY엽서M" panose="02030600000101010101" pitchFamily="18" charset="-127"/>
                 <a:ea typeface="HY엽서M" panose="02030600000101010101" pitchFamily="18" charset="-127"/>
               </a:rPr>
@@ -5831,14 +5698,30 @@
           </a:p>
           <a:p>
             <a:r>
-              <a:rPr lang="ko-KR" altLang="en-US" sz="1200" dirty="0">
+              <a:rPr lang="ko-KR" altLang="en-US" sz="1000" dirty="0">
                 <a:latin typeface="HY엽서M" panose="02030600000101010101" pitchFamily="18" charset="-127"/>
                 <a:ea typeface="HY엽서M" panose="02030600000101010101" pitchFamily="18" charset="-127"/>
               </a:rPr>
               <a:t>비급여주사 </a:t>
             </a:r>
             <a:r>
-              <a:rPr lang="en-US" altLang="ko-KR" sz="1200" dirty="0">
+              <a:rPr lang="en-US" altLang="ko-KR" sz="1000" dirty="0">
+                <a:latin typeface="HY엽서M" panose="02030600000101010101" pitchFamily="18" charset="-127"/>
+                <a:ea typeface="HY엽서M" panose="02030600000101010101" pitchFamily="18" charset="-127"/>
+              </a:rPr>
+              <a:t>: </a:t>
+            </a:r>
+          </a:p>
+          <a:p>
+            <a:r>
+              <a:rPr lang="ko-KR" altLang="en-US" sz="1000" dirty="0">
+                <a:latin typeface="HY엽서M" panose="02030600000101010101" pitchFamily="18" charset="-127"/>
+                <a:ea typeface="HY엽서M" panose="02030600000101010101" pitchFamily="18" charset="-127"/>
+              </a:rPr>
+              <a:t>상해의료비 </a:t>
+            </a:r>
+            <a:r>
+              <a:rPr lang="en-US" altLang="ko-KR" sz="1000">
                 <a:latin typeface="HY엽서M" panose="02030600000101010101" pitchFamily="18" charset="-127"/>
                 <a:ea typeface="HY엽서M" panose="02030600000101010101" pitchFamily="18" charset="-127"/>
               </a:rPr>
@@ -5866,7 +5749,7 @@
         <p:spPr>
           <a:xfrm>
             <a:off x="3551991" y="3392764"/>
-            <a:ext cx="2520000" cy="1384995"/>
+            <a:ext cx="1217000" cy="1477328"/>
           </a:xfrm>
           <a:prstGeom prst="rect">
             <a:avLst/>
@@ -5877,20 +5760,142 @@
           </a:ln>
         </p:spPr>
         <p:txBody>
-          <a:bodyPr wrap="square" rtlCol="0">
+          <a:bodyPr wrap="none" rtlCol="0">
             <a:spAutoFit/>
           </a:bodyPr>
           <a:lstStyle/>
           <a:p>
             <a:r>
-              <a:rPr lang="ko-KR" altLang="en-US" sz="1200" dirty="0">
-                <a:latin typeface="HY엽서M" panose="02030600000101010101" pitchFamily="18" charset="-127"/>
-                <a:ea typeface="HY엽서M" panose="02030600000101010101" pitchFamily="18" charset="-127"/>
-              </a:rPr>
-              <a:t>골절 </a:t>
-            </a:r>
-            <a:r>
-              <a:rPr lang="en-US" altLang="ko-KR" sz="1200" dirty="0">
+              <a:rPr lang="ko-KR" altLang="en-US" sz="1000" dirty="0">
+                <a:latin typeface="HY엽서M" panose="02030600000101010101" pitchFamily="18" charset="-127"/>
+                <a:ea typeface="HY엽서M" panose="02030600000101010101" pitchFamily="18" charset="-127"/>
+              </a:rPr>
+              <a:t>골절</a:t>
+            </a:r>
+            <a:r>
+              <a:rPr lang="en-US" altLang="ko-KR" sz="1000" dirty="0">
+                <a:latin typeface="HY엽서M" panose="02030600000101010101" pitchFamily="18" charset="-127"/>
+                <a:ea typeface="HY엽서M" panose="02030600000101010101" pitchFamily="18" charset="-127"/>
+              </a:rPr>
+              <a:t>(</a:t>
+            </a:r>
+            <a:r>
+              <a:rPr lang="ko-KR" altLang="en-US" sz="1000" dirty="0">
+                <a:latin typeface="HY엽서M" panose="02030600000101010101" pitchFamily="18" charset="-127"/>
+                <a:ea typeface="HY엽서M" panose="02030600000101010101" pitchFamily="18" charset="-127"/>
+              </a:rPr>
+              <a:t>치아포함</a:t>
+            </a:r>
+            <a:r>
+              <a:rPr lang="en-US" altLang="ko-KR" sz="1000" dirty="0">
+                <a:latin typeface="HY엽서M" panose="02030600000101010101" pitchFamily="18" charset="-127"/>
+                <a:ea typeface="HY엽서M" panose="02030600000101010101" pitchFamily="18" charset="-127"/>
+              </a:rPr>
+              <a:t>)</a:t>
+            </a:r>
+            <a:r>
+              <a:rPr lang="ko-KR" altLang="en-US" sz="1000" dirty="0">
+                <a:latin typeface="HY엽서M" panose="02030600000101010101" pitchFamily="18" charset="-127"/>
+                <a:ea typeface="HY엽서M" panose="02030600000101010101" pitchFamily="18" charset="-127"/>
+              </a:rPr>
+              <a:t> </a:t>
+            </a:r>
+            <a:r>
+              <a:rPr lang="en-US" altLang="ko-KR" sz="1000" dirty="0">
+                <a:solidFill>
+                  <a:srgbClr val="000000"/>
+                </a:solidFill>
+                <a:latin typeface="HY엽서M" panose="02030600000101010101" pitchFamily="18" charset="-127"/>
+                <a:ea typeface="HY엽서M" panose="02030600000101010101" pitchFamily="18" charset="-127"/>
+              </a:rPr>
+              <a:t>:</a:t>
+            </a:r>
+          </a:p>
+          <a:p>
+            <a:r>
+              <a:rPr lang="ko-KR" altLang="en-US" sz="1000" dirty="0">
+                <a:solidFill>
+                  <a:srgbClr val="000000"/>
+                </a:solidFill>
+                <a:latin typeface="HY엽서M" panose="02030600000101010101" pitchFamily="18" charset="-127"/>
+                <a:ea typeface="HY엽서M" panose="02030600000101010101" pitchFamily="18" charset="-127"/>
+              </a:rPr>
+              <a:t>골절</a:t>
+            </a:r>
+            <a:r>
+              <a:rPr lang="en-US" altLang="ko-KR" sz="1000" dirty="0">
+                <a:solidFill>
+                  <a:srgbClr val="000000"/>
+                </a:solidFill>
+                <a:latin typeface="HY엽서M" panose="02030600000101010101" pitchFamily="18" charset="-127"/>
+                <a:ea typeface="HY엽서M" panose="02030600000101010101" pitchFamily="18" charset="-127"/>
+              </a:rPr>
+              <a:t>(</a:t>
+            </a:r>
+            <a:r>
+              <a:rPr lang="ko-KR" altLang="en-US" sz="1000" dirty="0">
+                <a:solidFill>
+                  <a:srgbClr val="000000"/>
+                </a:solidFill>
+                <a:latin typeface="HY엽서M" panose="02030600000101010101" pitchFamily="18" charset="-127"/>
+                <a:ea typeface="HY엽서M" panose="02030600000101010101" pitchFamily="18" charset="-127"/>
+              </a:rPr>
+              <a:t>치아제외</a:t>
+            </a:r>
+            <a:r>
+              <a:rPr lang="en-US" altLang="ko-KR" sz="1000" dirty="0">
+                <a:solidFill>
+                  <a:srgbClr val="000000"/>
+                </a:solidFill>
+                <a:latin typeface="HY엽서M" panose="02030600000101010101" pitchFamily="18" charset="-127"/>
+                <a:ea typeface="HY엽서M" panose="02030600000101010101" pitchFamily="18" charset="-127"/>
+              </a:rPr>
+              <a:t>) : </a:t>
+            </a:r>
+          </a:p>
+          <a:p>
+            <a:r>
+              <a:rPr lang="en-US" altLang="ko-KR" sz="1000" dirty="0">
+                <a:latin typeface="HY엽서M" panose="02030600000101010101" pitchFamily="18" charset="-127"/>
+                <a:ea typeface="HY엽서M" panose="02030600000101010101" pitchFamily="18" charset="-127"/>
+              </a:rPr>
+              <a:t>5</a:t>
+            </a:r>
+            <a:r>
+              <a:rPr lang="ko-KR" altLang="en-US" sz="1000" dirty="0" err="1">
+                <a:latin typeface="HY엽서M" panose="02030600000101010101" pitchFamily="18" charset="-127"/>
+                <a:ea typeface="HY엽서M" panose="02030600000101010101" pitchFamily="18" charset="-127"/>
+              </a:rPr>
+              <a:t>대골절</a:t>
+            </a:r>
+            <a:r>
+              <a:rPr lang="ko-KR" altLang="en-US" sz="1000" dirty="0">
+                <a:latin typeface="HY엽서M" panose="02030600000101010101" pitchFamily="18" charset="-127"/>
+                <a:ea typeface="HY엽서M" panose="02030600000101010101" pitchFamily="18" charset="-127"/>
+              </a:rPr>
+              <a:t> </a:t>
+            </a:r>
+            <a:r>
+              <a:rPr lang="en-US" altLang="ko-KR" sz="1000" dirty="0">
+                <a:solidFill>
+                  <a:srgbClr val="000000"/>
+                </a:solidFill>
+                <a:latin typeface="HY엽서M" panose="02030600000101010101" pitchFamily="18" charset="-127"/>
+                <a:ea typeface="HY엽서M" panose="02030600000101010101" pitchFamily="18" charset="-127"/>
+              </a:rPr>
+              <a:t>:</a:t>
+            </a:r>
+          </a:p>
+          <a:p>
+            <a:r>
+              <a:rPr lang="ko-KR" altLang="en-US" sz="1000" dirty="0">
+                <a:latin typeface="HY엽서M" panose="02030600000101010101" pitchFamily="18" charset="-127"/>
+                <a:ea typeface="HY엽서M" panose="02030600000101010101" pitchFamily="18" charset="-127"/>
+              </a:rPr>
+              <a:t>화상 </a:t>
+            </a:r>
+            <a:r>
+              <a:rPr lang="en-US" altLang="ko-KR" sz="1000" dirty="0">
                 <a:latin typeface="HY엽서M" panose="02030600000101010101" pitchFamily="18" charset="-127"/>
                 <a:ea typeface="HY엽서M" panose="02030600000101010101" pitchFamily="18" charset="-127"/>
               </a:rPr>
@@ -5899,28 +5904,14 @@
           </a:p>
           <a:p>
             <a:r>
-              <a:rPr lang="en-US" altLang="ko-KR" sz="1200" dirty="0">
-                <a:latin typeface="HY엽서M" panose="02030600000101010101" pitchFamily="18" charset="-127"/>
-                <a:ea typeface="HY엽서M" panose="02030600000101010101" pitchFamily="18" charset="-127"/>
-              </a:rPr>
-              <a:t>5</a:t>
-            </a:r>
-            <a:r>
-              <a:rPr lang="ko-KR" altLang="en-US" sz="1200" dirty="0" err="1">
-                <a:latin typeface="HY엽서M" panose="02030600000101010101" pitchFamily="18" charset="-127"/>
-                <a:ea typeface="HY엽서M" panose="02030600000101010101" pitchFamily="18" charset="-127"/>
-              </a:rPr>
-              <a:t>대골절</a:t>
-            </a:r>
-            <a:r>
-              <a:rPr lang="ko-KR" altLang="en-US" sz="1200" dirty="0">
-                <a:latin typeface="HY엽서M" panose="02030600000101010101" pitchFamily="18" charset="-127"/>
-                <a:ea typeface="HY엽서M" panose="02030600000101010101" pitchFamily="18" charset="-127"/>
-              </a:rPr>
-              <a:t> </a:t>
-            </a:r>
-            <a:r>
-              <a:rPr lang="en-US" altLang="ko-KR" sz="1200" dirty="0">
+              <a:rPr lang="ko-KR" altLang="en-US" sz="1000" dirty="0">
+                <a:latin typeface="HY엽서M" panose="02030600000101010101" pitchFamily="18" charset="-127"/>
+                <a:ea typeface="HY엽서M" panose="02030600000101010101" pitchFamily="18" charset="-127"/>
+              </a:rPr>
+              <a:t>중대화상 </a:t>
+            </a:r>
+            <a:r>
+              <a:rPr lang="en-US" altLang="ko-KR" sz="1000" dirty="0">
                 <a:latin typeface="HY엽서M" panose="02030600000101010101" pitchFamily="18" charset="-127"/>
                 <a:ea typeface="HY엽서M" panose="02030600000101010101" pitchFamily="18" charset="-127"/>
               </a:rPr>
@@ -5929,60 +5920,28 @@
           </a:p>
           <a:p>
             <a:r>
-              <a:rPr lang="ko-KR" altLang="en-US" sz="1200" dirty="0">
-                <a:latin typeface="HY엽서M" panose="02030600000101010101" pitchFamily="18" charset="-127"/>
-                <a:ea typeface="HY엽서M" panose="02030600000101010101" pitchFamily="18" charset="-127"/>
-              </a:rPr>
-              <a:t>화상 </a:t>
-            </a:r>
-            <a:r>
-              <a:rPr lang="en-US" altLang="ko-KR" sz="1200" dirty="0">
-                <a:latin typeface="HY엽서M" panose="02030600000101010101" pitchFamily="18" charset="-127"/>
-                <a:ea typeface="HY엽서M" panose="02030600000101010101" pitchFamily="18" charset="-127"/>
-              </a:rPr>
-              <a:t>: </a:t>
-            </a:r>
-          </a:p>
-          <a:p>
-            <a:r>
-              <a:rPr lang="ko-KR" altLang="en-US" sz="1200" dirty="0">
-                <a:latin typeface="HY엽서M" panose="02030600000101010101" pitchFamily="18" charset="-127"/>
-                <a:ea typeface="HY엽서M" panose="02030600000101010101" pitchFamily="18" charset="-127"/>
-              </a:rPr>
-              <a:t>중대화상 </a:t>
-            </a:r>
-            <a:r>
-              <a:rPr lang="en-US" altLang="ko-KR" sz="1200" dirty="0">
-                <a:latin typeface="HY엽서M" panose="02030600000101010101" pitchFamily="18" charset="-127"/>
-                <a:ea typeface="HY엽서M" panose="02030600000101010101" pitchFamily="18" charset="-127"/>
-              </a:rPr>
-              <a:t>: </a:t>
-            </a:r>
-          </a:p>
-          <a:p>
-            <a:r>
-              <a:rPr lang="ko-KR" altLang="en-US" sz="1200" dirty="0" err="1">
+              <a:rPr lang="ko-KR" altLang="en-US" sz="1000" dirty="0" err="1">
                 <a:latin typeface="HY엽서M" panose="02030600000101010101" pitchFamily="18" charset="-127"/>
                 <a:ea typeface="HY엽서M" panose="02030600000101010101" pitchFamily="18" charset="-127"/>
               </a:rPr>
               <a:t>반깁스</a:t>
             </a:r>
             <a:r>
-              <a:rPr lang="ko-KR" altLang="en-US" sz="1200" dirty="0">
+              <a:rPr lang="ko-KR" altLang="en-US" sz="1000" dirty="0">
                 <a:latin typeface="HY엽서M" panose="02030600000101010101" pitchFamily="18" charset="-127"/>
                 <a:ea typeface="HY엽서M" panose="02030600000101010101" pitchFamily="18" charset="-127"/>
               </a:rPr>
               <a:t>  </a:t>
             </a:r>
             <a:r>
-              <a:rPr lang="en-US" altLang="ko-KR" sz="1200" dirty="0">
+              <a:rPr lang="en-US" altLang="ko-KR" sz="1000" dirty="0">
                 <a:latin typeface="HY엽서M" panose="02030600000101010101" pitchFamily="18" charset="-127"/>
                 <a:ea typeface="HY엽서M" panose="02030600000101010101" pitchFamily="18" charset="-127"/>
               </a:rPr>
               <a:t>:</a:t>
             </a:r>
             <a:r>
-              <a:rPr lang="ko-KR" altLang="en-US" sz="1200" dirty="0">
+              <a:rPr lang="ko-KR" altLang="en-US" sz="1000" dirty="0">
                 <a:latin typeface="HY엽서M" panose="02030600000101010101" pitchFamily="18" charset="-127"/>
                 <a:ea typeface="HY엽서M" panose="02030600000101010101" pitchFamily="18" charset="-127"/>
               </a:rPr>
@@ -5995,14 +5954,17 @@
           </a:p>
           <a:p>
             <a:r>
-              <a:rPr lang="ko-KR" altLang="en-US" sz="1200" dirty="0">
+              <a:rPr lang="ko-KR" altLang="en-US" sz="1000" dirty="0">
                 <a:latin typeface="HY엽서M" panose="02030600000101010101" pitchFamily="18" charset="-127"/>
                 <a:ea typeface="HY엽서M" panose="02030600000101010101" pitchFamily="18" charset="-127"/>
               </a:rPr>
               <a:t>깁스 </a:t>
             </a:r>
             <a:r>
-              <a:rPr lang="en-US" altLang="ko-KR" sz="1200" dirty="0">
+              <a:rPr lang="en-US" altLang="ko-KR" sz="1000" dirty="0">
+                <a:solidFill>
+                  <a:srgbClr val="000000"/>
+                </a:solidFill>
                 <a:latin typeface="HY엽서M" panose="02030600000101010101" pitchFamily="18" charset="-127"/>
                 <a:ea typeface="HY엽서M" panose="02030600000101010101" pitchFamily="18" charset="-127"/>
               </a:rPr>
@@ -6011,14 +5973,37 @@
           </a:p>
           <a:p>
             <a:r>
-              <a:rPr lang="ko-KR" altLang="en-US" sz="1200" dirty="0">
+              <a:rPr lang="ko-KR" altLang="en-US" sz="1000" dirty="0">
                 <a:latin typeface="HY엽서M" panose="02030600000101010101" pitchFamily="18" charset="-127"/>
                 <a:ea typeface="HY엽서M" panose="02030600000101010101" pitchFamily="18" charset="-127"/>
               </a:rPr>
               <a:t>응급실 </a:t>
             </a:r>
             <a:r>
-              <a:rPr lang="en-US" altLang="ko-KR" sz="1200" dirty="0">
+              <a:rPr lang="en-US" altLang="ko-KR" sz="1000" dirty="0">
+                <a:latin typeface="HY엽서M" panose="02030600000101010101" pitchFamily="18" charset="-127"/>
+                <a:ea typeface="HY엽서M" panose="02030600000101010101" pitchFamily="18" charset="-127"/>
+              </a:rPr>
+              <a:t>:</a:t>
+            </a:r>
+          </a:p>
+          <a:p>
+            <a:r>
+              <a:rPr lang="ko-KR" altLang="en-US" sz="1000" dirty="0" err="1">
+                <a:latin typeface="HY엽서M" panose="02030600000101010101" pitchFamily="18" charset="-127"/>
+                <a:ea typeface="HY엽서M" panose="02030600000101010101" pitchFamily="18" charset="-127"/>
+              </a:rPr>
+              <a:t>독감비</a:t>
+            </a:r>
+            <a:r>
+              <a:rPr lang="ko-KR" altLang="en-US" sz="1000" dirty="0">
+                <a:latin typeface="HY엽서M" panose="02030600000101010101" pitchFamily="18" charset="-127"/>
+                <a:ea typeface="HY엽서M" panose="02030600000101010101" pitchFamily="18" charset="-127"/>
+              </a:rPr>
+              <a:t> </a:t>
+            </a:r>
+            <a:r>
+              <a:rPr lang="en-US" altLang="ko-KR" sz="1000" dirty="0">
                 <a:latin typeface="HY엽서M" panose="02030600000101010101" pitchFamily="18" charset="-127"/>
                 <a:ea typeface="HY엽서M" panose="02030600000101010101" pitchFamily="18" charset="-127"/>
               </a:rPr>
@@ -6042,7 +6027,7 @@
         <p:spPr>
           <a:xfrm>
             <a:off x="5184929" y="5466003"/>
-            <a:ext cx="2520000" cy="1154162"/>
+            <a:ext cx="1579278" cy="1023357"/>
           </a:xfrm>
           <a:prstGeom prst="rect">
             <a:avLst/>
@@ -6053,20 +6038,20 @@
           </a:ln>
         </p:spPr>
         <p:txBody>
-          <a:bodyPr wrap="square" rtlCol="0">
+          <a:bodyPr wrap="none" rtlCol="0">
             <a:spAutoFit/>
           </a:bodyPr>
           <a:lstStyle/>
           <a:p>
             <a:r>
-              <a:rPr lang="ko-KR" altLang="en-US" sz="1200" dirty="0">
+              <a:rPr lang="ko-KR" altLang="en-US" sz="1000" dirty="0">
                 <a:latin typeface="HY엽서M" panose="02030600000101010101" pitchFamily="18" charset="-127"/>
                 <a:ea typeface="HY엽서M" panose="02030600000101010101" pitchFamily="18" charset="-127"/>
               </a:rPr>
               <a:t>질병 </a:t>
             </a:r>
             <a:r>
-              <a:rPr lang="en-US" altLang="ko-KR" sz="1200" dirty="0">
+              <a:rPr lang="en-US" altLang="ko-KR" sz="1000" dirty="0">
                 <a:latin typeface="HY엽서M" panose="02030600000101010101" pitchFamily="18" charset="-127"/>
                 <a:ea typeface="HY엽서M" panose="02030600000101010101" pitchFamily="18" charset="-127"/>
               </a:rPr>
@@ -6075,14 +6060,17 @@
           </a:p>
           <a:p>
             <a:r>
-              <a:rPr lang="ko-KR" altLang="en-US" sz="1200" dirty="0">
+              <a:rPr lang="ko-KR" altLang="en-US" sz="1000" dirty="0">
                 <a:latin typeface="HY엽서M" panose="02030600000101010101" pitchFamily="18" charset="-127"/>
                 <a:ea typeface="HY엽서M" panose="02030600000101010101" pitchFamily="18" charset="-127"/>
               </a:rPr>
               <a:t>질병 </a:t>
             </a:r>
             <a:r>
-              <a:rPr lang="en-US" altLang="ko-KR" sz="1200" dirty="0">
+              <a:rPr lang="en-US" altLang="ko-KR" sz="1000" dirty="0">
+                <a:solidFill>
+                  <a:srgbClr val="000000"/>
+                </a:solidFill>
                 <a:latin typeface="HY엽서M" panose="02030600000101010101" pitchFamily="18" charset="-127"/>
                 <a:ea typeface="HY엽서M" panose="02030600000101010101" pitchFamily="18" charset="-127"/>
               </a:rPr>
@@ -6091,14 +6079,17 @@
           </a:p>
           <a:p>
             <a:r>
-              <a:rPr lang="ko-KR" altLang="en-US" sz="1200" dirty="0">
+              <a:rPr lang="ko-KR" altLang="en-US" sz="1000" dirty="0">
                 <a:latin typeface="HY엽서M" panose="02030600000101010101" pitchFamily="18" charset="-127"/>
                 <a:ea typeface="HY엽서M" panose="02030600000101010101" pitchFamily="18" charset="-127"/>
               </a:rPr>
               <a:t>상해</a:t>
             </a:r>
             <a:r>
-              <a:rPr lang="en-US" altLang="ko-KR" sz="1200" dirty="0">
+              <a:rPr lang="en-US" altLang="ko-KR" sz="1000" dirty="0">
+                <a:solidFill>
+                  <a:srgbClr val="000000"/>
+                </a:solidFill>
                 <a:latin typeface="HY엽서M" panose="02030600000101010101" pitchFamily="18" charset="-127"/>
                 <a:ea typeface="HY엽서M" panose="02030600000101010101" pitchFamily="18" charset="-127"/>
               </a:rPr>
@@ -6107,37 +6098,40 @@
           </a:p>
           <a:p>
             <a:r>
-              <a:rPr lang="ko-KR" altLang="en-US" sz="1200" dirty="0">
+              <a:rPr lang="ko-KR" altLang="en-US" sz="1000" dirty="0">
                 <a:latin typeface="HY엽서M" panose="02030600000101010101" pitchFamily="18" charset="-127"/>
                 <a:ea typeface="HY엽서M" panose="02030600000101010101" pitchFamily="18" charset="-127"/>
               </a:rPr>
               <a:t>상해 </a:t>
             </a:r>
             <a:r>
-              <a:rPr lang="en-US" altLang="ko-KR" sz="1200" dirty="0">
-                <a:latin typeface="HY엽서M" panose="02030600000101010101" pitchFamily="18" charset="-127"/>
-                <a:ea typeface="HY엽서M" panose="02030600000101010101" pitchFamily="18" charset="-127"/>
-              </a:rPr>
-              <a:t>80% :</a:t>
-            </a:r>
-          </a:p>
-          <a:p>
-            <a:r>
-              <a:rPr lang="ko-KR" altLang="en-US" sz="1050" dirty="0" err="1">
+              <a:rPr lang="en-US" altLang="ko-KR" sz="1000" dirty="0">
+                <a:solidFill>
+                  <a:srgbClr val="000000"/>
+                </a:solidFill>
+                <a:latin typeface="HY엽서M" panose="02030600000101010101" pitchFamily="18" charset="-127"/>
+                <a:ea typeface="HY엽서M" panose="02030600000101010101" pitchFamily="18" charset="-127"/>
+              </a:rPr>
+              <a:t>80% : </a:t>
+            </a:r>
+          </a:p>
+          <a:p>
+            <a:r>
+              <a:rPr lang="ko-KR" altLang="en-US" sz="1000" dirty="0" err="1">
                 <a:latin typeface="HY엽서M" panose="02030600000101010101" pitchFamily="18" charset="-127"/>
                 <a:ea typeface="HY엽서M" panose="02030600000101010101" pitchFamily="18" charset="-127"/>
               </a:rPr>
               <a:t>교통후유장해</a:t>
             </a:r>
             <a:r>
-              <a:rPr lang="en-US" altLang="ko-KR" sz="1050" dirty="0">
+              <a:rPr lang="en-US" altLang="ko-KR" sz="1000" dirty="0">
                 <a:latin typeface="HY엽서M" panose="02030600000101010101" pitchFamily="18" charset="-127"/>
                 <a:ea typeface="HY엽서M" panose="02030600000101010101" pitchFamily="18" charset="-127"/>
               </a:rPr>
               <a:t>(       %)</a:t>
             </a:r>
             <a:r>
-              <a:rPr lang="ko-KR" altLang="en-US" sz="1050" dirty="0">
+              <a:rPr lang="ko-KR" altLang="en-US" sz="1000" dirty="0">
                 <a:latin typeface="HY엽서M" panose="02030600000101010101" pitchFamily="18" charset="-127"/>
                 <a:ea typeface="HY엽서M" panose="02030600000101010101" pitchFamily="18" charset="-127"/>
               </a:rPr>
@@ -6171,7 +6165,7 @@
         <p:spPr>
           <a:xfrm>
             <a:off x="5166687" y="3424651"/>
-            <a:ext cx="2520000" cy="1200329"/>
+            <a:ext cx="832279" cy="1015663"/>
           </a:xfrm>
           <a:prstGeom prst="rect">
             <a:avLst/>
@@ -6182,20 +6176,23 @@
           </a:ln>
         </p:spPr>
         <p:txBody>
-          <a:bodyPr wrap="square" rtlCol="0">
+          <a:bodyPr wrap="none" rtlCol="0">
             <a:spAutoFit/>
           </a:bodyPr>
           <a:lstStyle/>
           <a:p>
             <a:r>
-              <a:rPr lang="ko-KR" altLang="en-US" sz="1200" dirty="0">
+              <a:rPr lang="ko-KR" altLang="en-US" sz="1000" dirty="0">
                 <a:latin typeface="HY엽서M" panose="02030600000101010101" pitchFamily="18" charset="-127"/>
                 <a:ea typeface="HY엽서M" panose="02030600000101010101" pitchFamily="18" charset="-127"/>
               </a:rPr>
               <a:t>대인 </a:t>
             </a:r>
             <a:r>
-              <a:rPr lang="en-US" altLang="ko-KR" sz="1200" dirty="0">
+              <a:rPr lang="en-US" altLang="ko-KR" sz="1000" dirty="0">
+                <a:solidFill>
+                  <a:srgbClr val="000000"/>
+                </a:solidFill>
                 <a:latin typeface="HY엽서M" panose="02030600000101010101" pitchFamily="18" charset="-127"/>
                 <a:ea typeface="HY엽서M" panose="02030600000101010101" pitchFamily="18" charset="-127"/>
               </a:rPr>
@@ -6204,14 +6201,17 @@
           </a:p>
           <a:p>
             <a:r>
-              <a:rPr lang="ko-KR" altLang="en-US" sz="1200" dirty="0">
+              <a:rPr lang="ko-KR" altLang="en-US" sz="1000" dirty="0">
                 <a:latin typeface="HY엽서M" panose="02030600000101010101" pitchFamily="18" charset="-127"/>
                 <a:ea typeface="HY엽서M" panose="02030600000101010101" pitchFamily="18" charset="-127"/>
               </a:rPr>
               <a:t>대물 </a:t>
             </a:r>
             <a:r>
-              <a:rPr lang="en-US" altLang="ko-KR" sz="1200" dirty="0">
+              <a:rPr lang="en-US" altLang="ko-KR" sz="1000" dirty="0">
+                <a:solidFill>
+                  <a:srgbClr val="000000"/>
+                </a:solidFill>
                 <a:latin typeface="HY엽서M" panose="02030600000101010101" pitchFamily="18" charset="-127"/>
                 <a:ea typeface="HY엽서M" panose="02030600000101010101" pitchFamily="18" charset="-127"/>
               </a:rPr>
@@ -6220,14 +6220,17 @@
           </a:p>
           <a:p>
             <a:r>
-              <a:rPr lang="ko-KR" altLang="en-US" sz="1200" dirty="0">
+              <a:rPr lang="ko-KR" altLang="en-US" sz="1000" dirty="0">
                 <a:latin typeface="HY엽서M" panose="02030600000101010101" pitchFamily="18" charset="-127"/>
                 <a:ea typeface="HY엽서M" panose="02030600000101010101" pitchFamily="18" charset="-127"/>
               </a:rPr>
               <a:t>합의금 </a:t>
             </a:r>
             <a:r>
-              <a:rPr lang="en-US" altLang="ko-KR" sz="1200" dirty="0">
+              <a:rPr lang="en-US" altLang="ko-KR" sz="1000" dirty="0">
+                <a:solidFill>
+                  <a:srgbClr val="000000"/>
+                </a:solidFill>
                 <a:latin typeface="HY엽서M" panose="02030600000101010101" pitchFamily="18" charset="-127"/>
                 <a:ea typeface="HY엽서M" panose="02030600000101010101" pitchFamily="18" charset="-127"/>
               </a:rPr>
@@ -6236,21 +6239,21 @@
           </a:p>
           <a:p>
             <a:r>
-              <a:rPr lang="en-US" altLang="ko-KR" sz="1200" dirty="0">
+              <a:rPr lang="en-US" altLang="ko-KR" sz="1000" dirty="0">
                 <a:latin typeface="HY엽서M" panose="02030600000101010101" pitchFamily="18" charset="-127"/>
                 <a:ea typeface="HY엽서M" panose="02030600000101010101" pitchFamily="18" charset="-127"/>
               </a:rPr>
               <a:t>6</a:t>
             </a:r>
             <a:r>
-              <a:rPr lang="ko-KR" altLang="en-US" sz="1200" dirty="0">
+              <a:rPr lang="ko-KR" altLang="en-US" sz="1000" dirty="0">
                 <a:latin typeface="HY엽서M" panose="02030600000101010101" pitchFamily="18" charset="-127"/>
                 <a:ea typeface="HY엽서M" panose="02030600000101010101" pitchFamily="18" charset="-127"/>
               </a:rPr>
               <a:t>주미만 </a:t>
             </a:r>
             <a:r>
-              <a:rPr lang="en-US" altLang="ko-KR" sz="1200" dirty="0">
+              <a:rPr lang="en-US" altLang="ko-KR" sz="1000" dirty="0">
                 <a:latin typeface="HY엽서M" panose="02030600000101010101" pitchFamily="18" charset="-127"/>
                 <a:ea typeface="HY엽서M" panose="02030600000101010101" pitchFamily="18" charset="-127"/>
               </a:rPr>
@@ -6259,14 +6262,17 @@
           </a:p>
           <a:p>
             <a:r>
-              <a:rPr lang="ko-KR" altLang="en-US" sz="1200" dirty="0">
+              <a:rPr lang="ko-KR" altLang="en-US" sz="1000" dirty="0">
                 <a:latin typeface="HY엽서M" panose="02030600000101010101" pitchFamily="18" charset="-127"/>
                 <a:ea typeface="HY엽서M" panose="02030600000101010101" pitchFamily="18" charset="-127"/>
               </a:rPr>
               <a:t>변호사비 </a:t>
             </a:r>
             <a:r>
-              <a:rPr lang="en-US" altLang="ko-KR" sz="1200" dirty="0">
+              <a:rPr lang="en-US" altLang="ko-KR" sz="1000" dirty="0">
+                <a:solidFill>
+                  <a:srgbClr val="000000"/>
+                </a:solidFill>
                 <a:latin typeface="HY엽서M" panose="02030600000101010101" pitchFamily="18" charset="-127"/>
                 <a:ea typeface="HY엽서M" panose="02030600000101010101" pitchFamily="18" charset="-127"/>
               </a:rPr>
@@ -6275,25 +6281,28 @@
           </a:p>
           <a:p>
             <a:r>
-              <a:rPr lang="ko-KR" altLang="en-US" sz="1200" dirty="0" err="1">
+              <a:rPr lang="ko-KR" altLang="en-US" sz="1000" dirty="0" err="1">
                 <a:latin typeface="HY엽서M" panose="02030600000101010101" pitchFamily="18" charset="-127"/>
                 <a:ea typeface="HY엽서M" panose="02030600000101010101" pitchFamily="18" charset="-127"/>
               </a:rPr>
               <a:t>자부상</a:t>
             </a:r>
             <a:r>
-              <a:rPr lang="ko-KR" altLang="en-US" sz="1200" dirty="0">
+              <a:rPr lang="ko-KR" altLang="en-US" sz="1000" dirty="0">
                 <a:latin typeface="HY엽서M" panose="02030600000101010101" pitchFamily="18" charset="-127"/>
                 <a:ea typeface="HY엽서M" panose="02030600000101010101" pitchFamily="18" charset="-127"/>
               </a:rPr>
               <a:t> </a:t>
             </a:r>
             <a:r>
-              <a:rPr lang="en-US" altLang="ko-KR" sz="1200" dirty="0">
-                <a:latin typeface="HY엽서M" panose="02030600000101010101" pitchFamily="18" charset="-127"/>
-                <a:ea typeface="HY엽서M" panose="02030600000101010101" pitchFamily="18" charset="-127"/>
-              </a:rPr>
-              <a:t>: </a:t>
+              <a:rPr lang="en-US" altLang="ko-KR" sz="1000" dirty="0">
+                <a:solidFill>
+                  <a:srgbClr val="000000"/>
+                </a:solidFill>
+                <a:latin typeface="HY엽서M" panose="02030600000101010101" pitchFamily="18" charset="-127"/>
+                <a:ea typeface="HY엽서M" panose="02030600000101010101" pitchFamily="18" charset="-127"/>
+              </a:rPr>
+              <a:t>:</a:t>
             </a:r>
           </a:p>
         </p:txBody>
@@ -6313,7 +6322,7 @@
         <p:spPr>
           <a:xfrm>
             <a:off x="3531857" y="7017107"/>
-            <a:ext cx="2520000" cy="830997"/>
+            <a:ext cx="760144" cy="707886"/>
           </a:xfrm>
           <a:prstGeom prst="rect">
             <a:avLst/>
@@ -6324,13 +6333,13 @@
           </a:ln>
         </p:spPr>
         <p:txBody>
-          <a:bodyPr wrap="square" rtlCol="0">
+          <a:bodyPr wrap="none" rtlCol="0">
             <a:spAutoFit/>
           </a:bodyPr>
           <a:lstStyle/>
           <a:p>
             <a:r>
-              <a:rPr lang="ko-KR" altLang="en-US" sz="1200" dirty="0">
+              <a:rPr lang="ko-KR" altLang="en-US" sz="1000" dirty="0">
                 <a:latin typeface="HY엽서M" panose="02030600000101010101" pitchFamily="18" charset="-127"/>
                 <a:ea typeface="HY엽서M" panose="02030600000101010101" pitchFamily="18" charset="-127"/>
               </a:rPr>
@@ -6343,21 +6352,21 @@
           </a:p>
           <a:p>
             <a:r>
-              <a:rPr lang="en-US" altLang="ko-KR" sz="1200" dirty="0">
+              <a:rPr lang="en-US" altLang="ko-KR" sz="1000" dirty="0">
                 <a:latin typeface="HY엽서M" panose="02030600000101010101" pitchFamily="18" charset="-127"/>
                 <a:ea typeface="HY엽서M" panose="02030600000101010101" pitchFamily="18" charset="-127"/>
               </a:rPr>
               <a:t>- ___</a:t>
             </a:r>
             <a:r>
-              <a:rPr lang="ko-KR" altLang="en-US" sz="1200" dirty="0">
+              <a:rPr lang="ko-KR" altLang="en-US" sz="1000" dirty="0">
                 <a:latin typeface="HY엽서M" panose="02030600000101010101" pitchFamily="18" charset="-127"/>
                 <a:ea typeface="HY엽서M" panose="02030600000101010101" pitchFamily="18" charset="-127"/>
               </a:rPr>
               <a:t>세 </a:t>
             </a:r>
             <a:r>
-              <a:rPr lang="en-US" altLang="ko-KR" sz="1200" dirty="0">
+              <a:rPr lang="en-US" altLang="ko-KR" sz="1000" dirty="0">
                 <a:latin typeface="HY엽서M" panose="02030600000101010101" pitchFamily="18" charset="-127"/>
                 <a:ea typeface="HY엽서M" panose="02030600000101010101" pitchFamily="18" charset="-127"/>
               </a:rPr>
@@ -6370,25 +6379,28 @@
               <a:buChar char="-"/>
             </a:pPr>
             <a:r>
-              <a:rPr lang="en-US" altLang="ko-KR" sz="1200" dirty="0">
+              <a:rPr lang="en-US" altLang="ko-KR" sz="1000" dirty="0">
                 <a:latin typeface="HY엽서M" panose="02030600000101010101" pitchFamily="18" charset="-127"/>
                 <a:ea typeface="HY엽서M" panose="02030600000101010101" pitchFamily="18" charset="-127"/>
               </a:rPr>
               <a:t>80</a:t>
             </a:r>
             <a:r>
-              <a:rPr lang="ko-KR" altLang="en-US" sz="1200" dirty="0">
+              <a:rPr lang="ko-KR" altLang="en-US" sz="1000" dirty="0">
                 <a:latin typeface="HY엽서M" panose="02030600000101010101" pitchFamily="18" charset="-127"/>
                 <a:ea typeface="HY엽서M" panose="02030600000101010101" pitchFamily="18" charset="-127"/>
               </a:rPr>
               <a:t>세 </a:t>
             </a:r>
             <a:r>
-              <a:rPr lang="en-US" altLang="ko-KR" sz="1200" dirty="0">
-                <a:latin typeface="HY엽서M" panose="02030600000101010101" pitchFamily="18" charset="-127"/>
-                <a:ea typeface="HY엽서M" panose="02030600000101010101" pitchFamily="18" charset="-127"/>
-              </a:rPr>
-              <a:t>: </a:t>
+              <a:rPr lang="en-US" altLang="ko-KR" sz="1000" dirty="0">
+                <a:solidFill>
+                  <a:srgbClr val="000000"/>
+                </a:solidFill>
+                <a:latin typeface="HY엽서M" panose="02030600000101010101" pitchFamily="18" charset="-127"/>
+                <a:ea typeface="HY엽서M" panose="02030600000101010101" pitchFamily="18" charset="-127"/>
+              </a:rPr>
+              <a:t>:</a:t>
             </a:r>
           </a:p>
           <a:p>
@@ -6397,19 +6409,32 @@
               <a:buChar char="-"/>
             </a:pPr>
             <a:r>
-              <a:rPr lang="ko-KR" altLang="en-US" sz="1200" dirty="0">
+              <a:rPr lang="ko-KR" altLang="en-US" sz="1000" dirty="0">
                 <a:latin typeface="HY엽서M" panose="02030600000101010101" pitchFamily="18" charset="-127"/>
                 <a:ea typeface="HY엽서M" panose="02030600000101010101" pitchFamily="18" charset="-127"/>
               </a:rPr>
               <a:t>종신 </a:t>
             </a:r>
             <a:r>
-              <a:rPr lang="en-US" altLang="ko-KR" sz="1200" dirty="0">
-                <a:latin typeface="HY엽서M" panose="02030600000101010101" pitchFamily="18" charset="-127"/>
-                <a:ea typeface="HY엽서M" panose="02030600000101010101" pitchFamily="18" charset="-127"/>
-              </a:rPr>
-              <a:t>: </a:t>
-            </a:r>
+              <a:rPr lang="en-US" altLang="ko-KR" sz="1000" dirty="0">
+                <a:solidFill>
+                  <a:srgbClr val="000000"/>
+                </a:solidFill>
+                <a:latin typeface="HY엽서M" panose="02030600000101010101" pitchFamily="18" charset="-127"/>
+                <a:ea typeface="HY엽서M" panose="02030600000101010101" pitchFamily="18" charset="-127"/>
+              </a:rPr>
+              <a:t>:</a:t>
+            </a:r>
+            <a:endParaRPr lang="en-US" altLang="ko-KR" sz="1000" dirty="0">
+              <a:solidFill>
+                <a:srgbClr val="000000"/>
+              </a:solidFill>
+              <a:highlight>
+                <a:srgbClr val="FFFF00"/>
+              </a:highlight>
+              <a:latin typeface="HY엽서M" panose="02030600000101010101" pitchFamily="18" charset="-127"/>
+              <a:ea typeface="HY엽서M" panose="02030600000101010101" pitchFamily="18" charset="-127"/>
+            </a:endParaRPr>
           </a:p>
         </p:txBody>
       </p:sp>
@@ -6428,7 +6453,7 @@
         <p:spPr>
           <a:xfrm>
             <a:off x="3531857" y="7841460"/>
-            <a:ext cx="2520000" cy="276999"/>
+            <a:ext cx="788999" cy="246221"/>
           </a:xfrm>
           <a:prstGeom prst="rect">
             <a:avLst/>
@@ -6439,24 +6464,27 @@
           </a:ln>
         </p:spPr>
         <p:txBody>
-          <a:bodyPr wrap="square" rtlCol="0">
+          <a:bodyPr wrap="none" rtlCol="0">
             <a:spAutoFit/>
           </a:bodyPr>
           <a:lstStyle/>
           <a:p>
             <a:r>
-              <a:rPr lang="ko-KR" altLang="en-US" sz="1200" dirty="0">
+              <a:rPr lang="ko-KR" altLang="en-US" sz="1000" dirty="0">
                 <a:latin typeface="HY엽서M" panose="02030600000101010101" pitchFamily="18" charset="-127"/>
                 <a:ea typeface="HY엽서M" panose="02030600000101010101" pitchFamily="18" charset="-127"/>
               </a:rPr>
               <a:t>상해사망 </a:t>
             </a:r>
             <a:r>
-              <a:rPr lang="en-US" altLang="ko-KR" sz="1200" dirty="0">
-                <a:latin typeface="HY엽서M" panose="02030600000101010101" pitchFamily="18" charset="-127"/>
-                <a:ea typeface="HY엽서M" panose="02030600000101010101" pitchFamily="18" charset="-127"/>
-              </a:rPr>
-              <a:t>: </a:t>
+              <a:rPr lang="en-US" altLang="ko-KR" sz="1000" dirty="0">
+                <a:solidFill>
+                  <a:srgbClr val="000000"/>
+                </a:solidFill>
+                <a:latin typeface="HY엽서M" panose="02030600000101010101" pitchFamily="18" charset="-127"/>
+                <a:ea typeface="HY엽서M" panose="02030600000101010101" pitchFamily="18" charset="-127"/>
+              </a:rPr>
+              <a:t>:</a:t>
             </a:r>
           </a:p>
         </p:txBody>
@@ -6487,20 +6515,20 @@
           </a:ln>
         </p:spPr>
         <p:txBody>
-          <a:bodyPr wrap="square" rtlCol="0">
+          <a:bodyPr wrap="none" rtlCol="0">
             <a:spAutoFit/>
           </a:bodyPr>
           <a:lstStyle/>
           <a:p>
             <a:r>
-              <a:rPr lang="ko-KR" altLang="en-US" sz="1200" dirty="0">
+              <a:rPr lang="ko-KR" altLang="en-US" sz="1000" dirty="0">
                 <a:latin typeface="HY엽서M" panose="02030600000101010101" pitchFamily="18" charset="-127"/>
                 <a:ea typeface="HY엽서M" panose="02030600000101010101" pitchFamily="18" charset="-127"/>
               </a:rPr>
               <a:t>치매 </a:t>
             </a:r>
             <a:r>
-              <a:rPr lang="en-US" altLang="ko-KR" sz="1200" dirty="0">
+              <a:rPr lang="en-US" altLang="ko-KR" sz="1000" dirty="0">
                 <a:latin typeface="HY엽서M" panose="02030600000101010101" pitchFamily="18" charset="-127"/>
                 <a:ea typeface="HY엽서M" panose="02030600000101010101" pitchFamily="18" charset="-127"/>
               </a:rPr>
@@ -6509,14 +6537,14 @@
           </a:p>
           <a:p>
             <a:r>
-              <a:rPr lang="ko-KR" altLang="en-US" sz="1200" dirty="0">
+              <a:rPr lang="ko-KR" altLang="en-US" sz="1000" dirty="0">
                 <a:latin typeface="HY엽서M" panose="02030600000101010101" pitchFamily="18" charset="-127"/>
                 <a:ea typeface="HY엽서M" panose="02030600000101010101" pitchFamily="18" charset="-127"/>
               </a:rPr>
               <a:t>재가 </a:t>
             </a:r>
             <a:r>
-              <a:rPr lang="en-US" altLang="ko-KR" sz="1200" dirty="0">
+              <a:rPr lang="en-US" altLang="ko-KR" sz="1000" dirty="0">
                 <a:latin typeface="HY엽서M" panose="02030600000101010101" pitchFamily="18" charset="-127"/>
                 <a:ea typeface="HY엽서M" panose="02030600000101010101" pitchFamily="18" charset="-127"/>
               </a:rPr>
@@ -6525,21 +6553,21 @@
           </a:p>
           <a:p>
             <a:r>
-              <a:rPr lang="ko-KR" altLang="en-US" sz="1200" dirty="0" err="1">
+              <a:rPr lang="ko-KR" altLang="en-US" sz="1000" dirty="0" err="1">
                 <a:latin typeface="HY엽서M" panose="02030600000101010101" pitchFamily="18" charset="-127"/>
                 <a:ea typeface="HY엽서M" panose="02030600000101010101" pitchFamily="18" charset="-127"/>
               </a:rPr>
               <a:t>노치원</a:t>
             </a:r>
             <a:r>
-              <a:rPr lang="ko-KR" altLang="en-US" sz="1200" dirty="0">
+              <a:rPr lang="ko-KR" altLang="en-US" sz="1000" dirty="0">
                 <a:latin typeface="HY엽서M" panose="02030600000101010101" pitchFamily="18" charset="-127"/>
                 <a:ea typeface="HY엽서M" panose="02030600000101010101" pitchFamily="18" charset="-127"/>
               </a:rPr>
               <a:t> </a:t>
             </a:r>
             <a:r>
-              <a:rPr lang="en-US" altLang="ko-KR" sz="1200" dirty="0">
+              <a:rPr lang="en-US" altLang="ko-KR" sz="1000" dirty="0">
                 <a:latin typeface="HY엽서M" panose="02030600000101010101" pitchFamily="18" charset="-127"/>
                 <a:ea typeface="HY엽서M" panose="02030600000101010101" pitchFamily="18" charset="-127"/>
               </a:rPr>
@@ -6548,14 +6576,14 @@
           </a:p>
           <a:p>
             <a:r>
-              <a:rPr lang="ko-KR" altLang="en-US" sz="1200" dirty="0">
+              <a:rPr lang="ko-KR" altLang="en-US" sz="1000" dirty="0">
                 <a:latin typeface="HY엽서M" panose="02030600000101010101" pitchFamily="18" charset="-127"/>
                 <a:ea typeface="HY엽서M" panose="02030600000101010101" pitchFamily="18" charset="-127"/>
               </a:rPr>
               <a:t>시설 </a:t>
             </a:r>
             <a:r>
-              <a:rPr lang="en-US" altLang="ko-KR" sz="1200" dirty="0">
+              <a:rPr lang="en-US" altLang="ko-KR" sz="1000" dirty="0">
                 <a:latin typeface="HY엽서M" panose="02030600000101010101" pitchFamily="18" charset="-127"/>
                 <a:ea typeface="HY엽서M" panose="02030600000101010101" pitchFamily="18" charset="-127"/>
               </a:rPr>
@@ -6594,20 +6622,20 @@
           </a:ln>
         </p:spPr>
         <p:txBody>
-          <a:bodyPr wrap="square" rtlCol="0">
+          <a:bodyPr wrap="none" rtlCol="0">
             <a:spAutoFit/>
           </a:bodyPr>
           <a:lstStyle/>
           <a:p>
             <a:r>
-              <a:rPr lang="ko-KR" altLang="en-US" sz="1200" dirty="0">
+              <a:rPr lang="ko-KR" altLang="en-US" sz="1000" dirty="0">
                 <a:latin typeface="HY엽서M" panose="02030600000101010101" pitchFamily="18" charset="-127"/>
                 <a:ea typeface="HY엽서M" panose="02030600000101010101" pitchFamily="18" charset="-127"/>
               </a:rPr>
               <a:t>크라운 </a:t>
             </a:r>
             <a:r>
-              <a:rPr lang="en-US" altLang="ko-KR" sz="1200" dirty="0">
+              <a:rPr lang="en-US" altLang="ko-KR" sz="1000" dirty="0">
                 <a:latin typeface="HY엽서M" panose="02030600000101010101" pitchFamily="18" charset="-127"/>
                 <a:ea typeface="HY엽서M" panose="02030600000101010101" pitchFamily="18" charset="-127"/>
               </a:rPr>
@@ -6616,14 +6644,14 @@
           </a:p>
           <a:p>
             <a:r>
-              <a:rPr lang="ko-KR" altLang="en-US" sz="1200" dirty="0">
+              <a:rPr lang="ko-KR" altLang="en-US" sz="1000" dirty="0">
                 <a:latin typeface="HY엽서M" panose="02030600000101010101" pitchFamily="18" charset="-127"/>
                 <a:ea typeface="HY엽서M" panose="02030600000101010101" pitchFamily="18" charset="-127"/>
               </a:rPr>
               <a:t>임플란트 </a:t>
             </a:r>
             <a:r>
-              <a:rPr lang="en-US" altLang="ko-KR" sz="1200" dirty="0">
+              <a:rPr lang="en-US" altLang="ko-KR" sz="1000" dirty="0">
                 <a:latin typeface="HY엽서M" panose="02030600000101010101" pitchFamily="18" charset="-127"/>
                 <a:ea typeface="HY엽서M" panose="02030600000101010101" pitchFamily="18" charset="-127"/>
               </a:rPr>
@@ -6632,14 +6660,14 @@
           </a:p>
           <a:p>
             <a:r>
-              <a:rPr lang="ko-KR" altLang="en-US" sz="1200" dirty="0">
+              <a:rPr lang="ko-KR" altLang="en-US" sz="1000" dirty="0">
                 <a:latin typeface="HY엽서M" panose="02030600000101010101" pitchFamily="18" charset="-127"/>
                 <a:ea typeface="HY엽서M" panose="02030600000101010101" pitchFamily="18" charset="-127"/>
               </a:rPr>
               <a:t>기타 </a:t>
             </a:r>
             <a:r>
-              <a:rPr lang="en-US" altLang="ko-KR" sz="1200" dirty="0">
+              <a:rPr lang="en-US" altLang="ko-KR" sz="1000" dirty="0">
                 <a:latin typeface="HY엽서M" panose="02030600000101010101" pitchFamily="18" charset="-127"/>
                 <a:ea typeface="HY엽서M" panose="02030600000101010101" pitchFamily="18" charset="-127"/>
               </a:rPr>
@@ -6648,14 +6676,14 @@
           </a:p>
           <a:p>
             <a:r>
-              <a:rPr lang="ko-KR" altLang="en-US" sz="1200" dirty="0">
+              <a:rPr lang="ko-KR" altLang="en-US" sz="1000" dirty="0">
                 <a:latin typeface="HY엽서M" panose="02030600000101010101" pitchFamily="18" charset="-127"/>
                 <a:ea typeface="HY엽서M" panose="02030600000101010101" pitchFamily="18" charset="-127"/>
               </a:rPr>
               <a:t>화재보험 </a:t>
             </a:r>
             <a:r>
-              <a:rPr lang="en-US" altLang="ko-KR" sz="1200" dirty="0">
+              <a:rPr lang="en-US" altLang="ko-KR" sz="1000" dirty="0">
                 <a:latin typeface="HY엽서M" panose="02030600000101010101" pitchFamily="18" charset="-127"/>
                 <a:ea typeface="HY엽서M" panose="02030600000101010101" pitchFamily="18" charset="-127"/>
               </a:rPr>
@@ -6683,7 +6711,7 @@
         <p:spPr>
           <a:xfrm>
             <a:off x="162211" y="3342373"/>
-            <a:ext cx="3155500" cy="1569660"/>
+            <a:ext cx="3090496" cy="1323439"/>
           </a:xfrm>
           <a:prstGeom prst="rect">
             <a:avLst/>
@@ -6700,14 +6728,59 @@
           <a:lstStyle/>
           <a:p>
             <a:r>
-              <a:rPr lang="ko-KR" altLang="en-US" sz="1200" dirty="0">
-                <a:latin typeface="HY엽서M" panose="02030600000101010101" pitchFamily="18" charset="-127"/>
-                <a:ea typeface="HY엽서M" panose="02030600000101010101" pitchFamily="18" charset="-127"/>
-              </a:rPr>
-              <a:t>암진단비 </a:t>
-            </a:r>
-            <a:r>
-              <a:rPr lang="en-US" altLang="ko-KR" sz="1200" dirty="0">
+              <a:rPr lang="ko-KR" altLang="en-US" sz="1000" dirty="0">
+                <a:latin typeface="HY엽서M" panose="02030600000101010101" pitchFamily="18" charset="-127"/>
+                <a:ea typeface="HY엽서M" panose="02030600000101010101" pitchFamily="18" charset="-127"/>
+              </a:rPr>
+              <a:t>고액암 </a:t>
+            </a:r>
+            <a:r>
+              <a:rPr lang="en-US" altLang="ko-KR" sz="1000" dirty="0">
+                <a:latin typeface="HY엽서M" panose="02030600000101010101" pitchFamily="18" charset="-127"/>
+                <a:ea typeface="HY엽서M" panose="02030600000101010101" pitchFamily="18" charset="-127"/>
+              </a:rPr>
+              <a:t>: 
+</a:t>
+            </a:r>
+            <a:r>
+              <a:rPr lang="en-US" altLang="ko-KR" sz="1000" dirty="0" err="1">
+                <a:latin typeface="HY엽서M" panose="02030600000101010101" pitchFamily="18" charset="-127"/>
+                <a:ea typeface="HY엽서M" panose="02030600000101010101" pitchFamily="18" charset="-127"/>
+              </a:rPr>
+              <a:t>일반암</a:t>
+            </a:r>
+            <a:r>
+              <a:rPr lang="en-US" altLang="ko-KR" sz="1000" dirty="0">
+                <a:latin typeface="HY엽서M" panose="02030600000101010101" pitchFamily="18" charset="-127"/>
+                <a:ea typeface="HY엽서M" panose="02030600000101010101" pitchFamily="18" charset="-127"/>
+              </a:rPr>
+              <a:t> : </a:t>
+            </a:r>
+          </a:p>
+          <a:p>
+            <a:r>
+              <a:rPr lang="en-US" altLang="ko-KR" sz="1000" dirty="0" err="1">
+                <a:latin typeface="HY엽서M" panose="02030600000101010101" pitchFamily="18" charset="-127"/>
+                <a:ea typeface="HY엽서M" panose="02030600000101010101" pitchFamily="18" charset="-127"/>
+              </a:rPr>
+              <a:t>통합암</a:t>
+            </a:r>
+            <a:r>
+              <a:rPr lang="en-US" altLang="ko-KR" sz="1000" dirty="0">
+                <a:latin typeface="HY엽서M" panose="02030600000101010101" pitchFamily="18" charset="-127"/>
+                <a:ea typeface="HY엽서M" panose="02030600000101010101" pitchFamily="18" charset="-127"/>
+              </a:rPr>
+              <a:t> :                   / </a:t>
+            </a:r>
+            <a:r>
+              <a:rPr lang="ko-KR" altLang="en-US" sz="1000" dirty="0">
+                <a:latin typeface="HY엽서M" panose="02030600000101010101" pitchFamily="18" charset="-127"/>
+                <a:ea typeface="HY엽서M" panose="02030600000101010101" pitchFamily="18" charset="-127"/>
+              </a:rPr>
+              <a:t>통합전이암 </a:t>
+            </a:r>
+            <a:r>
+              <a:rPr lang="en-US" altLang="ko-KR" sz="1000" dirty="0">
                 <a:latin typeface="HY엽서M" panose="02030600000101010101" pitchFamily="18" charset="-127"/>
                 <a:ea typeface="HY엽서M" panose="02030600000101010101" pitchFamily="18" charset="-127"/>
               </a:rPr>
@@ -6716,21 +6789,21 @@
           </a:p>
           <a:p>
             <a:r>
-              <a:rPr lang="ko-KR" altLang="en-US" sz="1200" dirty="0" err="1">
+              <a:rPr lang="ko-KR" altLang="en-US" sz="1000" dirty="0" err="1">
                 <a:latin typeface="HY엽서M" panose="02030600000101010101" pitchFamily="18" charset="-127"/>
                 <a:ea typeface="HY엽서M" panose="02030600000101010101" pitchFamily="18" charset="-127"/>
               </a:rPr>
               <a:t>유사암</a:t>
             </a:r>
             <a:r>
-              <a:rPr lang="ko-KR" altLang="en-US" sz="1200" dirty="0">
+              <a:rPr lang="ko-KR" altLang="en-US" sz="1000" dirty="0">
                 <a:latin typeface="HY엽서M" panose="02030600000101010101" pitchFamily="18" charset="-127"/>
                 <a:ea typeface="HY엽서M" panose="02030600000101010101" pitchFamily="18" charset="-127"/>
               </a:rPr>
               <a:t> </a:t>
             </a:r>
             <a:r>
-              <a:rPr lang="en-US" altLang="ko-KR" sz="1200" dirty="0">
+              <a:rPr lang="en-US" altLang="ko-KR" sz="1000" dirty="0">
                 <a:latin typeface="HY엽서M" panose="02030600000101010101" pitchFamily="18" charset="-127"/>
                 <a:ea typeface="HY엽서M" panose="02030600000101010101" pitchFamily="18" charset="-127"/>
               </a:rPr>
@@ -6739,14 +6812,123 @@
           </a:p>
           <a:p>
             <a:r>
-              <a:rPr lang="ko-KR" altLang="en-US" sz="1200" dirty="0">
-                <a:latin typeface="HY엽서M" panose="02030600000101010101" pitchFamily="18" charset="-127"/>
-                <a:ea typeface="HY엽서M" panose="02030600000101010101" pitchFamily="18" charset="-127"/>
-              </a:rPr>
-              <a:t>통합전이암 </a:t>
-            </a:r>
-            <a:r>
-              <a:rPr lang="en-US" altLang="ko-KR" sz="1200" dirty="0">
+              <a:rPr lang="ko-KR" altLang="en-US" sz="1000" dirty="0">
+                <a:latin typeface="HY엽서M" panose="02030600000101010101" pitchFamily="18" charset="-127"/>
+                <a:ea typeface="HY엽서M" panose="02030600000101010101" pitchFamily="18" charset="-127"/>
+              </a:rPr>
+              <a:t>항암치료 </a:t>
+            </a:r>
+            <a:r>
+              <a:rPr lang="en-US" altLang="ko-KR" sz="1000" dirty="0">
+                <a:latin typeface="HY엽서M" panose="02030600000101010101" pitchFamily="18" charset="-127"/>
+                <a:ea typeface="HY엽서M" panose="02030600000101010101" pitchFamily="18" charset="-127"/>
+              </a:rPr>
+              <a:t>:               / </a:t>
+            </a:r>
+            <a:r>
+              <a:rPr lang="ko-KR" altLang="en-US" sz="1000" dirty="0" err="1">
+                <a:latin typeface="HY엽서M" panose="02030600000101010101" pitchFamily="18" charset="-127"/>
+                <a:ea typeface="HY엽서M" panose="02030600000101010101" pitchFamily="18" charset="-127"/>
+              </a:rPr>
+              <a:t>전이암항암치료</a:t>
+            </a:r>
+            <a:r>
+              <a:rPr lang="ko-KR" altLang="en-US" sz="1000" dirty="0">
+                <a:latin typeface="HY엽서M" panose="02030600000101010101" pitchFamily="18" charset="-127"/>
+                <a:ea typeface="HY엽서M" panose="02030600000101010101" pitchFamily="18" charset="-127"/>
+              </a:rPr>
+              <a:t> </a:t>
+            </a:r>
+            <a:r>
+              <a:rPr lang="en-US" altLang="ko-KR" sz="1000" dirty="0">
+                <a:latin typeface="HY엽서M" panose="02030600000101010101" pitchFamily="18" charset="-127"/>
+                <a:ea typeface="HY엽서M" panose="02030600000101010101" pitchFamily="18" charset="-127"/>
+              </a:rPr>
+              <a:t>:</a:t>
+            </a:r>
+          </a:p>
+          <a:p>
+            <a:r>
+              <a:rPr lang="ko-KR" altLang="en-US" sz="1000" dirty="0">
+                <a:latin typeface="HY엽서M" panose="02030600000101010101" pitchFamily="18" charset="-127"/>
+                <a:ea typeface="HY엽서M" panose="02030600000101010101" pitchFamily="18" charset="-127"/>
+              </a:rPr>
+              <a:t>표적치료</a:t>
+            </a:r>
+            <a:r>
+              <a:rPr lang="en-US" altLang="ko-KR" sz="1000" dirty="0">
+                <a:latin typeface="HY엽서M" panose="02030600000101010101" pitchFamily="18" charset="-127"/>
+                <a:ea typeface="HY엽서M" panose="02030600000101010101" pitchFamily="18" charset="-127"/>
+              </a:rPr>
+              <a:t>:                / </a:t>
+            </a:r>
+            <a:r>
+              <a:rPr lang="ko-KR" altLang="en-US" sz="1000" dirty="0">
+                <a:latin typeface="HY엽서M" panose="02030600000101010101" pitchFamily="18" charset="-127"/>
+                <a:ea typeface="HY엽서M" panose="02030600000101010101" pitchFamily="18" charset="-127"/>
+              </a:rPr>
+              <a:t>양성자</a:t>
+            </a:r>
+            <a:r>
+              <a:rPr lang="en-US" altLang="ko-KR" sz="1000" dirty="0">
+                <a:latin typeface="HY엽서M" panose="02030600000101010101" pitchFamily="18" charset="-127"/>
+                <a:ea typeface="HY엽서M" panose="02030600000101010101" pitchFamily="18" charset="-127"/>
+              </a:rPr>
+              <a:t>.</a:t>
+            </a:r>
+            <a:r>
+              <a:rPr lang="ko-KR" altLang="en-US" sz="1000" dirty="0">
+                <a:latin typeface="HY엽서M" panose="02030600000101010101" pitchFamily="18" charset="-127"/>
+                <a:ea typeface="HY엽서M" panose="02030600000101010101" pitchFamily="18" charset="-127"/>
+              </a:rPr>
+              <a:t>세기 </a:t>
+            </a:r>
+            <a:r>
+              <a:rPr lang="en-US" altLang="ko-KR" sz="1000" dirty="0">
+                <a:latin typeface="HY엽서M" panose="02030600000101010101" pitchFamily="18" charset="-127"/>
+                <a:ea typeface="HY엽서M" panose="02030600000101010101" pitchFamily="18" charset="-127"/>
+              </a:rPr>
+              <a:t>:</a:t>
+            </a:r>
+          </a:p>
+          <a:p>
+            <a:r>
+              <a:rPr lang="ko-KR" altLang="en-US" sz="1000" dirty="0" err="1">
+                <a:latin typeface="HY엽서M" panose="02030600000101010101" pitchFamily="18" charset="-127"/>
+                <a:ea typeface="HY엽서M" panose="02030600000101010101" pitchFamily="18" charset="-127"/>
+              </a:rPr>
+              <a:t>중입자</a:t>
+            </a:r>
+            <a:r>
+              <a:rPr lang="ko-KR" altLang="en-US" sz="1000" dirty="0">
+                <a:latin typeface="HY엽서M" panose="02030600000101010101" pitchFamily="18" charset="-127"/>
+                <a:ea typeface="HY엽서M" panose="02030600000101010101" pitchFamily="18" charset="-127"/>
+              </a:rPr>
+              <a:t> </a:t>
+            </a:r>
+            <a:r>
+              <a:rPr lang="en-US" altLang="ko-KR" sz="1000" dirty="0">
+                <a:latin typeface="HY엽서M" panose="02030600000101010101" pitchFamily="18" charset="-127"/>
+                <a:ea typeface="HY엽서M" panose="02030600000101010101" pitchFamily="18" charset="-127"/>
+              </a:rPr>
+              <a:t>:                  / </a:t>
+            </a:r>
+            <a:r>
+              <a:rPr lang="ko-KR" altLang="en-US" sz="1000" dirty="0" err="1">
+                <a:latin typeface="HY엽서M" panose="02030600000101010101" pitchFamily="18" charset="-127"/>
+                <a:ea typeface="HY엽서M" panose="02030600000101010101" pitchFamily="18" charset="-127"/>
+              </a:rPr>
+              <a:t>암통원비</a:t>
+            </a:r>
+            <a:r>
+              <a:rPr lang="ko-KR" altLang="en-US" sz="1000" dirty="0">
+                <a:latin typeface="HY엽서M" panose="02030600000101010101" pitchFamily="18" charset="-127"/>
+                <a:ea typeface="HY엽서M" panose="02030600000101010101" pitchFamily="18" charset="-127"/>
+              </a:rPr>
+              <a:t> </a:t>
+            </a:r>
+            <a:r>
+              <a:rPr lang="en-US" altLang="ko-KR" sz="1000" dirty="0">
                 <a:latin typeface="HY엽서M" panose="02030600000101010101" pitchFamily="18" charset="-127"/>
                 <a:ea typeface="HY엽서M" panose="02030600000101010101" pitchFamily="18" charset="-127"/>
               </a:rPr>
@@ -6755,141 +6937,14 @@
           </a:p>
           <a:p>
             <a:r>
-              <a:rPr lang="ko-KR" altLang="en-US" sz="1200" dirty="0" err="1">
-                <a:latin typeface="HY엽서M" panose="02030600000101010101" pitchFamily="18" charset="-127"/>
-                <a:ea typeface="HY엽서M" panose="02030600000101010101" pitchFamily="18" charset="-127"/>
-              </a:rPr>
-              <a:t>중입자</a:t>
-            </a:r>
-            <a:r>
-              <a:rPr lang="ko-KR" altLang="en-US" sz="1200" dirty="0">
-                <a:latin typeface="HY엽서M" panose="02030600000101010101" pitchFamily="18" charset="-127"/>
-                <a:ea typeface="HY엽서M" panose="02030600000101010101" pitchFamily="18" charset="-127"/>
-              </a:rPr>
-              <a:t> </a:t>
-            </a:r>
-            <a:r>
-              <a:rPr lang="en-US" altLang="ko-KR" sz="1200">
-                <a:latin typeface="HY엽서M" panose="02030600000101010101" pitchFamily="18" charset="-127"/>
-                <a:ea typeface="HY엽서M" panose="02030600000101010101" pitchFamily="18" charset="-127"/>
-              </a:rPr>
-              <a:t>: </a:t>
-            </a:r>
-          </a:p>
-          <a:p>
-            <a:r>
-              <a:rPr lang="ko-KR" altLang="en-US" sz="1200" dirty="0">
-                <a:latin typeface="HY엽서M" panose="02030600000101010101" pitchFamily="18" charset="-127"/>
-                <a:ea typeface="HY엽서M" panose="02030600000101010101" pitchFamily="18" charset="-127"/>
-              </a:rPr>
-              <a:t>항암치료 </a:t>
-            </a:r>
-            <a:r>
-              <a:rPr lang="en-US" altLang="ko-KR" sz="1200" dirty="0">
-                <a:latin typeface="HY엽서M" panose="02030600000101010101" pitchFamily="18" charset="-127"/>
-                <a:ea typeface="HY엽서M" panose="02030600000101010101" pitchFamily="18" charset="-127"/>
-              </a:rPr>
-              <a:t>:               / </a:t>
-            </a:r>
-            <a:r>
-              <a:rPr lang="ko-KR" altLang="en-US" sz="1050" dirty="0" err="1">
-                <a:latin typeface="HY엽서M" panose="02030600000101010101" pitchFamily="18" charset="-127"/>
-                <a:ea typeface="HY엽서M" panose="02030600000101010101" pitchFamily="18" charset="-127"/>
-              </a:rPr>
-              <a:t>전이암항암치료</a:t>
-            </a:r>
-            <a:r>
-              <a:rPr lang="ko-KR" altLang="en-US" sz="1050" dirty="0">
-                <a:latin typeface="HY엽서M" panose="02030600000101010101" pitchFamily="18" charset="-127"/>
-                <a:ea typeface="HY엽서M" panose="02030600000101010101" pitchFamily="18" charset="-127"/>
-              </a:rPr>
-              <a:t> </a:t>
-            </a:r>
-            <a:r>
-              <a:rPr lang="en-US" altLang="ko-KR" sz="1200" dirty="0">
-                <a:latin typeface="HY엽서M" panose="02030600000101010101" pitchFamily="18" charset="-127"/>
-                <a:ea typeface="HY엽서M" panose="02030600000101010101" pitchFamily="18" charset="-127"/>
-              </a:rPr>
-              <a:t>:</a:t>
-            </a:r>
-          </a:p>
-          <a:p>
-            <a:r>
-              <a:rPr lang="ko-KR" altLang="en-US" sz="1200" dirty="0">
-                <a:latin typeface="HY엽서M" panose="02030600000101010101" pitchFamily="18" charset="-127"/>
-                <a:ea typeface="HY엽서M" panose="02030600000101010101" pitchFamily="18" charset="-127"/>
-              </a:rPr>
-              <a:t>표적치료</a:t>
-            </a:r>
-            <a:r>
-              <a:rPr lang="en-US" altLang="ko-KR" sz="1200" dirty="0">
-                <a:latin typeface="HY엽서M" panose="02030600000101010101" pitchFamily="18" charset="-127"/>
-                <a:ea typeface="HY엽서M" panose="02030600000101010101" pitchFamily="18" charset="-127"/>
-              </a:rPr>
-              <a:t>:                / </a:t>
-            </a:r>
-            <a:r>
-              <a:rPr lang="ko-KR" altLang="en-US" sz="1200" dirty="0">
-                <a:latin typeface="HY엽서M" panose="02030600000101010101" pitchFamily="18" charset="-127"/>
-                <a:ea typeface="HY엽서M" panose="02030600000101010101" pitchFamily="18" charset="-127"/>
-              </a:rPr>
-              <a:t>양성자</a:t>
-            </a:r>
-            <a:r>
-              <a:rPr lang="en-US" altLang="ko-KR" sz="1200" dirty="0">
-                <a:latin typeface="HY엽서M" panose="02030600000101010101" pitchFamily="18" charset="-127"/>
-                <a:ea typeface="HY엽서M" panose="02030600000101010101" pitchFamily="18" charset="-127"/>
-              </a:rPr>
-              <a:t>.</a:t>
-            </a:r>
-            <a:r>
-              <a:rPr lang="ko-KR" altLang="en-US" sz="1200" dirty="0">
-                <a:latin typeface="HY엽서M" panose="02030600000101010101" pitchFamily="18" charset="-127"/>
-                <a:ea typeface="HY엽서M" panose="02030600000101010101" pitchFamily="18" charset="-127"/>
-              </a:rPr>
-              <a:t>세기 </a:t>
-            </a:r>
-            <a:r>
-              <a:rPr lang="en-US" altLang="ko-KR" sz="1200" dirty="0">
-                <a:latin typeface="HY엽서M" panose="02030600000101010101" pitchFamily="18" charset="-127"/>
-                <a:ea typeface="HY엽서M" panose="02030600000101010101" pitchFamily="18" charset="-127"/>
-              </a:rPr>
-              <a:t>:</a:t>
-            </a:r>
-          </a:p>
-          <a:p>
-            <a:r>
-              <a:rPr lang="ko-KR" altLang="en-US" sz="1200" dirty="0" err="1">
-                <a:latin typeface="HY엽서M" panose="02030600000101010101" pitchFamily="18" charset="-127"/>
-                <a:ea typeface="HY엽서M" panose="02030600000101010101" pitchFamily="18" charset="-127"/>
-              </a:rPr>
-              <a:t>암통원비</a:t>
-            </a:r>
-            <a:r>
-              <a:rPr lang="ko-KR" altLang="en-US" sz="1200" dirty="0">
-                <a:latin typeface="HY엽서M" panose="02030600000101010101" pitchFamily="18" charset="-127"/>
-                <a:ea typeface="HY엽서M" panose="02030600000101010101" pitchFamily="18" charset="-127"/>
-              </a:rPr>
-              <a:t> </a:t>
-            </a:r>
-            <a:r>
-              <a:rPr lang="en-US" altLang="ko-KR" sz="1200" dirty="0">
-                <a:latin typeface="HY엽서M" panose="02030600000101010101" pitchFamily="18" charset="-127"/>
-                <a:ea typeface="HY엽서M" panose="02030600000101010101" pitchFamily="18" charset="-127"/>
-              </a:rPr>
-              <a:t>: </a:t>
-            </a:r>
-          </a:p>
-          <a:p>
-            <a:r>
-              <a:rPr lang="ko-KR" altLang="en-US" sz="1200" dirty="0">
+              <a:rPr lang="ko-KR" altLang="en-US" sz="1000" dirty="0">
                 <a:latin typeface="HY엽서M" panose="02030600000101010101" pitchFamily="18" charset="-127"/>
                 <a:ea typeface="HY엽서M" panose="02030600000101010101" pitchFamily="18" charset="-127"/>
               </a:rPr>
               <a:t>다빈치로봇수술비 </a:t>
             </a:r>
             <a:r>
-              <a:rPr lang="en-US" altLang="ko-KR" sz="1200" dirty="0">
+              <a:rPr lang="en-US" altLang="ko-KR" sz="1000" dirty="0">
                 <a:latin typeface="HY엽서M" panose="02030600000101010101" pitchFamily="18" charset="-127"/>
                 <a:ea typeface="HY엽서M" panose="02030600000101010101" pitchFamily="18" charset="-127"/>
               </a:rPr>
@@ -6912,8 +6967,8 @@
         </p:nvSpPr>
         <p:spPr>
           <a:xfrm>
-            <a:off x="109959" y="5649932"/>
-            <a:ext cx="1621742" cy="1938992"/>
+            <a:off x="84596" y="5551547"/>
+            <a:ext cx="1694695" cy="1962076"/>
           </a:xfrm>
           <a:prstGeom prst="rect">
             <a:avLst/>
@@ -6924,20 +6979,20 @@
           </a:ln>
         </p:spPr>
         <p:txBody>
-          <a:bodyPr wrap="square" rtlCol="0">
+          <a:bodyPr wrap="none" rtlCol="0">
             <a:spAutoFit/>
           </a:bodyPr>
           <a:lstStyle/>
           <a:p>
             <a:r>
-              <a:rPr lang="ko-KR" altLang="en-US" sz="1200" dirty="0">
+              <a:rPr lang="ko-KR" altLang="en-US" sz="1000" dirty="0">
                 <a:latin typeface="HY엽서M" panose="02030600000101010101" pitchFamily="18" charset="-127"/>
                 <a:ea typeface="HY엽서M" panose="02030600000101010101" pitchFamily="18" charset="-127"/>
               </a:rPr>
               <a:t>질병수술 </a:t>
             </a:r>
             <a:r>
-              <a:rPr lang="en-US" altLang="ko-KR" sz="1200" dirty="0">
+              <a:rPr lang="en-US" altLang="ko-KR" sz="1000" dirty="0">
                 <a:latin typeface="HY엽서M" panose="02030600000101010101" pitchFamily="18" charset="-127"/>
                 <a:ea typeface="HY엽서M" panose="02030600000101010101" pitchFamily="18" charset="-127"/>
               </a:rPr>
@@ -6946,14 +7001,14 @@
           </a:p>
           <a:p>
             <a:r>
-              <a:rPr lang="ko-KR" altLang="en-US" sz="1200" dirty="0">
+              <a:rPr lang="ko-KR" altLang="en-US" sz="1000" dirty="0">
                 <a:latin typeface="HY엽서M" panose="02030600000101010101" pitchFamily="18" charset="-127"/>
                 <a:ea typeface="HY엽서M" panose="02030600000101010101" pitchFamily="18" charset="-127"/>
               </a:rPr>
               <a:t>종합병원수술</a:t>
             </a:r>
             <a:r>
-              <a:rPr lang="en-US" altLang="ko-KR" sz="1200" dirty="0">
+              <a:rPr lang="en-US" altLang="ko-KR" sz="1000" dirty="0">
                 <a:latin typeface="HY엽서M" panose="02030600000101010101" pitchFamily="18" charset="-127"/>
                 <a:ea typeface="HY엽서M" panose="02030600000101010101" pitchFamily="18" charset="-127"/>
               </a:rPr>
@@ -6962,64 +7017,96 @@
           </a:p>
           <a:p>
             <a:r>
-              <a:rPr lang="en-US" altLang="ko-KR" sz="890" dirty="0">
+              <a:rPr lang="en-US" altLang="ko-KR" sz="1050" dirty="0">
+                <a:latin typeface="HY엽서M" panose="02030600000101010101" pitchFamily="18" charset="-127"/>
+                <a:ea typeface="HY엽서M" panose="02030600000101010101" pitchFamily="18" charset="-127"/>
+              </a:rPr>
+              <a:t>1~3</a:t>
+            </a:r>
+            <a:r>
+              <a:rPr lang="ko-KR" altLang="en-US" sz="1050" dirty="0">
+                <a:latin typeface="HY엽서M" panose="02030600000101010101" pitchFamily="18" charset="-127"/>
+                <a:ea typeface="HY엽서M" panose="02030600000101010101" pitchFamily="18" charset="-127"/>
+              </a:rPr>
+              <a:t>종수술비 </a:t>
+            </a:r>
+            <a:r>
+              <a:rPr lang="en-US" altLang="ko-KR" sz="1050" dirty="0">
+                <a:latin typeface="HY엽서M" panose="02030600000101010101" pitchFamily="18" charset="-127"/>
+                <a:ea typeface="HY엽서M" panose="02030600000101010101" pitchFamily="18" charset="-127"/>
+              </a:rPr>
+              <a:t>:</a:t>
+            </a:r>
+          </a:p>
+          <a:p>
+            <a:r>
+              <a:rPr lang="en-US" altLang="ko-KR" sz="1050" dirty="0">
                 <a:latin typeface="HY엽서M" panose="02030600000101010101" pitchFamily="18" charset="-127"/>
                 <a:ea typeface="HY엽서M" panose="02030600000101010101" pitchFamily="18" charset="-127"/>
               </a:rPr>
               <a:t>1~5</a:t>
             </a:r>
             <a:r>
-              <a:rPr lang="ko-KR" altLang="en-US" sz="890" dirty="0">
+              <a:rPr lang="ko-KR" altLang="en-US" sz="1050" dirty="0">
                 <a:latin typeface="HY엽서M" panose="02030600000101010101" pitchFamily="18" charset="-127"/>
                 <a:ea typeface="HY엽서M" panose="02030600000101010101" pitchFamily="18" charset="-127"/>
               </a:rPr>
               <a:t>종 수술비</a:t>
             </a:r>
-            <a:endParaRPr lang="en-US" altLang="ko-KR" sz="1200" dirty="0">
+            <a:endParaRPr lang="en-US" altLang="ko-KR" sz="1400" dirty="0">
               <a:latin typeface="HY엽서M" panose="02030600000101010101" pitchFamily="18" charset="-127"/>
               <a:ea typeface="HY엽서M" panose="02030600000101010101" pitchFamily="18" charset="-127"/>
             </a:endParaRPr>
           </a:p>
           <a:p>
             <a:r>
-              <a:rPr lang="en-US" altLang="ko-KR" sz="890" dirty="0">
-                <a:latin typeface="HY엽서M" panose="02030600000101010101" pitchFamily="18" charset="-127"/>
-                <a:ea typeface="HY엽서M" panose="02030600000101010101" pitchFamily="18" charset="-127"/>
-              </a:rPr>
-              <a:t>(      /      /      /      / </a:t>
-            </a:r>
-            <a:r>
-              <a:rPr lang="en-US" altLang="ko-KR" sz="890" dirty="0">
-                <a:latin typeface="HY엽서M" panose="02030600000101010101" pitchFamily="18" charset="-127"/>
-                <a:ea typeface="HY엽서M" panose="02030600000101010101" pitchFamily="18" charset="-127"/>
-              </a:rPr>
-              <a:t>     </a:t>
-            </a:r>
-            <a:r>
-              <a:rPr lang="en-US" altLang="ko-KR" sz="890" dirty="0">
-                <a:latin typeface="HY엽서M" panose="02030600000101010101" pitchFamily="18" charset="-127"/>
-                <a:ea typeface="HY엽서M" panose="02030600000101010101" pitchFamily="18" charset="-127"/>
-              </a:rPr>
-              <a:t>)</a:t>
-            </a:r>
-          </a:p>
-          <a:p>
-            <a:r>
-              <a:rPr lang="en-US" altLang="ko-KR" sz="1200" dirty="0">
+              <a:rPr lang="en-US" altLang="ko-KR" sz="1000" dirty="0">
+                <a:latin typeface="HY엽서M" panose="02030600000101010101" pitchFamily="18" charset="-127"/>
+                <a:ea typeface="HY엽서M" panose="02030600000101010101" pitchFamily="18" charset="-127"/>
+              </a:rPr>
+              <a:t>(     /     /      /     /     )</a:t>
+            </a:r>
+          </a:p>
+          <a:p>
+            <a:r>
+              <a:rPr lang="en-US" altLang="ko-KR" sz="1050" dirty="0">
+                <a:latin typeface="HY엽서M" panose="02030600000101010101" pitchFamily="18" charset="-127"/>
+                <a:ea typeface="HY엽서M" panose="02030600000101010101" pitchFamily="18" charset="-127"/>
+              </a:rPr>
+              <a:t>1~7</a:t>
+            </a:r>
+            <a:r>
+              <a:rPr lang="ko-KR" altLang="en-US" sz="1050" dirty="0">
+                <a:latin typeface="HY엽서M" panose="02030600000101010101" pitchFamily="18" charset="-127"/>
+                <a:ea typeface="HY엽서M" panose="02030600000101010101" pitchFamily="18" charset="-127"/>
+              </a:rPr>
+              <a:t>종 수술비 </a:t>
+            </a:r>
+            <a:r>
+              <a:rPr lang="en-US" altLang="ko-KR" sz="1050" dirty="0">
+                <a:latin typeface="HY엽서M" panose="02030600000101010101" pitchFamily="18" charset="-127"/>
+                <a:ea typeface="HY엽서M" panose="02030600000101010101" pitchFamily="18" charset="-127"/>
+              </a:rPr>
+              <a:t>:</a:t>
+            </a:r>
+          </a:p>
+          <a:p>
+            <a:r>
+              <a:rPr lang="en-US" altLang="ko-KR" sz="1000" dirty="0">
                 <a:latin typeface="HY엽서M" panose="02030600000101010101" pitchFamily="18" charset="-127"/>
                 <a:ea typeface="HY엽서M" panose="02030600000101010101" pitchFamily="18" charset="-127"/>
               </a:rPr>
               <a:t>_____</a:t>
             </a:r>
             <a:r>
-              <a:rPr lang="ko-KR" altLang="en-US" sz="1200" dirty="0">
+              <a:rPr lang="ko-KR" altLang="en-US" sz="1000" dirty="0">
                 <a:latin typeface="HY엽서M" panose="02030600000101010101" pitchFamily="18" charset="-127"/>
                 <a:ea typeface="HY엽서M" panose="02030600000101010101" pitchFamily="18" charset="-127"/>
               </a:rPr>
               <a:t>대 수술 </a:t>
             </a:r>
             <a:r>
-              <a:rPr lang="en-US" altLang="ko-KR" sz="1200" dirty="0">
+              <a:rPr lang="en-US" altLang="ko-KR" sz="1000" dirty="0">
                 <a:latin typeface="HY엽서M" panose="02030600000101010101" pitchFamily="18" charset="-127"/>
                 <a:ea typeface="HY엽서M" panose="02030600000101010101" pitchFamily="18" charset="-127"/>
               </a:rPr>
@@ -7028,14 +7115,14 @@
           </a:p>
           <a:p>
             <a:r>
-              <a:rPr lang="ko-KR" altLang="en-US" sz="1200" dirty="0">
+              <a:rPr lang="ko-KR" altLang="en-US" sz="1000" dirty="0">
                 <a:latin typeface="HY엽서M" panose="02030600000101010101" pitchFamily="18" charset="-127"/>
                 <a:ea typeface="HY엽서M" panose="02030600000101010101" pitchFamily="18" charset="-127"/>
               </a:rPr>
               <a:t>뇌혈관수술 </a:t>
             </a:r>
             <a:r>
-              <a:rPr lang="en-US" altLang="ko-KR" sz="1200" dirty="0">
+              <a:rPr lang="en-US" altLang="ko-KR" sz="1000" dirty="0">
                 <a:latin typeface="HY엽서M" panose="02030600000101010101" pitchFamily="18" charset="-127"/>
                 <a:ea typeface="HY엽서M" panose="02030600000101010101" pitchFamily="18" charset="-127"/>
               </a:rPr>
@@ -7044,21 +7131,21 @@
           </a:p>
           <a:p>
             <a:r>
-              <a:rPr lang="ko-KR" altLang="en-US" sz="1200" dirty="0" err="1">
+              <a:rPr lang="ko-KR" altLang="en-US" sz="1000" dirty="0" err="1">
                 <a:latin typeface="HY엽서M" panose="02030600000101010101" pitchFamily="18" charset="-127"/>
                 <a:ea typeface="HY엽서M" panose="02030600000101010101" pitchFamily="18" charset="-127"/>
               </a:rPr>
               <a:t>허혈성수술</a:t>
             </a:r>
             <a:r>
-              <a:rPr lang="ko-KR" altLang="en-US" sz="1200" dirty="0">
+              <a:rPr lang="ko-KR" altLang="en-US" sz="1000" dirty="0">
                 <a:latin typeface="HY엽서M" panose="02030600000101010101" pitchFamily="18" charset="-127"/>
                 <a:ea typeface="HY엽서M" panose="02030600000101010101" pitchFamily="18" charset="-127"/>
               </a:rPr>
               <a:t> </a:t>
             </a:r>
             <a:r>
-              <a:rPr lang="en-US" altLang="ko-KR" sz="1200" dirty="0">
+              <a:rPr lang="en-US" altLang="ko-KR" sz="1000" dirty="0">
                 <a:latin typeface="HY엽서M" panose="02030600000101010101" pitchFamily="18" charset="-127"/>
                 <a:ea typeface="HY엽서M" panose="02030600000101010101" pitchFamily="18" charset="-127"/>
               </a:rPr>
@@ -7067,14 +7154,14 @@
           </a:p>
           <a:p>
             <a:r>
-              <a:rPr lang="ko-KR" altLang="en-US" sz="1200" dirty="0">
+              <a:rPr lang="ko-KR" altLang="en-US" sz="1000" dirty="0">
                 <a:latin typeface="HY엽서M" panose="02030600000101010101" pitchFamily="18" charset="-127"/>
                 <a:ea typeface="HY엽서M" panose="02030600000101010101" pitchFamily="18" charset="-127"/>
               </a:rPr>
               <a:t>심장 수술 </a:t>
             </a:r>
             <a:r>
-              <a:rPr lang="en-US" altLang="ko-KR" sz="1200" dirty="0">
+              <a:rPr lang="en-US" altLang="ko-KR" sz="1000" dirty="0">
                 <a:latin typeface="HY엽서M" panose="02030600000101010101" pitchFamily="18" charset="-127"/>
                 <a:ea typeface="HY엽서M" panose="02030600000101010101" pitchFamily="18" charset="-127"/>
               </a:rPr>
@@ -7083,21 +7170,21 @@
           </a:p>
           <a:p>
             <a:r>
-              <a:rPr lang="en-US" altLang="ko-KR" sz="1200" dirty="0">
+              <a:rPr lang="en-US" altLang="ko-KR" sz="1000" dirty="0">
                 <a:latin typeface="HY엽서M" panose="02030600000101010101" pitchFamily="18" charset="-127"/>
                 <a:ea typeface="HY엽서M" panose="02030600000101010101" pitchFamily="18" charset="-127"/>
               </a:rPr>
               <a:t>5</a:t>
             </a:r>
             <a:r>
-              <a:rPr lang="ko-KR" altLang="en-US" sz="1200" dirty="0">
+              <a:rPr lang="ko-KR" altLang="en-US" sz="1000" dirty="0">
                 <a:latin typeface="HY엽서M" panose="02030600000101010101" pitchFamily="18" charset="-127"/>
                 <a:ea typeface="HY엽서M" panose="02030600000101010101" pitchFamily="18" charset="-127"/>
               </a:rPr>
               <a:t>대기관수술 </a:t>
             </a:r>
             <a:r>
-              <a:rPr lang="en-US" altLang="ko-KR" sz="1200" dirty="0">
+              <a:rPr lang="en-US" altLang="ko-KR" sz="1000" dirty="0">
                 <a:latin typeface="HY엽서M" panose="02030600000101010101" pitchFamily="18" charset="-127"/>
                 <a:ea typeface="HY엽서M" panose="02030600000101010101" pitchFamily="18" charset="-127"/>
               </a:rPr>
@@ -7106,48 +7193,25 @@
           </a:p>
           <a:p>
             <a:r>
-              <a:rPr lang="en-US" altLang="ko-KR" sz="1200" dirty="0">
+              <a:rPr lang="en-US" altLang="ko-KR" sz="1000" dirty="0">
                 <a:latin typeface="HY엽서M" panose="02030600000101010101" pitchFamily="18" charset="-127"/>
                 <a:ea typeface="HY엽서M" panose="02030600000101010101" pitchFamily="18" charset="-127"/>
               </a:rPr>
               <a:t>_____</a:t>
             </a:r>
             <a:r>
-              <a:rPr lang="ko-KR" altLang="en-US" sz="1200" dirty="0">
+              <a:rPr lang="ko-KR" altLang="en-US" sz="1000" dirty="0">
                 <a:latin typeface="HY엽서M" panose="02030600000101010101" pitchFamily="18" charset="-127"/>
                 <a:ea typeface="HY엽서M" panose="02030600000101010101" pitchFamily="18" charset="-127"/>
               </a:rPr>
               <a:t>대 수술 </a:t>
             </a:r>
             <a:r>
-              <a:rPr lang="en-US" altLang="ko-KR" sz="1200" dirty="0">
+              <a:rPr lang="en-US" altLang="ko-KR" sz="1000" dirty="0">
                 <a:latin typeface="HY엽서M" panose="02030600000101010101" pitchFamily="18" charset="-127"/>
                 <a:ea typeface="HY엽서M" panose="02030600000101010101" pitchFamily="18" charset="-127"/>
               </a:rPr>
               <a:t>: </a:t>
-            </a:r>
-          </a:p>
-          <a:p>
-            <a:r>
-              <a:rPr lang="en-US" altLang="ko-KR" sz="1200" dirty="0">
-                <a:latin typeface="HY엽서M" panose="02030600000101010101" pitchFamily="18" charset="-127"/>
-                <a:ea typeface="HY엽서M" panose="02030600000101010101" pitchFamily="18" charset="-127"/>
-              </a:rPr>
-              <a:t>______</a:t>
-            </a:r>
-            <a:r>
-              <a:rPr lang="ko-KR" altLang="en-US" sz="1200" dirty="0">
-                <a:latin typeface="HY엽서M" panose="02030600000101010101" pitchFamily="18" charset="-127"/>
-                <a:ea typeface="HY엽서M" panose="02030600000101010101" pitchFamily="18" charset="-127"/>
-              </a:rPr>
-              <a:t>수술 </a:t>
-            </a:r>
-            <a:r>
-              <a:rPr lang="en-US" altLang="ko-KR" sz="1200" dirty="0">
-                <a:latin typeface="HY엽서M" panose="02030600000101010101" pitchFamily="18" charset="-127"/>
-                <a:ea typeface="HY엽서M" panose="02030600000101010101" pitchFamily="18" charset="-127"/>
-              </a:rPr>
-              <a:t>:</a:t>
             </a:r>
             <a:endParaRPr lang="ko-KR" altLang="en-US" sz="1050" dirty="0">
               <a:latin typeface="HY엽서M" panose="02030600000101010101" pitchFamily="18" charset="-127"/>
@@ -7170,8 +7234,8 @@
         </p:nvSpPr>
         <p:spPr>
           <a:xfrm>
-            <a:off x="1729621" y="5691134"/>
-            <a:ext cx="1621742" cy="1792798"/>
+            <a:off x="1798588" y="5674197"/>
+            <a:ext cx="1685077" cy="1923604"/>
           </a:xfrm>
           <a:prstGeom prst="rect">
             <a:avLst/>
@@ -7182,20 +7246,62 @@
           </a:ln>
         </p:spPr>
         <p:txBody>
-          <a:bodyPr wrap="square" rtlCol="0">
+          <a:bodyPr wrap="none" rtlCol="0">
             <a:spAutoFit/>
           </a:bodyPr>
           <a:lstStyle/>
           <a:p>
             <a:r>
-              <a:rPr lang="ko-KR" altLang="en-US" sz="1200" dirty="0">
+              <a:rPr lang="ko-KR" altLang="en-US" sz="1000" dirty="0">
                 <a:latin typeface="HY엽서M" panose="02030600000101010101" pitchFamily="18" charset="-127"/>
                 <a:ea typeface="HY엽서M" panose="02030600000101010101" pitchFamily="18" charset="-127"/>
               </a:rPr>
               <a:t>상해수술 </a:t>
             </a:r>
             <a:r>
-              <a:rPr lang="en-US" altLang="ko-KR" sz="1200" dirty="0">
+              <a:rPr lang="en-US" altLang="ko-KR" sz="1000" dirty="0">
+                <a:solidFill>
+                  <a:srgbClr val="000000"/>
+                </a:solidFill>
+                <a:latin typeface="HY엽서M" panose="02030600000101010101" pitchFamily="18" charset="-127"/>
+                <a:ea typeface="HY엽서M" panose="02030600000101010101" pitchFamily="18" charset="-127"/>
+              </a:rPr>
+              <a:t>: 200</a:t>
+            </a:r>
+          </a:p>
+          <a:p>
+            <a:r>
+              <a:rPr lang="ko-KR" altLang="en-US" sz="1000" dirty="0">
+                <a:latin typeface="HY엽서M" panose="02030600000101010101" pitchFamily="18" charset="-127"/>
+                <a:ea typeface="HY엽서M" panose="02030600000101010101" pitchFamily="18" charset="-127"/>
+              </a:rPr>
+              <a:t>종합병원수술 </a:t>
+            </a:r>
+            <a:r>
+              <a:rPr lang="en-US" altLang="ko-KR" sz="1000" dirty="0">
+                <a:latin typeface="HY엽서M" panose="02030600000101010101" pitchFamily="18" charset="-127"/>
+                <a:ea typeface="HY엽서M" panose="02030600000101010101" pitchFamily="18" charset="-127"/>
+              </a:rPr>
+              <a:t>: </a:t>
+            </a:r>
+          </a:p>
+          <a:p>
+            <a:r>
+              <a:rPr lang="en-US" altLang="ko-KR" sz="1000" dirty="0">
+                <a:latin typeface="HY엽서M" panose="02030600000101010101" pitchFamily="18" charset="-127"/>
+                <a:ea typeface="HY엽서M" panose="02030600000101010101" pitchFamily="18" charset="-127"/>
+              </a:rPr>
+              <a:t>1~3</a:t>
+            </a:r>
+            <a:r>
+              <a:rPr lang="ko-KR" altLang="en-US" sz="1000" dirty="0">
+                <a:latin typeface="HY엽서M" panose="02030600000101010101" pitchFamily="18" charset="-127"/>
+                <a:ea typeface="HY엽서M" panose="02030600000101010101" pitchFamily="18" charset="-127"/>
+              </a:rPr>
+              <a:t>종수술비 </a:t>
+            </a:r>
+            <a:r>
+              <a:rPr lang="en-US" altLang="ko-KR" sz="1000" dirty="0">
                 <a:latin typeface="HY엽서M" panose="02030600000101010101" pitchFamily="18" charset="-127"/>
                 <a:ea typeface="HY엽서M" panose="02030600000101010101" pitchFamily="18" charset="-127"/>
               </a:rPr>
@@ -7204,30 +7310,14 @@
           </a:p>
           <a:p>
             <a:r>
-              <a:rPr lang="ko-KR" altLang="en-US" sz="1200" dirty="0">
-                <a:latin typeface="HY엽서M" panose="02030600000101010101" pitchFamily="18" charset="-127"/>
-                <a:ea typeface="HY엽서M" panose="02030600000101010101" pitchFamily="18" charset="-127"/>
-              </a:rPr>
-              <a:t>종합병원수술 </a:t>
-            </a:r>
-            <a:r>
-              <a:rPr lang="en-US" altLang="ko-KR" sz="1200" dirty="0">
-                <a:latin typeface="HY엽서M" panose="02030600000101010101" pitchFamily="18" charset="-127"/>
-                <a:ea typeface="HY엽서M" panose="02030600000101010101" pitchFamily="18" charset="-127"/>
-              </a:rPr>
-              <a:t>:  </a:t>
-            </a:r>
-          </a:p>
-          <a:p>
-            <a:r>
-              <a:rPr lang="en-US" altLang="ko-KR" sz="890" dirty="0">
+              <a:rPr lang="en-US" altLang="ko-KR" sz="1000" dirty="0">
                 <a:latin typeface="HY엽서M" panose="02030600000101010101" pitchFamily="18" charset="-127"/>
                 <a:ea typeface="HY엽서M" panose="02030600000101010101" pitchFamily="18" charset="-127"/>
               </a:rPr>
               <a:t>1~5</a:t>
             </a:r>
             <a:r>
-              <a:rPr lang="ko-KR" altLang="en-US" sz="890" dirty="0">
+              <a:rPr lang="ko-KR" altLang="en-US" sz="1000" dirty="0">
                 <a:latin typeface="HY엽서M" panose="02030600000101010101" pitchFamily="18" charset="-127"/>
                 <a:ea typeface="HY엽서M" panose="02030600000101010101" pitchFamily="18" charset="-127"/>
               </a:rPr>
@@ -7240,37 +7330,117 @@
           </a:p>
           <a:p>
             <a:r>
-              <a:rPr lang="en-US" altLang="ko-KR" sz="890" dirty="0">
-                <a:latin typeface="HY엽서M" panose="02030600000101010101" pitchFamily="18" charset="-127"/>
-                <a:ea typeface="HY엽서M" panose="02030600000101010101" pitchFamily="18" charset="-127"/>
-              </a:rPr>
-              <a:t>(      /      /      /      / </a:t>
-            </a:r>
-            <a:r>
-              <a:rPr lang="en-US" altLang="ko-KR" sz="890" dirty="0">
-                <a:latin typeface="HY엽서M" panose="02030600000101010101" pitchFamily="18" charset="-127"/>
-                <a:ea typeface="HY엽서M" panose="02030600000101010101" pitchFamily="18" charset="-127"/>
-              </a:rPr>
-              <a:t>     </a:t>
-            </a:r>
-            <a:r>
-              <a:rPr lang="en-US" altLang="ko-KR" sz="890" dirty="0">
-                <a:latin typeface="HY엽서M" panose="02030600000101010101" pitchFamily="18" charset="-127"/>
-                <a:ea typeface="HY엽서M" panose="02030600000101010101" pitchFamily="18" charset="-127"/>
-              </a:rPr>
-              <a:t>)</a:t>
-            </a:r>
-          </a:p>
-          <a:p>
-            <a:r>
-              <a:rPr lang="ko-KR" altLang="en-US" sz="1200" dirty="0">
+              <a:rPr lang="en-US" altLang="ko-KR" sz="900" dirty="0">
+                <a:latin typeface="HY엽서M" panose="02030600000101010101" pitchFamily="18" charset="-127"/>
+                <a:ea typeface="HY엽서M" panose="02030600000101010101" pitchFamily="18" charset="-127"/>
+              </a:rPr>
+              <a:t>(      /      /      /      /      )</a:t>
+            </a:r>
+          </a:p>
+          <a:p>
+            <a:r>
+              <a:rPr lang="en-US" altLang="ko-KR" sz="1000" dirty="0">
+                <a:latin typeface="HY엽서M" panose="02030600000101010101" pitchFamily="18" charset="-127"/>
+                <a:ea typeface="HY엽서M" panose="02030600000101010101" pitchFamily="18" charset="-127"/>
+              </a:rPr>
+              <a:t>1~7</a:t>
+            </a:r>
+            <a:r>
+              <a:rPr lang="ko-KR" altLang="en-US" sz="1000" dirty="0">
+                <a:latin typeface="HY엽서M" panose="02030600000101010101" pitchFamily="18" charset="-127"/>
+                <a:ea typeface="HY엽서M" panose="02030600000101010101" pitchFamily="18" charset="-127"/>
+              </a:rPr>
+              <a:t>종 수술비 </a:t>
+            </a:r>
+            <a:r>
+              <a:rPr lang="en-US" altLang="ko-KR" sz="1000" dirty="0">
+                <a:latin typeface="HY엽서M" panose="02030600000101010101" pitchFamily="18" charset="-127"/>
+                <a:ea typeface="HY엽서M" panose="02030600000101010101" pitchFamily="18" charset="-127"/>
+              </a:rPr>
+              <a:t>:</a:t>
+            </a:r>
+          </a:p>
+          <a:p>
+            <a:r>
+              <a:rPr lang="ko-KR" altLang="en-US" sz="1000" dirty="0">
                 <a:latin typeface="HY엽서M" panose="02030600000101010101" pitchFamily="18" charset="-127"/>
                 <a:ea typeface="HY엽서M" panose="02030600000101010101" pitchFamily="18" charset="-127"/>
               </a:rPr>
               <a:t>골절수술 </a:t>
             </a:r>
             <a:r>
-              <a:rPr lang="en-US" altLang="ko-KR" sz="1200" dirty="0">
+              <a:rPr lang="en-US" altLang="ko-KR" sz="1000" dirty="0">
+                <a:solidFill>
+                  <a:srgbClr val="000000"/>
+                </a:solidFill>
+                <a:latin typeface="HY엽서M" panose="02030600000101010101" pitchFamily="18" charset="-127"/>
+                <a:ea typeface="HY엽서M" panose="02030600000101010101" pitchFamily="18" charset="-127"/>
+              </a:rPr>
+              <a:t>:</a:t>
+            </a:r>
+          </a:p>
+          <a:p>
+            <a:r>
+              <a:rPr lang="en-US" altLang="ko-KR" sz="1000" dirty="0">
+                <a:latin typeface="HY엽서M" panose="02030600000101010101" pitchFamily="18" charset="-127"/>
+                <a:ea typeface="HY엽서M" panose="02030600000101010101" pitchFamily="18" charset="-127"/>
+              </a:rPr>
+              <a:t>5</a:t>
+            </a:r>
+            <a:r>
+              <a:rPr lang="ko-KR" altLang="en-US" sz="1000" dirty="0" err="1">
+                <a:latin typeface="HY엽서M" panose="02030600000101010101" pitchFamily="18" charset="-127"/>
+                <a:ea typeface="HY엽서M" panose="02030600000101010101" pitchFamily="18" charset="-127"/>
+              </a:rPr>
+              <a:t>대골절수술</a:t>
+            </a:r>
+            <a:r>
+              <a:rPr lang="ko-KR" altLang="en-US" sz="1000" dirty="0">
+                <a:latin typeface="HY엽서M" panose="02030600000101010101" pitchFamily="18" charset="-127"/>
+                <a:ea typeface="HY엽서M" panose="02030600000101010101" pitchFamily="18" charset="-127"/>
+              </a:rPr>
+              <a:t> </a:t>
+            </a:r>
+            <a:r>
+              <a:rPr lang="en-US" altLang="ko-KR" sz="1000" dirty="0">
+                <a:solidFill>
+                  <a:srgbClr val="000000"/>
+                </a:solidFill>
+                <a:latin typeface="HY엽서M" panose="02030600000101010101" pitchFamily="18" charset="-127"/>
+                <a:ea typeface="HY엽서M" panose="02030600000101010101" pitchFamily="18" charset="-127"/>
+              </a:rPr>
+              <a:t>:</a:t>
+            </a:r>
+          </a:p>
+          <a:p>
+            <a:r>
+              <a:rPr lang="ko-KR" altLang="en-US" sz="1000" dirty="0">
+                <a:latin typeface="HY엽서M" panose="02030600000101010101" pitchFamily="18" charset="-127"/>
+                <a:ea typeface="HY엽서M" panose="02030600000101010101" pitchFamily="18" charset="-127"/>
+              </a:rPr>
+              <a:t>화상수술 </a:t>
+            </a:r>
+            <a:r>
+              <a:rPr lang="en-US" altLang="ko-KR" sz="1000" dirty="0">
+                <a:solidFill>
+                  <a:srgbClr val="000000"/>
+                </a:solidFill>
+                <a:latin typeface="HY엽서M" panose="02030600000101010101" pitchFamily="18" charset="-127"/>
+                <a:ea typeface="HY엽서M" panose="02030600000101010101" pitchFamily="18" charset="-127"/>
+              </a:rPr>
+              <a:t>:</a:t>
+            </a:r>
+          </a:p>
+          <a:p>
+            <a:r>
+              <a:rPr lang="ko-KR" altLang="en-US" sz="1000" dirty="0">
+                <a:latin typeface="HY엽서M" panose="02030600000101010101" pitchFamily="18" charset="-127"/>
+                <a:ea typeface="HY엽서M" panose="02030600000101010101" pitchFamily="18" charset="-127"/>
+              </a:rPr>
+              <a:t>중대상해수술 </a:t>
+            </a:r>
+            <a:r>
+              <a:rPr lang="en-US" altLang="ko-KR" sz="1000" dirty="0">
                 <a:latin typeface="HY엽서M" panose="02030600000101010101" pitchFamily="18" charset="-127"/>
                 <a:ea typeface="HY엽서M" panose="02030600000101010101" pitchFamily="18" charset="-127"/>
               </a:rPr>
@@ -7279,28 +7449,21 @@
           </a:p>
           <a:p>
             <a:r>
-              <a:rPr lang="en-US" altLang="ko-KR" sz="1200" dirty="0">
-                <a:latin typeface="HY엽서M" panose="02030600000101010101" pitchFamily="18" charset="-127"/>
-                <a:ea typeface="HY엽서M" panose="02030600000101010101" pitchFamily="18" charset="-127"/>
-              </a:rPr>
-              <a:t>5</a:t>
-            </a:r>
-            <a:r>
-              <a:rPr lang="ko-KR" altLang="en-US" sz="1200" dirty="0" err="1">
-                <a:latin typeface="HY엽서M" panose="02030600000101010101" pitchFamily="18" charset="-127"/>
-                <a:ea typeface="HY엽서M" panose="02030600000101010101" pitchFamily="18" charset="-127"/>
-              </a:rPr>
-              <a:t>대골절수술</a:t>
-            </a:r>
-            <a:r>
-              <a:rPr lang="ko-KR" altLang="en-US" sz="1200" dirty="0">
+              <a:rPr lang="ko-KR" altLang="en-US" sz="1000" dirty="0" err="1">
+                <a:latin typeface="HY엽서M" panose="02030600000101010101" pitchFamily="18" charset="-127"/>
+                <a:ea typeface="HY엽서M" panose="02030600000101010101" pitchFamily="18" charset="-127"/>
+              </a:rPr>
+              <a:t>창상봉합수술</a:t>
+            </a:r>
+            <a:r>
+              <a:rPr lang="ko-KR" altLang="en-US" sz="1000" dirty="0">
                 <a:latin typeface="HY엽서M" panose="02030600000101010101" pitchFamily="18" charset="-127"/>
                 <a:ea typeface="HY엽서M" panose="02030600000101010101" pitchFamily="18" charset="-127"/>
               </a:rPr>
               <a:t> </a:t>
             </a:r>
             <a:r>
-              <a:rPr lang="en-US" altLang="ko-KR" sz="1200" dirty="0">
+              <a:rPr lang="en-US" altLang="ko-KR" sz="1000" dirty="0">
                 <a:latin typeface="HY엽서M" panose="02030600000101010101" pitchFamily="18" charset="-127"/>
                 <a:ea typeface="HY엽서M" panose="02030600000101010101" pitchFamily="18" charset="-127"/>
               </a:rPr>
@@ -7309,76 +7472,21 @@
           </a:p>
           <a:p>
             <a:r>
-              <a:rPr lang="ko-KR" altLang="en-US" sz="1200" dirty="0">
-                <a:latin typeface="HY엽서M" panose="02030600000101010101" pitchFamily="18" charset="-127"/>
-                <a:ea typeface="HY엽서M" panose="02030600000101010101" pitchFamily="18" charset="-127"/>
-              </a:rPr>
-              <a:t>화상수술 </a:t>
-            </a:r>
-            <a:r>
-              <a:rPr lang="en-US" altLang="ko-KR" sz="1200" dirty="0">
-                <a:latin typeface="HY엽서M" panose="02030600000101010101" pitchFamily="18" charset="-127"/>
-                <a:ea typeface="HY엽서M" panose="02030600000101010101" pitchFamily="18" charset="-127"/>
-              </a:rPr>
-              <a:t>: </a:t>
-            </a:r>
-          </a:p>
-          <a:p>
-            <a:r>
-              <a:rPr lang="ko-KR" altLang="en-US" sz="1200" dirty="0">
-                <a:latin typeface="HY엽서M" panose="02030600000101010101" pitchFamily="18" charset="-127"/>
-                <a:ea typeface="HY엽서M" panose="02030600000101010101" pitchFamily="18" charset="-127"/>
-              </a:rPr>
-              <a:t>중대상해수술 </a:t>
-            </a:r>
-            <a:r>
-              <a:rPr lang="en-US" altLang="ko-KR" sz="1200" dirty="0">
-                <a:latin typeface="HY엽서M" panose="02030600000101010101" pitchFamily="18" charset="-127"/>
-                <a:ea typeface="HY엽서M" panose="02030600000101010101" pitchFamily="18" charset="-127"/>
-              </a:rPr>
-              <a:t>: </a:t>
-            </a:r>
-          </a:p>
-          <a:p>
-            <a:r>
-              <a:rPr lang="ko-KR" altLang="en-US" sz="1200" dirty="0" err="1">
-                <a:latin typeface="HY엽서M" panose="02030600000101010101" pitchFamily="18" charset="-127"/>
-                <a:ea typeface="HY엽서M" panose="02030600000101010101" pitchFamily="18" charset="-127"/>
-              </a:rPr>
-              <a:t>창상봉합수술</a:t>
-            </a:r>
-            <a:r>
-              <a:rPr lang="ko-KR" altLang="en-US" sz="1200" dirty="0">
-                <a:latin typeface="HY엽서M" panose="02030600000101010101" pitchFamily="18" charset="-127"/>
-                <a:ea typeface="HY엽서M" panose="02030600000101010101" pitchFamily="18" charset="-127"/>
-              </a:rPr>
-              <a:t> </a:t>
-            </a:r>
-            <a:r>
-              <a:rPr lang="en-US" altLang="ko-KR" sz="1200" dirty="0">
-                <a:latin typeface="HY엽서M" panose="02030600000101010101" pitchFamily="18" charset="-127"/>
-                <a:ea typeface="HY엽서M" panose="02030600000101010101" pitchFamily="18" charset="-127"/>
-              </a:rPr>
-              <a:t>: </a:t>
-            </a:r>
-          </a:p>
-          <a:p>
-            <a:r>
-              <a:rPr lang="en-US" altLang="ko-KR" sz="1200" dirty="0">
+              <a:rPr lang="en-US" altLang="ko-KR" sz="1000" dirty="0">
                 <a:latin typeface="HY엽서M" panose="02030600000101010101" pitchFamily="18" charset="-127"/>
                 <a:ea typeface="HY엽서M" panose="02030600000101010101" pitchFamily="18" charset="-127"/>
               </a:rPr>
               <a:t>________</a:t>
             </a:r>
             <a:r>
-              <a:rPr lang="ko-KR" altLang="en-US" sz="1200" dirty="0">
+              <a:rPr lang="ko-KR" altLang="en-US" sz="1000" dirty="0">
                 <a:latin typeface="HY엽서M" panose="02030600000101010101" pitchFamily="18" charset="-127"/>
                 <a:ea typeface="HY엽서M" panose="02030600000101010101" pitchFamily="18" charset="-127"/>
               </a:rPr>
               <a:t>수술 </a:t>
             </a:r>
             <a:r>
-              <a:rPr lang="en-US" altLang="ko-KR" sz="1200" dirty="0">
+              <a:rPr lang="en-US" altLang="ko-KR" sz="1000" dirty="0">
                 <a:latin typeface="HY엽서M" panose="02030600000101010101" pitchFamily="18" charset="-127"/>
                 <a:ea typeface="HY엽서M" panose="02030600000101010101" pitchFamily="18" charset="-127"/>
               </a:rPr>
@@ -7406,7 +7514,7 @@
         <p:spPr>
           <a:xfrm>
             <a:off x="122009" y="7875924"/>
-            <a:ext cx="3197963" cy="1754326"/>
+            <a:ext cx="2792752" cy="1631216"/>
           </a:xfrm>
           <a:prstGeom prst="rect">
             <a:avLst/>
@@ -7417,34 +7525,37 @@
           </a:ln>
         </p:spPr>
         <p:txBody>
-          <a:bodyPr wrap="square" rtlCol="0">
+          <a:bodyPr wrap="none" rtlCol="0">
             <a:spAutoFit/>
           </a:bodyPr>
           <a:lstStyle/>
           <a:p>
             <a:r>
-              <a:rPr lang="ko-KR" altLang="en-US" sz="1200" dirty="0">
+              <a:rPr lang="ko-KR" altLang="en-US" sz="1000" dirty="0">
                 <a:latin typeface="HY엽서M" panose="02030600000101010101" pitchFamily="18" charset="-127"/>
                 <a:ea typeface="HY엽서M" panose="02030600000101010101" pitchFamily="18" charset="-127"/>
               </a:rPr>
               <a:t>질병일당 </a:t>
             </a:r>
             <a:r>
-              <a:rPr lang="en-US" altLang="ko-KR" sz="1200" dirty="0">
-                <a:latin typeface="HY엽서M" panose="02030600000101010101" pitchFamily="18" charset="-127"/>
-                <a:ea typeface="HY엽서M" panose="02030600000101010101" pitchFamily="18" charset="-127"/>
-              </a:rPr>
-              <a:t>:             / _____</a:t>
-            </a:r>
-            <a:r>
-              <a:rPr lang="ko-KR" altLang="en-US" sz="1200" dirty="0">
-                <a:latin typeface="HY엽서M" panose="02030600000101010101" pitchFamily="18" charset="-127"/>
-                <a:ea typeface="HY엽서M" panose="02030600000101010101" pitchFamily="18" charset="-127"/>
-              </a:rPr>
-              <a:t>병원일당 </a:t>
-            </a:r>
-            <a:r>
-              <a:rPr lang="en-US" altLang="ko-KR" sz="1200" dirty="0">
+              <a:rPr lang="en-US" altLang="ko-KR" sz="1000" dirty="0">
+                <a:solidFill>
+                  <a:srgbClr val="000000"/>
+                </a:solidFill>
+                <a:latin typeface="HY엽서M" panose="02030600000101010101" pitchFamily="18" charset="-127"/>
+                <a:ea typeface="HY엽서M" panose="02030600000101010101" pitchFamily="18" charset="-127"/>
+              </a:rPr>
+              <a:t>:              / </a:t>
+            </a:r>
+            <a:r>
+              <a:rPr lang="ko-KR" altLang="en-US" sz="1000" dirty="0">
+                <a:latin typeface="HY엽서M" panose="02030600000101010101" pitchFamily="18" charset="-127"/>
+                <a:ea typeface="HY엽서M" panose="02030600000101010101" pitchFamily="18" charset="-127"/>
+              </a:rPr>
+              <a:t>질병종합병원일당 </a:t>
+            </a:r>
+            <a:r>
+              <a:rPr lang="en-US" altLang="ko-KR" sz="1000" dirty="0">
                 <a:latin typeface="HY엽서M" panose="02030600000101010101" pitchFamily="18" charset="-127"/>
                 <a:ea typeface="HY엽서M" panose="02030600000101010101" pitchFamily="18" charset="-127"/>
               </a:rPr>
@@ -7453,28 +7564,31 @@
           </a:p>
           <a:p>
             <a:r>
-              <a:rPr lang="ko-KR" altLang="en-US" sz="1200" dirty="0">
+              <a:rPr lang="ko-KR" altLang="en-US" sz="1000" dirty="0">
                 <a:latin typeface="HY엽서M" panose="02030600000101010101" pitchFamily="18" charset="-127"/>
                 <a:ea typeface="HY엽서M" panose="02030600000101010101" pitchFamily="18" charset="-127"/>
               </a:rPr>
               <a:t>상해일당 </a:t>
             </a:r>
             <a:r>
-              <a:rPr lang="en-US" altLang="ko-KR" sz="1200" dirty="0">
-                <a:latin typeface="HY엽서M" panose="02030600000101010101" pitchFamily="18" charset="-127"/>
-                <a:ea typeface="HY엽서M" panose="02030600000101010101" pitchFamily="18" charset="-127"/>
-              </a:rPr>
-              <a:t>:             / _____</a:t>
-            </a:r>
-            <a:r>
-              <a:rPr lang="ko-KR" altLang="en-US" sz="1200" dirty="0">
-                <a:latin typeface="HY엽서M" panose="02030600000101010101" pitchFamily="18" charset="-127"/>
-                <a:ea typeface="HY엽서M" panose="02030600000101010101" pitchFamily="18" charset="-127"/>
-              </a:rPr>
-              <a:t>병원일당 </a:t>
-            </a:r>
-            <a:r>
-              <a:rPr lang="en-US" altLang="ko-KR" sz="1200" dirty="0">
+              <a:rPr lang="en-US" altLang="ko-KR" sz="1000" dirty="0">
+                <a:solidFill>
+                  <a:srgbClr val="000000"/>
+                </a:solidFill>
+                <a:latin typeface="HY엽서M" panose="02030600000101010101" pitchFamily="18" charset="-127"/>
+                <a:ea typeface="HY엽서M" panose="02030600000101010101" pitchFamily="18" charset="-127"/>
+              </a:rPr>
+              <a:t>:             / </a:t>
+            </a:r>
+            <a:r>
+              <a:rPr lang="ko-KR" altLang="en-US" sz="1000" dirty="0">
+                <a:latin typeface="HY엽서M" panose="02030600000101010101" pitchFamily="18" charset="-127"/>
+                <a:ea typeface="HY엽서M" panose="02030600000101010101" pitchFamily="18" charset="-127"/>
+              </a:rPr>
+              <a:t>상해종합병원일당 </a:t>
+            </a:r>
+            <a:r>
+              <a:rPr lang="en-US" altLang="ko-KR" sz="1000" dirty="0">
                 <a:latin typeface="HY엽서M" panose="02030600000101010101" pitchFamily="18" charset="-127"/>
                 <a:ea typeface="HY엽서M" panose="02030600000101010101" pitchFamily="18" charset="-127"/>
               </a:rPr>
@@ -7483,65 +7597,74 @@
           </a:p>
           <a:p>
             <a:r>
-              <a:rPr lang="ko-KR" altLang="en-US" sz="1200" dirty="0" err="1">
+              <a:rPr lang="ko-KR" altLang="en-US" sz="1000" dirty="0" err="1">
                 <a:latin typeface="HY엽서M" panose="02030600000101010101" pitchFamily="18" charset="-127"/>
                 <a:ea typeface="HY엽서M" panose="02030600000101010101" pitchFamily="18" charset="-127"/>
               </a:rPr>
               <a:t>질병중환자실</a:t>
             </a:r>
             <a:r>
-              <a:rPr lang="ko-KR" altLang="en-US" sz="1200" dirty="0">
+              <a:rPr lang="ko-KR" altLang="en-US" sz="1000" dirty="0">
                 <a:latin typeface="HY엽서M" panose="02030600000101010101" pitchFamily="18" charset="-127"/>
                 <a:ea typeface="HY엽서M" panose="02030600000101010101" pitchFamily="18" charset="-127"/>
               </a:rPr>
               <a:t> </a:t>
             </a:r>
             <a:r>
-              <a:rPr lang="en-US" altLang="ko-KR" sz="1200" dirty="0">
+              <a:rPr lang="en-US" altLang="ko-KR" sz="1000" dirty="0">
                 <a:latin typeface="HY엽서M" panose="02030600000101010101" pitchFamily="18" charset="-127"/>
                 <a:ea typeface="HY엽서M" panose="02030600000101010101" pitchFamily="18" charset="-127"/>
               </a:rPr>
               <a:t>:       / </a:t>
             </a:r>
             <a:r>
-              <a:rPr lang="ko-KR" altLang="en-US" sz="1200" dirty="0" err="1">
+              <a:rPr lang="ko-KR" altLang="en-US" sz="1000" dirty="0" err="1">
                 <a:latin typeface="HY엽서M" panose="02030600000101010101" pitchFamily="18" charset="-127"/>
                 <a:ea typeface="HY엽서M" panose="02030600000101010101" pitchFamily="18" charset="-127"/>
               </a:rPr>
               <a:t>상해중환자실</a:t>
             </a:r>
             <a:r>
-              <a:rPr lang="ko-KR" altLang="en-US" sz="1200" dirty="0">
+              <a:rPr lang="ko-KR" altLang="en-US" sz="1000" dirty="0">
                 <a:latin typeface="HY엽서M" panose="02030600000101010101" pitchFamily="18" charset="-127"/>
                 <a:ea typeface="HY엽서M" panose="02030600000101010101" pitchFamily="18" charset="-127"/>
               </a:rPr>
               <a:t> </a:t>
             </a:r>
             <a:r>
-              <a:rPr lang="en-US" altLang="ko-KR" sz="1200" dirty="0">
-                <a:latin typeface="HY엽서M" panose="02030600000101010101" pitchFamily="18" charset="-127"/>
-                <a:ea typeface="HY엽서M" panose="02030600000101010101" pitchFamily="18" charset="-127"/>
-              </a:rPr>
-              <a:t>:  </a:t>
-            </a:r>
-          </a:p>
-          <a:p>
-            <a:r>
-              <a:rPr lang="en-US" altLang="ko-KR" sz="1200" dirty="0">
+              <a:rPr lang="en-US" altLang="ko-KR" sz="1000" dirty="0">
+                <a:latin typeface="HY엽서M" panose="02030600000101010101" pitchFamily="18" charset="-127"/>
+                <a:ea typeface="HY엽서M" panose="02030600000101010101" pitchFamily="18" charset="-127"/>
+              </a:rPr>
+              <a:t>:</a:t>
+            </a:r>
+          </a:p>
+          <a:p>
+            <a:r>
+              <a:rPr lang="en-US" altLang="ko-KR" sz="1000" dirty="0">
+                <a:latin typeface="HY엽서M" panose="02030600000101010101" pitchFamily="18" charset="-127"/>
+                <a:ea typeface="HY엽서M" panose="02030600000101010101" pitchFamily="18" charset="-127"/>
+              </a:rPr>
+              <a:t>  </a:t>
+            </a:r>
+          </a:p>
+          <a:p>
+            <a:r>
+              <a:rPr lang="en-US" altLang="ko-KR" sz="1000" dirty="0">
                 <a:latin typeface="HY엽서M" panose="02030600000101010101" pitchFamily="18" charset="-127"/>
                 <a:ea typeface="HY엽서M" panose="02030600000101010101" pitchFamily="18" charset="-127"/>
               </a:rPr>
               <a:t>1</a:t>
             </a:r>
             <a:r>
-              <a:rPr lang="ko-KR" altLang="en-US" sz="1200" dirty="0">
+              <a:rPr lang="ko-KR" altLang="en-US" sz="1000" dirty="0">
                 <a:latin typeface="HY엽서M" panose="02030600000101010101" pitchFamily="18" charset="-127"/>
                 <a:ea typeface="HY엽서M" panose="02030600000101010101" pitchFamily="18" charset="-127"/>
               </a:rPr>
               <a:t>인실 상급병원일당 </a:t>
             </a:r>
             <a:r>
-              <a:rPr lang="en-US" altLang="ko-KR" sz="1200" dirty="0">
+              <a:rPr lang="en-US" altLang="ko-KR" sz="1000" dirty="0">
                 <a:latin typeface="HY엽서M" panose="02030600000101010101" pitchFamily="18" charset="-127"/>
                 <a:ea typeface="HY엽서M" panose="02030600000101010101" pitchFamily="18" charset="-127"/>
               </a:rPr>
@@ -7550,21 +7673,21 @@
           </a:p>
           <a:p>
             <a:r>
-              <a:rPr lang="en-US" altLang="ko-KR" sz="1200" dirty="0">
+              <a:rPr lang="en-US" altLang="ko-KR" sz="1000" dirty="0">
                 <a:latin typeface="HY엽서M" panose="02030600000101010101" pitchFamily="18" charset="-127"/>
                 <a:ea typeface="HY엽서M" panose="02030600000101010101" pitchFamily="18" charset="-127"/>
               </a:rPr>
               <a:t>1</a:t>
             </a:r>
             <a:r>
-              <a:rPr lang="ko-KR" altLang="en-US" sz="1200" dirty="0">
+              <a:rPr lang="ko-KR" altLang="en-US" sz="1000" dirty="0">
                 <a:latin typeface="HY엽서M" panose="02030600000101010101" pitchFamily="18" charset="-127"/>
                 <a:ea typeface="HY엽서M" panose="02030600000101010101" pitchFamily="18" charset="-127"/>
               </a:rPr>
               <a:t>인실 종합병원일당 </a:t>
             </a:r>
             <a:r>
-              <a:rPr lang="en-US" altLang="ko-KR" sz="1200" dirty="0">
+              <a:rPr lang="en-US" altLang="ko-KR" sz="1000" dirty="0">
                 <a:latin typeface="HY엽서M" panose="02030600000101010101" pitchFamily="18" charset="-127"/>
                 <a:ea typeface="HY엽서M" panose="02030600000101010101" pitchFamily="18" charset="-127"/>
               </a:rPr>
@@ -7573,49 +7696,49 @@
           </a:p>
           <a:p>
             <a:r>
-              <a:rPr lang="ko-KR" altLang="en-US" sz="1200" dirty="0" err="1">
+              <a:rPr lang="ko-KR" altLang="en-US" sz="1000" dirty="0" err="1">
                 <a:latin typeface="HY엽서M" panose="02030600000101010101" pitchFamily="18" charset="-127"/>
                 <a:ea typeface="HY엽서M" panose="02030600000101010101" pitchFamily="18" charset="-127"/>
               </a:rPr>
               <a:t>암일당</a:t>
             </a:r>
             <a:r>
-              <a:rPr lang="ko-KR" altLang="en-US" sz="1200" dirty="0">
+              <a:rPr lang="ko-KR" altLang="en-US" sz="1000" dirty="0">
                 <a:latin typeface="HY엽서M" panose="02030600000101010101" pitchFamily="18" charset="-127"/>
                 <a:ea typeface="HY엽서M" panose="02030600000101010101" pitchFamily="18" charset="-127"/>
               </a:rPr>
               <a:t> </a:t>
             </a:r>
             <a:r>
-              <a:rPr lang="en-US" altLang="ko-KR" sz="1200" dirty="0">
+              <a:rPr lang="en-US" altLang="ko-KR" sz="1000" dirty="0">
                 <a:latin typeface="HY엽서M" panose="02030600000101010101" pitchFamily="18" charset="-127"/>
                 <a:ea typeface="HY엽서M" panose="02030600000101010101" pitchFamily="18" charset="-127"/>
               </a:rPr>
               <a:t>:          /</a:t>
             </a:r>
             <a:r>
-              <a:rPr lang="ko-KR" altLang="en-US" sz="1200" dirty="0">
+              <a:rPr lang="ko-KR" altLang="en-US" sz="1000" dirty="0">
                 <a:latin typeface="HY엽서M" panose="02030600000101010101" pitchFamily="18" charset="-127"/>
                 <a:ea typeface="HY엽서M" panose="02030600000101010101" pitchFamily="18" charset="-127"/>
               </a:rPr>
               <a:t> </a:t>
             </a:r>
             <a:r>
-              <a:rPr lang="en-US" altLang="ko-KR" sz="1200" dirty="0">
+              <a:rPr lang="en-US" altLang="ko-KR" sz="1000" dirty="0">
                 <a:latin typeface="HY엽서M" panose="02030600000101010101" pitchFamily="18" charset="-127"/>
                 <a:ea typeface="HY엽서M" panose="02030600000101010101" pitchFamily="18" charset="-127"/>
               </a:rPr>
               <a:t>_______</a:t>
             </a:r>
             <a:r>
-              <a:rPr lang="ko-KR" altLang="en-US" sz="1200" dirty="0">
+              <a:rPr lang="ko-KR" altLang="en-US" sz="1000" dirty="0">
                 <a:latin typeface="HY엽서M" panose="02030600000101010101" pitchFamily="18" charset="-127"/>
                 <a:ea typeface="HY엽서M" panose="02030600000101010101" pitchFamily="18" charset="-127"/>
               </a:rPr>
               <a:t>일당 </a:t>
             </a:r>
             <a:r>
-              <a:rPr lang="en-US" altLang="ko-KR" sz="1200" dirty="0">
+              <a:rPr lang="en-US" altLang="ko-KR" sz="1000" dirty="0">
                 <a:latin typeface="HY엽서M" panose="02030600000101010101" pitchFamily="18" charset="-127"/>
                 <a:ea typeface="HY엽서M" panose="02030600000101010101" pitchFamily="18" charset="-127"/>
               </a:rPr>
@@ -7624,7 +7747,7 @@
           </a:p>
           <a:p>
             <a:r>
-              <a:rPr lang="en-US" altLang="ko-KR" sz="1200" dirty="0">
+              <a:rPr lang="en-US" altLang="ko-KR" sz="1000" dirty="0">
                 <a:latin typeface="HY엽서M" panose="02030600000101010101" pitchFamily="18" charset="-127"/>
                 <a:ea typeface="HY엽서M" panose="02030600000101010101" pitchFamily="18" charset="-127"/>
               </a:rPr>
@@ -7633,28 +7756,28 @@
           </a:p>
           <a:p>
             <a:r>
-              <a:rPr lang="ko-KR" altLang="en-US" sz="1200" dirty="0">
+              <a:rPr lang="ko-KR" altLang="en-US" sz="1000" dirty="0">
                 <a:latin typeface="HY엽서M" panose="02030600000101010101" pitchFamily="18" charset="-127"/>
                 <a:ea typeface="HY엽서M" panose="02030600000101010101" pitchFamily="18" charset="-127"/>
               </a:rPr>
               <a:t>간병인일당 </a:t>
             </a:r>
             <a:r>
-              <a:rPr lang="en-US" altLang="ko-KR" sz="1200" dirty="0">
+              <a:rPr lang="en-US" altLang="ko-KR" sz="1000" dirty="0">
                 <a:latin typeface="HY엽서M" panose="02030600000101010101" pitchFamily="18" charset="-127"/>
                 <a:ea typeface="HY엽서M" panose="02030600000101010101" pitchFamily="18" charset="-127"/>
               </a:rPr>
               <a:t>:          / </a:t>
             </a:r>
             <a:r>
-              <a:rPr lang="ko-KR" altLang="en-US" sz="1200" dirty="0">
+              <a:rPr lang="ko-KR" altLang="en-US" sz="1000" dirty="0">
                 <a:latin typeface="HY엽서M" panose="02030600000101010101" pitchFamily="18" charset="-127"/>
                 <a:ea typeface="HY엽서M" panose="02030600000101010101" pitchFamily="18" charset="-127"/>
               </a:rPr>
               <a:t>요양병원 </a:t>
             </a:r>
             <a:r>
-              <a:rPr lang="en-US" altLang="ko-KR" sz="1200" dirty="0">
+              <a:rPr lang="en-US" altLang="ko-KR" sz="1000" dirty="0">
                 <a:latin typeface="HY엽서M" panose="02030600000101010101" pitchFamily="18" charset="-127"/>
                 <a:ea typeface="HY엽서M" panose="02030600000101010101" pitchFamily="18" charset="-127"/>
               </a:rPr>
@@ -7663,25 +7786,25 @@
           </a:p>
           <a:p>
             <a:r>
-              <a:rPr lang="ko-KR" altLang="en-US" sz="1200" dirty="0" err="1">
+              <a:rPr lang="ko-KR" altLang="en-US" sz="1000" dirty="0" err="1">
                 <a:latin typeface="HY엽서M" panose="02030600000101010101" pitchFamily="18" charset="-127"/>
                 <a:ea typeface="HY엽서M" panose="02030600000101010101" pitchFamily="18" charset="-127"/>
               </a:rPr>
               <a:t>간호통합병동일당</a:t>
             </a:r>
             <a:r>
-              <a:rPr lang="ko-KR" altLang="en-US" sz="1200" dirty="0">
+              <a:rPr lang="ko-KR" altLang="en-US" sz="1000" dirty="0">
                 <a:latin typeface="HY엽서M" panose="02030600000101010101" pitchFamily="18" charset="-127"/>
                 <a:ea typeface="HY엽서M" panose="02030600000101010101" pitchFamily="18" charset="-127"/>
               </a:rPr>
               <a:t> </a:t>
             </a:r>
             <a:r>
-              <a:rPr lang="en-US" altLang="ko-KR" sz="1200" dirty="0">
-                <a:latin typeface="HY엽서M" panose="02030600000101010101" pitchFamily="18" charset="-127"/>
-                <a:ea typeface="HY엽서M" panose="02030600000101010101" pitchFamily="18" charset="-127"/>
-              </a:rPr>
-              <a:t>:    </a:t>
+              <a:rPr lang="en-US" altLang="ko-KR" sz="1000" dirty="0">
+                <a:latin typeface="HY엽서M" panose="02030600000101010101" pitchFamily="18" charset="-127"/>
+                <a:ea typeface="HY엽서M" panose="02030600000101010101" pitchFamily="18" charset="-127"/>
+              </a:rPr>
+              <a:t>:   / 간병인지원일당 : </a:t>
             </a:r>
           </a:p>
         </p:txBody>
@@ -7708,24 +7831,103 @@
           </a:bodyPr>
           <a:lstStyle/>
           <a:p>
-            <a:r>
-              <a:rPr sz="1100"/>
-              <a:t>협심증/심부전/염증 </a:t>
-            </a:r>
-            <a:r>
-              <a:rPr sz="1100"/>
-              <a:t/>
-            </a:r>
-          </a:p>
-          <a:p>
-            <a:r>
-              <a:rPr sz="1100"/>
+            <a:endParaRPr/>
+          </a:p>
+          <a:p>
+            <a:endParaRPr/>
+          </a:p>
+        </p:txBody>
+      </p:sp>
+      <p:sp>
+        <p:nvSpPr>
+          <p:cNvPr id="5" name="TextBox 4">
+            <a:extLst>
+              <a:ext uri="{FF2B5EF4-FFF2-40B4-BE49-F238E27FC236}">
+                <a16:creationId xmlns:a16="http://schemas.microsoft.com/office/drawing/2014/main" id="{9CD1F51E-58FF-E086-16CF-5E4D04E74E31}"/>
+              </a:ext>
+            </a:extLst>
+          </p:cNvPr>
+          <p:cNvSpPr txBox="1"/>
+          <p:nvPr/>
+        </p:nvSpPr>
+        <p:spPr>
+          <a:xfrm>
+            <a:off x="4123016" y="1516746"/>
+            <a:ext cx="1282723" cy="400110"/>
+          </a:xfrm>
+          <a:prstGeom prst="rect">
+            <a:avLst/>
+          </a:prstGeom>
+          <a:noFill/>
+          <a:ln>
+            <a:noFill/>
+          </a:ln>
+        </p:spPr>
+        <p:txBody>
+          <a:bodyPr wrap="none" rtlCol="0">
+            <a:spAutoFit/>
+          </a:bodyPr>
+          <a:lstStyle/>
+          <a:p>
+            <a:r>
+              <a:rPr lang="ko-KR" altLang="en-US" sz="1000" dirty="0">
+                <a:latin typeface="HY엽서M" panose="02030600000101010101" pitchFamily="18" charset="-127"/>
+                <a:ea typeface="HY엽서M" panose="02030600000101010101" pitchFamily="18" charset="-127"/>
+              </a:rPr>
+              <a:t>협심증 </a:t>
+            </a:r>
+            <a:r>
+              <a:rPr lang="en-US" altLang="ko-KR" sz="1000" dirty="0">
+                <a:latin typeface="HY엽서M" panose="02030600000101010101" pitchFamily="18" charset="-127"/>
+                <a:ea typeface="HY엽서M" panose="02030600000101010101" pitchFamily="18" charset="-127"/>
+              </a:rPr>
+              <a:t>/ </a:t>
+            </a:r>
+            <a:r>
+              <a:rPr lang="ko-KR" altLang="en-US" sz="1000" dirty="0">
+                <a:latin typeface="HY엽서M" panose="02030600000101010101" pitchFamily="18" charset="-127"/>
+                <a:ea typeface="HY엽서M" panose="02030600000101010101" pitchFamily="18" charset="-127"/>
+              </a:rPr>
+              <a:t>심부전 </a:t>
+            </a:r>
+            <a:r>
+              <a:rPr lang="en-US" altLang="ko-KR" sz="1000" dirty="0">
+                <a:latin typeface="HY엽서M" panose="02030600000101010101" pitchFamily="18" charset="-127"/>
+                <a:ea typeface="HY엽서M" panose="02030600000101010101" pitchFamily="18" charset="-127"/>
+              </a:rPr>
+              <a:t>: </a:t>
+            </a:r>
+            <a:r>
+              <a:rPr lang="ko-KR" altLang="en-US" sz="1000" dirty="0">
+                <a:latin typeface="HY엽서M" panose="02030600000101010101" pitchFamily="18" charset="-127"/>
+                <a:ea typeface="HY엽서M" panose="02030600000101010101" pitchFamily="18" charset="-127"/>
+              </a:rPr>
+              <a:t> </a:t>
+            </a:r>
+            <a:endParaRPr lang="en-US" altLang="ko-KR" sz="1000" dirty="0">
+              <a:latin typeface="HY엽서M" panose="02030600000101010101" pitchFamily="18" charset="-127"/>
+              <a:ea typeface="HY엽서M" panose="02030600000101010101" pitchFamily="18" charset="-127"/>
+            </a:endParaRPr>
+          </a:p>
+          <a:p>
+            <a:r>
+              <a:rPr lang="ko-KR" altLang="en-US" sz="1000" dirty="0">
+                <a:latin typeface="HY엽서M" panose="02030600000101010101" pitchFamily="18" charset="-127"/>
+                <a:ea typeface="HY엽서M" panose="02030600000101010101" pitchFamily="18" charset="-127"/>
+              </a:rPr>
               <a:t>부정맥 </a:t>
             </a:r>
             <a:r>
-              <a:rPr sz="1100"/>
-              <a:t/>
-            </a:r>
+              <a:rPr lang="en-US" altLang="ko-KR" sz="1000" dirty="0">
+                <a:latin typeface="HY엽서M" panose="02030600000101010101" pitchFamily="18" charset="-127"/>
+                <a:ea typeface="HY엽서M" panose="02030600000101010101" pitchFamily="18" charset="-127"/>
+              </a:rPr>
+              <a:t>: </a:t>
+            </a:r>
+            <a:endParaRPr lang="ko-KR" altLang="en-US" sz="1000" dirty="0">
+              <a:latin typeface="HY엽서M" panose="02030600000101010101" pitchFamily="18" charset="-127"/>
+              <a:ea typeface="HY엽서M" panose="02030600000101010101" pitchFamily="18" charset="-127"/>
+            </a:endParaRPr>
           </a:p>
         </p:txBody>
       </p:sp>

--- a/ppt_form.pptx
+++ b/ppt_form.pptx
@@ -243,7 +243,7 @@
           <a:p>
             <a:fld id="{9D5F825C-5304-4128-8698-8A30172550A0}" type="datetimeFigureOut">
               <a:rPr lang="ko-KR" altLang="en-US" smtClean="0"/>
-              <a:t>2026-08-02</a:t>
+              <a:t>2026-08-03</a:t>
             </a:fld>
             <a:endParaRPr lang="ko-KR" altLang="en-US"/>
           </a:p>
@@ -413,7 +413,7 @@
           <a:p>
             <a:fld id="{9D5F825C-5304-4128-8698-8A30172550A0}" type="datetimeFigureOut">
               <a:rPr lang="ko-KR" altLang="en-US" smtClean="0"/>
-              <a:t>2026-08-02</a:t>
+              <a:t>2026-08-03</a:t>
             </a:fld>
             <a:endParaRPr lang="ko-KR" altLang="en-US"/>
           </a:p>
@@ -593,7 +593,7 @@
           <a:p>
             <a:fld id="{9D5F825C-5304-4128-8698-8A30172550A0}" type="datetimeFigureOut">
               <a:rPr lang="ko-KR" altLang="en-US" smtClean="0"/>
-              <a:t>2026-08-02</a:t>
+              <a:t>2026-08-03</a:t>
             </a:fld>
             <a:endParaRPr lang="ko-KR" altLang="en-US"/>
           </a:p>
@@ -763,7 +763,7 @@
           <a:p>
             <a:fld id="{9D5F825C-5304-4128-8698-8A30172550A0}" type="datetimeFigureOut">
               <a:rPr lang="ko-KR" altLang="en-US" smtClean="0"/>
-              <a:t>2026-08-02</a:t>
+              <a:t>2026-08-03</a:t>
             </a:fld>
             <a:endParaRPr lang="ko-KR" altLang="en-US"/>
           </a:p>
@@ -1009,7 +1009,7 @@
           <a:p>
             <a:fld id="{9D5F825C-5304-4128-8698-8A30172550A0}" type="datetimeFigureOut">
               <a:rPr lang="ko-KR" altLang="en-US" smtClean="0"/>
-              <a:t>2026-08-02</a:t>
+              <a:t>2026-08-03</a:t>
             </a:fld>
             <a:endParaRPr lang="ko-KR" altLang="en-US"/>
           </a:p>
@@ -1241,7 +1241,7 @@
           <a:p>
             <a:fld id="{9D5F825C-5304-4128-8698-8A30172550A0}" type="datetimeFigureOut">
               <a:rPr lang="ko-KR" altLang="en-US" smtClean="0"/>
-              <a:t>2026-08-02</a:t>
+              <a:t>2026-08-03</a:t>
             </a:fld>
             <a:endParaRPr lang="ko-KR" altLang="en-US"/>
           </a:p>
@@ -1608,7 +1608,7 @@
           <a:p>
             <a:fld id="{9D5F825C-5304-4128-8698-8A30172550A0}" type="datetimeFigureOut">
               <a:rPr lang="ko-KR" altLang="en-US" smtClean="0"/>
-              <a:t>2026-08-02</a:t>
+              <a:t>2026-08-03</a:t>
             </a:fld>
             <a:endParaRPr lang="ko-KR" altLang="en-US"/>
           </a:p>
@@ -1726,7 +1726,7 @@
           <a:p>
             <a:fld id="{9D5F825C-5304-4128-8698-8A30172550A0}" type="datetimeFigureOut">
               <a:rPr lang="ko-KR" altLang="en-US" smtClean="0"/>
-              <a:t>2026-08-02</a:t>
+              <a:t>2026-08-03</a:t>
             </a:fld>
             <a:endParaRPr lang="ko-KR" altLang="en-US"/>
           </a:p>
@@ -1821,7 +1821,7 @@
           <a:p>
             <a:fld id="{9D5F825C-5304-4128-8698-8A30172550A0}" type="datetimeFigureOut">
               <a:rPr lang="ko-KR" altLang="en-US" smtClean="0"/>
-              <a:t>2026-08-02</a:t>
+              <a:t>2026-08-03</a:t>
             </a:fld>
             <a:endParaRPr lang="ko-KR" altLang="en-US"/>
           </a:p>
@@ -2098,7 +2098,7 @@
           <a:p>
             <a:fld id="{9D5F825C-5304-4128-8698-8A30172550A0}" type="datetimeFigureOut">
               <a:rPr lang="ko-KR" altLang="en-US" smtClean="0"/>
-              <a:t>2026-08-02</a:t>
+              <a:t>2026-08-03</a:t>
             </a:fld>
             <a:endParaRPr lang="ko-KR" altLang="en-US"/>
           </a:p>
@@ -2355,7 +2355,7 @@
           <a:p>
             <a:fld id="{9D5F825C-5304-4128-8698-8A30172550A0}" type="datetimeFigureOut">
               <a:rPr lang="ko-KR" altLang="en-US" smtClean="0"/>
-              <a:t>2026-08-02</a:t>
+              <a:t>2026-08-03</a:t>
             </a:fld>
             <a:endParaRPr lang="ko-KR" altLang="en-US"/>
           </a:p>
@@ -2568,7 +2568,7 @@
           <a:p>
             <a:fld id="{9D5F825C-5304-4128-8698-8A30172550A0}" type="datetimeFigureOut">
               <a:rPr lang="ko-KR" altLang="en-US" smtClean="0"/>
-              <a:t>2026-08-02</a:t>
+              <a:t>2026-08-03</a:t>
             </a:fld>
             <a:endParaRPr lang="ko-KR" altLang="en-US"/>
           </a:p>
@@ -7259,19 +7259,19 @@
               <a:t>상해수술 </a:t>
             </a:r>
             <a:r>
-              <a:rPr lang="en-US" altLang="ko-KR" sz="1000" dirty="0">
+              <a:rPr lang="en-US" altLang="ko-KR" sz="1000">
                 <a:solidFill>
                   <a:srgbClr val="000000"/>
                 </a:solidFill>
                 <a:latin typeface="HY엽서M" panose="02030600000101010101" pitchFamily="18" charset="-127"/>
                 <a:ea typeface="HY엽서M" panose="02030600000101010101" pitchFamily="18" charset="-127"/>
               </a:rPr>
-              <a:t>: 200</a:t>
-            </a:r>
-          </a:p>
-          <a:p>
-            <a:r>
-              <a:rPr lang="ko-KR" altLang="en-US" sz="1000" dirty="0">
+              <a:t>: </a:t>
+            </a:r>
+          </a:p>
+          <a:p>
+            <a:r>
+              <a:rPr lang="ko-KR" altLang="en-US" sz="1000">
                 <a:latin typeface="HY엽서M" panose="02030600000101010101" pitchFamily="18" charset="-127"/>
                 <a:ea typeface="HY엽서M" panose="02030600000101010101" pitchFamily="18" charset="-127"/>
               </a:rPr>
@@ -7831,6 +7831,12 @@
           </a:bodyPr>
           <a:lstStyle/>
           <a:p>
+            <a:r>
+              <a:rPr sz="800">
+                <a:latin typeface="HY엽서M"/>
+              </a:rPr>
+              <a:t>빈맥 :        염증 :        심근병증 :        심장판막 : </a:t>
+            </a:r>
             <a:endParaRPr/>
           </a:p>
           <a:p>
@@ -7874,14 +7880,14 @@
                 <a:latin typeface="HY엽서M" panose="02030600000101010101" pitchFamily="18" charset="-127"/>
                 <a:ea typeface="HY엽서M" panose="02030600000101010101" pitchFamily="18" charset="-127"/>
               </a:rPr>
-              <a:t>협심증 </a:t>
-            </a:r>
-            <a:r>
-              <a:rPr lang="en-US" altLang="ko-KR" sz="1000" dirty="0">
-                <a:latin typeface="HY엽서M" panose="02030600000101010101" pitchFamily="18" charset="-127"/>
-                <a:ea typeface="HY엽서M" panose="02030600000101010101" pitchFamily="18" charset="-127"/>
-              </a:rPr>
-              <a:t>/ </a:t>
+              <a:t>협심증 : </a:t>
+            </a:r>
+            <a:r>
+              <a:rPr lang="en-US" altLang="ko-KR" sz="1000" dirty="0">
+                <a:latin typeface="HY엽서M" panose="02030600000101010101" pitchFamily="18" charset="-127"/>
+                <a:ea typeface="HY엽서M" panose="02030600000101010101" pitchFamily="18" charset="-127"/>
+              </a:rPr>
+              <a:t>      </a:t>
             </a:r>
             <a:r>
               <a:rPr lang="ko-KR" altLang="en-US" sz="1000" dirty="0">
@@ -7902,7 +7908,7 @@
                 <a:latin typeface="HY엽서M" panose="02030600000101010101" pitchFamily="18" charset="-127"/>
                 <a:ea typeface="HY엽서M" panose="02030600000101010101" pitchFamily="18" charset="-127"/>
               </a:rPr>
-              <a:t> </a:t>
+              <a:t/>
             </a:r>
             <a:endParaRPr lang="en-US" altLang="ko-KR" sz="1000" dirty="0">
               <a:latin typeface="HY엽서M" panose="02030600000101010101" pitchFamily="18" charset="-127"/>

--- a/ppt_form.pptx
+++ b/ppt_form.pptx
@@ -7835,11 +7835,17 @@
               <a:rPr sz="800">
                 <a:latin typeface="HY엽서M"/>
               </a:rPr>
-              <a:t>빈맥 :        염증 :        심근병증 :        심장판막 : </a:t>
+              <a:t>빈맥 :   염증 :   심근병증 :   심장판막 : </a:t>
             </a:r>
             <a:endParaRPr/>
           </a:p>
           <a:p>
+            <a:r>
+              <a:rPr sz="800">
+                <a:latin typeface="HY엽서M"/>
+              </a:rPr>
+              <a:t>협심증 :   심부전 :   부정맥 : </a:t>
+            </a:r>
             <a:endParaRPr/>
           </a:p>
         </p:txBody>
@@ -7880,28 +7886,28 @@
                 <a:latin typeface="HY엽서M" panose="02030600000101010101" pitchFamily="18" charset="-127"/>
                 <a:ea typeface="HY엽서M" panose="02030600000101010101" pitchFamily="18" charset="-127"/>
               </a:rPr>
-              <a:t>협심증 : </a:t>
-            </a:r>
-            <a:r>
-              <a:rPr lang="en-US" altLang="ko-KR" sz="1000" dirty="0">
-                <a:latin typeface="HY엽서M" panose="02030600000101010101" pitchFamily="18" charset="-127"/>
-                <a:ea typeface="HY엽서M" panose="02030600000101010101" pitchFamily="18" charset="-127"/>
-              </a:rPr>
-              <a:t>      </a:t>
-            </a:r>
-            <a:r>
-              <a:rPr lang="ko-KR" altLang="en-US" sz="1000" dirty="0">
-                <a:latin typeface="HY엽서M" panose="02030600000101010101" pitchFamily="18" charset="-127"/>
-                <a:ea typeface="HY엽서M" panose="02030600000101010101" pitchFamily="18" charset="-127"/>
-              </a:rPr>
-              <a:t>심부전 </a:t>
-            </a:r>
-            <a:r>
-              <a:rPr lang="en-US" altLang="ko-KR" sz="1000" dirty="0">
-                <a:latin typeface="HY엽서M" panose="02030600000101010101" pitchFamily="18" charset="-127"/>
-                <a:ea typeface="HY엽서M" panose="02030600000101010101" pitchFamily="18" charset="-127"/>
-              </a:rPr>
-              <a:t>: </a:t>
+              <a:t/>
+            </a:r>
+            <a:r>
+              <a:rPr lang="en-US" altLang="ko-KR" sz="1000" dirty="0">
+                <a:latin typeface="HY엽서M" panose="02030600000101010101" pitchFamily="18" charset="-127"/>
+                <a:ea typeface="HY엽서M" panose="02030600000101010101" pitchFamily="18" charset="-127"/>
+              </a:rPr>
+              <a:t/>
+            </a:r>
+            <a:r>
+              <a:rPr lang="ko-KR" altLang="en-US" sz="1000" dirty="0">
+                <a:latin typeface="HY엽서M" panose="02030600000101010101" pitchFamily="18" charset="-127"/>
+                <a:ea typeface="HY엽서M" panose="02030600000101010101" pitchFamily="18" charset="-127"/>
+              </a:rPr>
+              <a:t/>
+            </a:r>
+            <a:r>
+              <a:rPr lang="en-US" altLang="ko-KR" sz="1000" dirty="0">
+                <a:latin typeface="HY엽서M" panose="02030600000101010101" pitchFamily="18" charset="-127"/>
+                <a:ea typeface="HY엽서M" panose="02030600000101010101" pitchFamily="18" charset="-127"/>
+              </a:rPr>
+              <a:t/>
             </a:r>
             <a:r>
               <a:rPr lang="ko-KR" altLang="en-US" sz="1000" dirty="0">
@@ -7921,14 +7927,14 @@
                 <a:latin typeface="HY엽서M" panose="02030600000101010101" pitchFamily="18" charset="-127"/>
                 <a:ea typeface="HY엽서M" panose="02030600000101010101" pitchFamily="18" charset="-127"/>
               </a:rPr>
-              <a:t>부정맥 </a:t>
-            </a:r>
-            <a:r>
-              <a:rPr lang="en-US" altLang="ko-KR" sz="1000" dirty="0">
-                <a:latin typeface="HY엽서M" panose="02030600000101010101" pitchFamily="18" charset="-127"/>
-                <a:ea typeface="HY엽서M" panose="02030600000101010101" pitchFamily="18" charset="-127"/>
-              </a:rPr>
-              <a:t>: </a:t>
+              <a:t/>
+            </a:r>
+            <a:r>
+              <a:rPr lang="en-US" altLang="ko-KR" sz="1000" dirty="0">
+                <a:latin typeface="HY엽서M" panose="02030600000101010101" pitchFamily="18" charset="-127"/>
+                <a:ea typeface="HY엽서M" panose="02030600000101010101" pitchFamily="18" charset="-127"/>
+              </a:rPr>
+              <a:t/>
             </a:r>
             <a:endParaRPr lang="ko-KR" altLang="en-US" sz="1000" dirty="0">
               <a:latin typeface="HY엽서M" panose="02030600000101010101" pitchFamily="18" charset="-127"/>

--- a/ppt_form.pptx
+++ b/ppt_form.pptx
@@ -7760,7 +7760,7 @@
                 <a:latin typeface="HY엽서M" panose="02030600000101010101" pitchFamily="18" charset="-127"/>
                 <a:ea typeface="HY엽서M" panose="02030600000101010101" pitchFamily="18" charset="-127"/>
               </a:rPr>
-              <a:t>간병인일당 </a:t>
+              <a:t>간병인 사용일당 </a:t>
             </a:r>
             <a:r>
               <a:rPr lang="en-US" altLang="ko-KR" sz="1000" dirty="0">
@@ -7774,7 +7774,7 @@
                 <a:latin typeface="HY엽서M" panose="02030600000101010101" pitchFamily="18" charset="-127"/>
                 <a:ea typeface="HY엽서M" panose="02030600000101010101" pitchFamily="18" charset="-127"/>
               </a:rPr>
-              <a:t>요양병원 </a:t>
+              <a:t>요양병원 간병인 </a:t>
             </a:r>
             <a:r>
               <a:rPr lang="en-US" altLang="ko-KR" sz="1000" dirty="0">
